--- a/Lecture slides/FOSS A01 - Introduction.pptx
+++ b/Lecture slides/FOSS A01 - Introduction.pptx
@@ -28,6 +28,7 @@
     <p:sldId id="273" r:id="rId24"/>
     <p:sldId id="274" r:id="rId25"/>
     <p:sldId id="275" r:id="rId26"/>
+    <p:sldId id="276" r:id="rId27"/>
   </p:sldIdLst>
   <p:sldSz cy="5143500" cx="9144000"/>
   <p:notesSz cx="6858000" cy="9144000"/>
@@ -57,7 +58,7 @@
         <a:srgbClr val="000000"/>
       </a:buClr>
       <a:buFont typeface="Arial"/>
-      <a:defRPr b="0" i="0" sz="1400" u="none" cap="none" strike="noStrike">
+      <a:defRPr b="0" i="0" spc="0" sz="1400" u="none" cap="none" strike="noStrike">
         <a:solidFill>
           <a:srgbClr val="000000"/>
         </a:solidFill>
@@ -81,7 +82,7 @@
         <a:srgbClr val="000000"/>
       </a:buClr>
       <a:buFont typeface="Arial"/>
-      <a:defRPr b="0" i="0" sz="1400" u="none" cap="none" strike="noStrike">
+      <a:defRPr b="0" i="0" spc="0" sz="1400" u="none" cap="none" strike="noStrike">
         <a:solidFill>
           <a:srgbClr val="000000"/>
         </a:solidFill>
@@ -105,7 +106,7 @@
         <a:srgbClr val="000000"/>
       </a:buClr>
       <a:buFont typeface="Arial"/>
-      <a:defRPr b="0" i="0" sz="1400" u="none" cap="none" strike="noStrike">
+      <a:defRPr b="0" i="0" spc="0" sz="1400" u="none" cap="none" strike="noStrike">
         <a:solidFill>
           <a:srgbClr val="000000"/>
         </a:solidFill>
@@ -129,7 +130,7 @@
         <a:srgbClr val="000000"/>
       </a:buClr>
       <a:buFont typeface="Arial"/>
-      <a:defRPr b="0" i="0" sz="1400" u="none" cap="none" strike="noStrike">
+      <a:defRPr b="0" i="0" spc="0" sz="1400" u="none" cap="none" strike="noStrike">
         <a:solidFill>
           <a:srgbClr val="000000"/>
         </a:solidFill>
@@ -153,7 +154,7 @@
         <a:srgbClr val="000000"/>
       </a:buClr>
       <a:buFont typeface="Arial"/>
-      <a:defRPr b="0" i="0" sz="1400" u="none" cap="none" strike="noStrike">
+      <a:defRPr b="0" i="0" spc="0" sz="1400" u="none" cap="none" strike="noStrike">
         <a:solidFill>
           <a:srgbClr val="000000"/>
         </a:solidFill>
@@ -177,7 +178,7 @@
         <a:srgbClr val="000000"/>
       </a:buClr>
       <a:buFont typeface="Arial"/>
-      <a:defRPr b="0" i="0" sz="1400" u="none" cap="none" strike="noStrike">
+      <a:defRPr b="0" i="0" spc="0" sz="1400" u="none" cap="none" strike="noStrike">
         <a:solidFill>
           <a:srgbClr val="000000"/>
         </a:solidFill>
@@ -201,7 +202,7 @@
         <a:srgbClr val="000000"/>
       </a:buClr>
       <a:buFont typeface="Arial"/>
-      <a:defRPr b="0" i="0" sz="1400" u="none" cap="none" strike="noStrike">
+      <a:defRPr b="0" i="0" spc="0" sz="1400" u="none" cap="none" strike="noStrike">
         <a:solidFill>
           <a:srgbClr val="000000"/>
         </a:solidFill>
@@ -225,7 +226,7 @@
         <a:srgbClr val="000000"/>
       </a:buClr>
       <a:buFont typeface="Arial"/>
-      <a:defRPr b="0" i="0" sz="1400" u="none" cap="none" strike="noStrike">
+      <a:defRPr b="0" i="0" spc="0" sz="1400" u="none" cap="none" strike="noStrike">
         <a:solidFill>
           <a:srgbClr val="000000"/>
         </a:solidFill>
@@ -249,7 +250,7 @@
         <a:srgbClr val="000000"/>
       </a:buClr>
       <a:buFont typeface="Arial"/>
-      <a:defRPr b="0" i="0" sz="1400" u="none" cap="none" strike="noStrike">
+      <a:defRPr b="0" i="0" spc="0" sz="1400" u="none" cap="none" strike="noStrike">
         <a:solidFill>
           <a:srgbClr val="000000"/>
         </a:solidFill>
@@ -499,7 +500,7 @@
         <a:srgbClr val="000000"/>
       </a:buClr>
       <a:buFont typeface="Arial"/>
-      <a:defRPr b="0" i="0" sz="1400" u="none" cap="none" strike="noStrike">
+      <a:defRPr b="0" i="0" spc="0" sz="1400" u="none" cap="none" strike="noStrike">
         <a:solidFill>
           <a:srgbClr val="000000"/>
         </a:solidFill>
@@ -523,7 +524,7 @@
         <a:srgbClr val="000000"/>
       </a:buClr>
       <a:buFont typeface="Arial"/>
-      <a:defRPr b="0" i="0" sz="1400" u="none" cap="none" strike="noStrike">
+      <a:defRPr b="0" i="0" spc="0" sz="1400" u="none" cap="none" strike="noStrike">
         <a:solidFill>
           <a:srgbClr val="000000"/>
         </a:solidFill>
@@ -547,7 +548,7 @@
         <a:srgbClr val="000000"/>
       </a:buClr>
       <a:buFont typeface="Arial"/>
-      <a:defRPr b="0" i="0" sz="1400" u="none" cap="none" strike="noStrike">
+      <a:defRPr b="0" i="0" spc="0" sz="1400" u="none" cap="none" strike="noStrike">
         <a:solidFill>
           <a:srgbClr val="000000"/>
         </a:solidFill>
@@ -571,7 +572,7 @@
         <a:srgbClr val="000000"/>
       </a:buClr>
       <a:buFont typeface="Arial"/>
-      <a:defRPr b="0" i="0" sz="1400" u="none" cap="none" strike="noStrike">
+      <a:defRPr b="0" i="0" spc="0" sz="1400" u="none" cap="none" strike="noStrike">
         <a:solidFill>
           <a:srgbClr val="000000"/>
         </a:solidFill>
@@ -595,7 +596,7 @@
         <a:srgbClr val="000000"/>
       </a:buClr>
       <a:buFont typeface="Arial"/>
-      <a:defRPr b="0" i="0" sz="1400" u="none" cap="none" strike="noStrike">
+      <a:defRPr b="0" i="0" spc="0" sz="1400" u="none" cap="none" strike="noStrike">
         <a:solidFill>
           <a:srgbClr val="000000"/>
         </a:solidFill>
@@ -619,7 +620,7 @@
         <a:srgbClr val="000000"/>
       </a:buClr>
       <a:buFont typeface="Arial"/>
-      <a:defRPr b="0" i="0" sz="1400" u="none" cap="none" strike="noStrike">
+      <a:defRPr b="0" i="0" spc="0" sz="1400" u="none" cap="none" strike="noStrike">
         <a:solidFill>
           <a:srgbClr val="000000"/>
         </a:solidFill>
@@ -643,7 +644,7 @@
         <a:srgbClr val="000000"/>
       </a:buClr>
       <a:buFont typeface="Arial"/>
-      <a:defRPr b="0" i="0" sz="1400" u="none" cap="none" strike="noStrike">
+      <a:defRPr b="0" i="0" spc="0" sz="1400" u="none" cap="none" strike="noStrike">
         <a:solidFill>
           <a:srgbClr val="000000"/>
         </a:solidFill>
@@ -667,7 +668,7 @@
         <a:srgbClr val="000000"/>
       </a:buClr>
       <a:buFont typeface="Arial"/>
-      <a:defRPr b="0" i="0" sz="1400" u="none" cap="none" strike="noStrike">
+      <a:defRPr b="0" i="0" spc="0" sz="1400" u="none" cap="none" strike="noStrike">
         <a:solidFill>
           <a:srgbClr val="000000"/>
         </a:solidFill>
@@ -691,7 +692,7 @@
         <a:srgbClr val="000000"/>
       </a:buClr>
       <a:buFont typeface="Arial"/>
-      <a:defRPr b="0" i="0" sz="1400" u="none" cap="none" strike="noStrike">
+      <a:defRPr b="0" i="0" spc="0" sz="1400" u="none" cap="none" strike="noStrike">
         <a:solidFill>
           <a:srgbClr val="000000"/>
         </a:solidFill>
@@ -823,7 +824,7 @@
       </p:grpSpPr>
       <p:sp>
         <p:nvSpPr>
-          <p:cNvPr id="112" name="Google Shape;112;g38a15ddc2d6_0_14:notes"/>
+          <p:cNvPr id="112" name="Google Shape;112;gf5a9b1405f_1_0:notes"/>
           <p:cNvSpPr/>
           <p:nvPr>
             <p:ph idx="2" type="sldImg"/>
@@ -858,7 +859,7 @@
       </p:sp>
       <p:sp>
         <p:nvSpPr>
-          <p:cNvPr id="113" name="Google Shape;113;g38a15ddc2d6_0_14:notes"/>
+          <p:cNvPr id="113" name="Google Shape;113;gf5a9b1405f_1_0:notes"/>
           <p:cNvSpPr txBox="1"/>
           <p:nvPr>
             <p:ph idx="1" type="body"/>
@@ -908,7 +909,7 @@
   <p:cSld>
     <p:spTree>
       <p:nvGrpSpPr>
-        <p:cNvPr id="121" name="Shape 121"/>
+        <p:cNvPr id="118" name="Shape 118"/>
         <p:cNvGrpSpPr/>
         <p:nvPr/>
       </p:nvGrpSpPr>
@@ -922,7 +923,7 @@
       </p:grpSpPr>
       <p:sp>
         <p:nvSpPr>
-          <p:cNvPr id="122" name="Google Shape;122;gf5a9b1405f_1_0:notes"/>
+          <p:cNvPr id="119" name="Google Shape;119;h3cd244f621970db5_0_48:notes"/>
           <p:cNvSpPr/>
           <p:nvPr>
             <p:ph idx="2" type="sldImg"/>
@@ -957,7 +958,7 @@
       </p:sp>
       <p:sp>
         <p:nvSpPr>
-          <p:cNvPr id="123" name="Google Shape;123;gf5a9b1405f_1_0:notes"/>
+          <p:cNvPr id="120" name="Google Shape;120;h3cd244f621970db5_0_48:notes"/>
           <p:cNvSpPr txBox="1"/>
           <p:nvPr>
             <p:ph idx="1" type="body"/>
@@ -1007,7 +1008,7 @@
   <p:cSld>
     <p:spTree>
       <p:nvGrpSpPr>
-        <p:cNvPr id="128" name="Shape 128"/>
+        <p:cNvPr id="125" name="Shape 125"/>
         <p:cNvGrpSpPr/>
         <p:nvPr/>
       </p:nvGrpSpPr>
@@ -1021,7 +1022,7 @@
       </p:grpSpPr>
       <p:sp>
         <p:nvSpPr>
-          <p:cNvPr id="129" name="Google Shape;129;g36c5758db35_0_0:notes"/>
+          <p:cNvPr id="126" name="Google Shape;126;h2505d1ff4dd15079_0_48:notes"/>
           <p:cNvSpPr/>
           <p:nvPr>
             <p:ph idx="2" type="sldImg"/>
@@ -1056,7 +1057,7 @@
       </p:sp>
       <p:sp>
         <p:nvSpPr>
-          <p:cNvPr id="130" name="Google Shape;130;g36c5758db35_0_0:notes"/>
+          <p:cNvPr id="127" name="Google Shape;127;h2505d1ff4dd15079_0_48:notes"/>
           <p:cNvSpPr txBox="1"/>
           <p:nvPr>
             <p:ph idx="1" type="body"/>
@@ -1106,7 +1107,7 @@
   <p:cSld>
     <p:spTree>
       <p:nvGrpSpPr>
-        <p:cNvPr id="136" name="Shape 136"/>
+        <p:cNvPr id="132" name="Shape 132"/>
         <p:cNvGrpSpPr/>
         <p:nvPr/>
       </p:nvGrpSpPr>
@@ -1120,7 +1121,7 @@
       </p:grpSpPr>
       <p:sp>
         <p:nvSpPr>
-          <p:cNvPr id="137" name="Google Shape;137;gdb5ccdfa64_0_0:notes"/>
+          <p:cNvPr id="133" name="Google Shape;133;h5b3ce2b894bc01bc_0_0:notes"/>
           <p:cNvSpPr/>
           <p:nvPr>
             <p:ph idx="2" type="sldImg"/>
@@ -1155,7 +1156,7 @@
       </p:sp>
       <p:sp>
         <p:nvSpPr>
-          <p:cNvPr id="138" name="Google Shape;138;gdb5ccdfa64_0_0:notes"/>
+          <p:cNvPr id="134" name="Google Shape;134;h5b3ce2b894bc01bc_0_0:notes"/>
           <p:cNvSpPr txBox="1"/>
           <p:nvPr>
             <p:ph idx="1" type="body"/>
@@ -1205,7 +1206,7 @@
   <p:cSld>
     <p:spTree>
       <p:nvGrpSpPr>
-        <p:cNvPr id="143" name="Shape 143"/>
+        <p:cNvPr id="139" name="Shape 139"/>
         <p:cNvGrpSpPr/>
         <p:nvPr/>
       </p:nvGrpSpPr>
@@ -1219,7 +1220,7 @@
       </p:grpSpPr>
       <p:sp>
         <p:nvSpPr>
-          <p:cNvPr id="144" name="Google Shape;144;gf157d98dbb_0_133:notes"/>
+          <p:cNvPr id="140" name="Google Shape;140;h3c29e63195308faa_0_50:notes"/>
           <p:cNvSpPr/>
           <p:nvPr>
             <p:ph idx="2" type="sldImg"/>
@@ -1254,7 +1255,7 @@
       </p:sp>
       <p:sp>
         <p:nvSpPr>
-          <p:cNvPr id="145" name="Google Shape;145;gf157d98dbb_0_133:notes"/>
+          <p:cNvPr id="141" name="Google Shape;141;h3c29e63195308faa_0_50:notes"/>
           <p:cNvSpPr txBox="1"/>
           <p:nvPr>
             <p:ph idx="1" type="body"/>
@@ -1304,7 +1305,7 @@
   <p:cSld>
     <p:spTree>
       <p:nvGrpSpPr>
-        <p:cNvPr id="151" name="Shape 151"/>
+        <p:cNvPr id="148" name="Shape 148"/>
         <p:cNvGrpSpPr/>
         <p:nvPr/>
       </p:nvGrpSpPr>
@@ -1318,7 +1319,7 @@
       </p:grpSpPr>
       <p:sp>
         <p:nvSpPr>
-          <p:cNvPr id="152" name="Google Shape;152;gf157d98dbb_1_0:notes"/>
+          <p:cNvPr id="149" name="Google Shape;149;gf157d98dbb_0_133:notes"/>
           <p:cNvSpPr/>
           <p:nvPr>
             <p:ph idx="2" type="sldImg"/>
@@ -1353,7 +1354,7 @@
       </p:sp>
       <p:sp>
         <p:nvSpPr>
-          <p:cNvPr id="153" name="Google Shape;153;gf157d98dbb_1_0:notes"/>
+          <p:cNvPr id="150" name="Google Shape;150;gf157d98dbb_0_133:notes"/>
           <p:cNvSpPr txBox="1"/>
           <p:nvPr>
             <p:ph idx="1" type="body"/>
@@ -1403,7 +1404,7 @@
   <p:cSld>
     <p:spTree>
       <p:nvGrpSpPr>
-        <p:cNvPr id="158" name="Shape 158"/>
+        <p:cNvPr id="156" name="Shape 156"/>
         <p:cNvGrpSpPr/>
         <p:nvPr/>
       </p:nvGrpSpPr>
@@ -1417,7 +1418,7 @@
       </p:grpSpPr>
       <p:sp>
         <p:nvSpPr>
-          <p:cNvPr id="159" name="Google Shape;159;gf157d98dbb_1_7:notes"/>
+          <p:cNvPr id="157" name="Google Shape;157;gf157d98dbb_1_0:notes"/>
           <p:cNvSpPr/>
           <p:nvPr>
             <p:ph idx="2" type="sldImg"/>
@@ -1452,7 +1453,7 @@
       </p:sp>
       <p:sp>
         <p:nvSpPr>
-          <p:cNvPr id="160" name="Google Shape;160;gf157d98dbb_1_7:notes"/>
+          <p:cNvPr id="158" name="Google Shape;158;gf157d98dbb_1_0:notes"/>
           <p:cNvSpPr txBox="1"/>
           <p:nvPr>
             <p:ph idx="1" type="body"/>
@@ -1502,7 +1503,7 @@
   <p:cSld>
     <p:spTree>
       <p:nvGrpSpPr>
-        <p:cNvPr id="165" name="Shape 165"/>
+        <p:cNvPr id="163" name="Shape 163"/>
         <p:cNvGrpSpPr/>
         <p:nvPr/>
       </p:nvGrpSpPr>
@@ -1516,7 +1517,7 @@
       </p:grpSpPr>
       <p:sp>
         <p:nvSpPr>
-          <p:cNvPr id="166" name="Google Shape;166;gf157d98dbb_1_20:notes"/>
+          <p:cNvPr id="164" name="Google Shape;164;gf157d98dbb_1_7:notes"/>
           <p:cNvSpPr/>
           <p:nvPr>
             <p:ph idx="2" type="sldImg"/>
@@ -1551,7 +1552,7 @@
       </p:sp>
       <p:sp>
         <p:nvSpPr>
-          <p:cNvPr id="167" name="Google Shape;167;gf157d98dbb_1_20:notes"/>
+          <p:cNvPr id="165" name="Google Shape;165;gf157d98dbb_1_7:notes"/>
           <p:cNvSpPr txBox="1"/>
           <p:nvPr>
             <p:ph idx="1" type="body"/>
@@ -1601,7 +1602,7 @@
   <p:cSld>
     <p:spTree>
       <p:nvGrpSpPr>
-        <p:cNvPr id="172" name="Shape 172"/>
+        <p:cNvPr id="170" name="Shape 170"/>
         <p:cNvGrpSpPr/>
         <p:nvPr/>
       </p:nvGrpSpPr>
@@ -1615,7 +1616,7 @@
       </p:grpSpPr>
       <p:sp>
         <p:nvSpPr>
-          <p:cNvPr id="173" name="Google Shape;173;gf157d98dbb_1_32:notes"/>
+          <p:cNvPr id="171" name="Google Shape;171;gf157d98dbb_1_20:notes"/>
           <p:cNvSpPr/>
           <p:nvPr>
             <p:ph idx="2" type="sldImg"/>
@@ -1650,7 +1651,7 @@
       </p:sp>
       <p:sp>
         <p:nvSpPr>
-          <p:cNvPr id="174" name="Google Shape;174;gf157d98dbb_1_32:notes"/>
+          <p:cNvPr id="172" name="Google Shape;172;gf157d98dbb_1_20:notes"/>
           <p:cNvSpPr txBox="1"/>
           <p:nvPr>
             <p:ph idx="1" type="body"/>
@@ -1700,7 +1701,7 @@
   <p:cSld>
     <p:spTree>
       <p:nvGrpSpPr>
-        <p:cNvPr id="179" name="Shape 179"/>
+        <p:cNvPr id="177" name="Shape 177"/>
         <p:cNvGrpSpPr/>
         <p:nvPr/>
       </p:nvGrpSpPr>
@@ -1714,7 +1715,7 @@
       </p:grpSpPr>
       <p:sp>
         <p:nvSpPr>
-          <p:cNvPr id="180" name="Google Shape;180;gf157d98db7_0_0:notes"/>
+          <p:cNvPr id="178" name="Google Shape;178;gf157d98dbb_1_32:notes"/>
           <p:cNvSpPr/>
           <p:nvPr>
             <p:ph idx="2" type="sldImg"/>
@@ -1749,7 +1750,7 @@
       </p:sp>
       <p:sp>
         <p:nvSpPr>
-          <p:cNvPr id="181" name="Google Shape;181;gf157d98db7_0_0:notes"/>
+          <p:cNvPr id="179" name="Google Shape;179;gf157d98dbb_1_32:notes"/>
           <p:cNvSpPr txBox="1"/>
           <p:nvPr>
             <p:ph idx="1" type="body"/>
@@ -1898,7 +1899,7 @@
   <p:cSld>
     <p:spTree>
       <p:nvGrpSpPr>
-        <p:cNvPr id="185" name="Shape 185"/>
+        <p:cNvPr id="184" name="Shape 184"/>
         <p:cNvGrpSpPr/>
         <p:nvPr/>
       </p:nvGrpSpPr>
@@ -1912,7 +1913,7 @@
       </p:grpSpPr>
       <p:sp>
         <p:nvSpPr>
-          <p:cNvPr id="186" name="Google Shape;186;gf157d98db7_0_5:notes"/>
+          <p:cNvPr id="185" name="Google Shape;185;gf157d98db7_0_0:notes"/>
           <p:cNvSpPr/>
           <p:nvPr>
             <p:ph idx="2" type="sldImg"/>
@@ -1947,7 +1948,106 @@
       </p:sp>
       <p:sp>
         <p:nvSpPr>
-          <p:cNvPr id="187" name="Google Shape;187;gf157d98db7_0_5:notes"/>
+          <p:cNvPr id="186" name="Google Shape;186;gf157d98db7_0_0:notes"/>
+          <p:cNvSpPr txBox="1"/>
+          <p:nvPr>
+            <p:ph idx="1" type="body"/>
+          </p:nvPr>
+        </p:nvSpPr>
+        <p:spPr>
+          <a:xfrm>
+            <a:off x="685800" y="4343400"/>
+            <a:ext cx="5486400" cy="4114800"/>
+          </a:xfrm>
+          <a:prstGeom prst="rect">
+            <a:avLst/>
+          </a:prstGeom>
+        </p:spPr>
+        <p:txBody>
+          <a:bodyPr anchorCtr="0" anchor="t" bIns="91425" lIns="91425" spcFirstLastPara="1" rIns="91425" wrap="square" tIns="91425">
+            <a:noAutofit/>
+          </a:bodyPr>
+          <a:lstStyle/>
+          <a:p>
+            <a:pPr indent="0" lvl="0" marL="0" rtl="0" algn="l">
+              <a:spcBef>
+                <a:spcPts val="0"/>
+              </a:spcBef>
+              <a:spcAft>
+                <a:spcPts val="0"/>
+              </a:spcAft>
+              <a:buNone/>
+            </a:pPr>
+            <a:r>
+              <a:t/>
+            </a:r>
+            <a:endParaRPr/>
+          </a:p>
+        </p:txBody>
+      </p:sp>
+    </p:spTree>
+  </p:cSld>
+  <p:clrMapOvr>
+    <a:masterClrMapping/>
+  </p:clrMapOvr>
+</p:notes>
+</file>
+
+<file path=ppt/notesSlides/notesSlide21.xml><?xml version="1.0" encoding="utf-8"?>
+<p:notes xmlns:a="http://schemas.openxmlformats.org/drawingml/2006/main" xmlns:r="http://schemas.openxmlformats.org/officeDocument/2006/relationships" xmlns:mc="http://schemas.openxmlformats.org/markup-compatibility/2006" xmlns:mv="urn:schemas-microsoft-com:mac:vml" xmlns:p="http://schemas.openxmlformats.org/presentationml/2006/main" xmlns:c="http://schemas.openxmlformats.org/drawingml/2006/chart" xmlns:dgm="http://schemas.openxmlformats.org/drawingml/2006/diagram" xmlns:o="urn:schemas-microsoft-com:office:office" xmlns:v="urn:schemas-microsoft-com:vml" xmlns:pvml="urn:schemas-microsoft-com:office:powerpoint" xmlns:com="http://schemas.openxmlformats.org/drawingml/2006/compatibility" xmlns:p14="http://schemas.microsoft.com/office/powerpoint/2010/main" xmlns:p15="http://schemas.microsoft.com/office/powerpoint/2012/main" xmlns:ahyp="http://schemas.microsoft.com/office/drawing/2018/hyperlinkcolor" showMasterPhAnim="0" showMasterSp="0">
+  <p:cSld>
+    <p:spTree>
+      <p:nvGrpSpPr>
+        <p:cNvPr id="190" name="Shape 190"/>
+        <p:cNvGrpSpPr/>
+        <p:nvPr/>
+      </p:nvGrpSpPr>
+      <p:grpSpPr>
+        <a:xfrm>
+          <a:off x="0" y="0"/>
+          <a:ext cx="0" cy="0"/>
+          <a:chOff x="0" y="0"/>
+          <a:chExt cx="0" cy="0"/>
+        </a:xfrm>
+      </p:grpSpPr>
+      <p:sp>
+        <p:nvSpPr>
+          <p:cNvPr id="191" name="Google Shape;191;gf157d98db7_0_5:notes"/>
+          <p:cNvSpPr/>
+          <p:nvPr>
+            <p:ph idx="2" type="sldImg"/>
+          </p:nvPr>
+        </p:nvSpPr>
+        <p:spPr>
+          <a:xfrm>
+            <a:off x="381300" y="685800"/>
+            <a:ext cx="6096000" cy="3429000"/>
+          </a:xfrm>
+          <a:custGeom>
+            <a:rect b="b" l="l" r="r" t="t"/>
+            <a:pathLst>
+              <a:path extrusionOk="0" h="120000" w="120000">
+                <a:moveTo>
+                  <a:pt x="0" y="0"/>
+                </a:moveTo>
+                <a:lnTo>
+                  <a:pt x="120000" y="0"/>
+                </a:lnTo>
+                <a:lnTo>
+                  <a:pt x="120000" y="120000"/>
+                </a:lnTo>
+                <a:lnTo>
+                  <a:pt x="0" y="120000"/>
+                </a:lnTo>
+                <a:close/>
+              </a:path>
+            </a:pathLst>
+          </a:custGeom>
+        </p:spPr>
+      </p:sp>
+      <p:sp>
+        <p:nvSpPr>
+          <p:cNvPr id="192" name="Google Shape;192;gf157d98db7_0_5:notes"/>
           <p:cNvSpPr txBox="1"/>
           <p:nvPr>
             <p:ph idx="1" type="body"/>
@@ -2110,7 +2210,7 @@
       </p:grpSpPr>
       <p:sp>
         <p:nvSpPr>
-          <p:cNvPr id="69" name="Google Shape;69;g38c88798cc7_0_48:notes"/>
+          <p:cNvPr id="69" name="Google Shape;69;h357d00181260bfe6_0_48:notes"/>
           <p:cNvSpPr/>
           <p:nvPr>
             <p:ph idx="2" type="sldImg"/>
@@ -2145,7 +2245,7 @@
       </p:sp>
       <p:sp>
         <p:nvSpPr>
-          <p:cNvPr id="70" name="Google Shape;70;g38c88798cc7_0_48:notes"/>
+          <p:cNvPr id="70" name="Google Shape;70;h357d00181260bfe6_0_48:notes"/>
           <p:cNvSpPr txBox="1"/>
           <p:nvPr>
             <p:ph idx="1" type="body"/>
@@ -2605,7 +2705,7 @@
       </p:grpSpPr>
       <p:sp>
         <p:nvSpPr>
-          <p:cNvPr id="105" name="Google Shape;105;g38a15ddc2d6_0_8:notes"/>
+          <p:cNvPr id="105" name="Google Shape;105;h357d00181260bfe6_0_96:notes"/>
           <p:cNvSpPr/>
           <p:nvPr>
             <p:ph idx="2" type="sldImg"/>
@@ -2640,7 +2740,7 @@
       </p:sp>
       <p:sp>
         <p:nvSpPr>
-          <p:cNvPr id="106" name="Google Shape;106;g38a15ddc2d6_0_8:notes"/>
+          <p:cNvPr id="106" name="Google Shape;106;h357d00181260bfe6_0_96:notes"/>
           <p:cNvSpPr txBox="1"/>
           <p:nvPr>
             <p:ph idx="1" type="body"/>
@@ -5769,7 +5869,7 @@
           <a:srgbClr val="000000"/>
         </a:buClr>
         <a:buFont typeface="Arial"/>
-        <a:defRPr b="0" i="0" sz="1400" u="none" cap="none" strike="noStrike">
+        <a:defRPr b="0" i="0" spc="0" sz="1400" u="none" cap="none" strike="noStrike">
           <a:solidFill>
             <a:srgbClr val="000000"/>
           </a:solidFill>
@@ -5793,7 +5893,7 @@
           <a:srgbClr val="000000"/>
         </a:buClr>
         <a:buFont typeface="Arial"/>
-        <a:defRPr b="0" i="0" sz="1400" u="none" cap="none" strike="noStrike">
+        <a:defRPr b="0" i="0" spc="0" sz="1400" u="none" cap="none" strike="noStrike">
           <a:solidFill>
             <a:srgbClr val="000000"/>
           </a:solidFill>
@@ -5817,7 +5917,7 @@
           <a:srgbClr val="000000"/>
         </a:buClr>
         <a:buFont typeface="Arial"/>
-        <a:defRPr b="0" i="0" sz="1400" u="none" cap="none" strike="noStrike">
+        <a:defRPr b="0" i="0" spc="0" sz="1400" u="none" cap="none" strike="noStrike">
           <a:solidFill>
             <a:srgbClr val="000000"/>
           </a:solidFill>
@@ -5841,7 +5941,7 @@
           <a:srgbClr val="000000"/>
         </a:buClr>
         <a:buFont typeface="Arial"/>
-        <a:defRPr b="0" i="0" sz="1400" u="none" cap="none" strike="noStrike">
+        <a:defRPr b="0" i="0" spc="0" sz="1400" u="none" cap="none" strike="noStrike">
           <a:solidFill>
             <a:srgbClr val="000000"/>
           </a:solidFill>
@@ -5865,7 +5965,7 @@
           <a:srgbClr val="000000"/>
         </a:buClr>
         <a:buFont typeface="Arial"/>
-        <a:defRPr b="0" i="0" sz="1400" u="none" cap="none" strike="noStrike">
+        <a:defRPr b="0" i="0" spc="0" sz="1400" u="none" cap="none" strike="noStrike">
           <a:solidFill>
             <a:srgbClr val="000000"/>
           </a:solidFill>
@@ -5889,7 +5989,7 @@
           <a:srgbClr val="000000"/>
         </a:buClr>
         <a:buFont typeface="Arial"/>
-        <a:defRPr b="0" i="0" sz="1400" u="none" cap="none" strike="noStrike">
+        <a:defRPr b="0" i="0" spc="0" sz="1400" u="none" cap="none" strike="noStrike">
           <a:solidFill>
             <a:srgbClr val="000000"/>
           </a:solidFill>
@@ -5913,7 +6013,7 @@
           <a:srgbClr val="000000"/>
         </a:buClr>
         <a:buFont typeface="Arial"/>
-        <a:defRPr b="0" i="0" sz="1400" u="none" cap="none" strike="noStrike">
+        <a:defRPr b="0" i="0" spc="0" sz="1400" u="none" cap="none" strike="noStrike">
           <a:solidFill>
             <a:srgbClr val="000000"/>
           </a:solidFill>
@@ -5937,7 +6037,7 @@
           <a:srgbClr val="000000"/>
         </a:buClr>
         <a:buFont typeface="Arial"/>
-        <a:defRPr b="0" i="0" sz="1400" u="none" cap="none" strike="noStrike">
+        <a:defRPr b="0" i="0" spc="0" sz="1400" u="none" cap="none" strike="noStrike">
           <a:solidFill>
             <a:srgbClr val="000000"/>
           </a:solidFill>
@@ -5961,7 +6061,7 @@
           <a:srgbClr val="000000"/>
         </a:buClr>
         <a:buFont typeface="Arial"/>
-        <a:defRPr b="0" i="0" sz="1400" u="none" cap="none" strike="noStrike">
+        <a:defRPr b="0" i="0" spc="0" sz="1400" u="none" cap="none" strike="noStrike">
           <a:solidFill>
             <a:srgbClr val="000000"/>
           </a:solidFill>
@@ -5998,7 +6098,7 @@
           <a:srgbClr val="000000"/>
         </a:buClr>
         <a:buFont typeface="Arial"/>
-        <a:defRPr b="0" i="0" sz="1400" u="none" cap="none" strike="noStrike">
+        <a:defRPr b="0" i="0" spc="0" sz="1400" u="none" cap="none" strike="noStrike">
           <a:solidFill>
             <a:srgbClr val="000000"/>
           </a:solidFill>
@@ -6022,7 +6122,7 @@
           <a:srgbClr val="000000"/>
         </a:buClr>
         <a:buFont typeface="Arial"/>
-        <a:defRPr b="0" i="0" sz="1400" u="none" cap="none" strike="noStrike">
+        <a:defRPr b="0" i="0" spc="0" sz="1400" u="none" cap="none" strike="noStrike">
           <a:solidFill>
             <a:srgbClr val="000000"/>
           </a:solidFill>
@@ -6046,7 +6146,7 @@
           <a:srgbClr val="000000"/>
         </a:buClr>
         <a:buFont typeface="Arial"/>
-        <a:defRPr b="0" i="0" sz="1400" u="none" cap="none" strike="noStrike">
+        <a:defRPr b="0" i="0" spc="0" sz="1400" u="none" cap="none" strike="noStrike">
           <a:solidFill>
             <a:srgbClr val="000000"/>
           </a:solidFill>
@@ -6070,7 +6170,7 @@
           <a:srgbClr val="000000"/>
         </a:buClr>
         <a:buFont typeface="Arial"/>
-        <a:defRPr b="0" i="0" sz="1400" u="none" cap="none" strike="noStrike">
+        <a:defRPr b="0" i="0" spc="0" sz="1400" u="none" cap="none" strike="noStrike">
           <a:solidFill>
             <a:srgbClr val="000000"/>
           </a:solidFill>
@@ -6094,7 +6194,7 @@
           <a:srgbClr val="000000"/>
         </a:buClr>
         <a:buFont typeface="Arial"/>
-        <a:defRPr b="0" i="0" sz="1400" u="none" cap="none" strike="noStrike">
+        <a:defRPr b="0" i="0" spc="0" sz="1400" u="none" cap="none" strike="noStrike">
           <a:solidFill>
             <a:srgbClr val="000000"/>
           </a:solidFill>
@@ -6118,7 +6218,7 @@
           <a:srgbClr val="000000"/>
         </a:buClr>
         <a:buFont typeface="Arial"/>
-        <a:defRPr b="0" i="0" sz="1400" u="none" cap="none" strike="noStrike">
+        <a:defRPr b="0" i="0" spc="0" sz="1400" u="none" cap="none" strike="noStrike">
           <a:solidFill>
             <a:srgbClr val="000000"/>
           </a:solidFill>
@@ -6142,7 +6242,7 @@
           <a:srgbClr val="000000"/>
         </a:buClr>
         <a:buFont typeface="Arial"/>
-        <a:defRPr b="0" i="0" sz="1400" u="none" cap="none" strike="noStrike">
+        <a:defRPr b="0" i="0" spc="0" sz="1400" u="none" cap="none" strike="noStrike">
           <a:solidFill>
             <a:srgbClr val="000000"/>
           </a:solidFill>
@@ -6166,7 +6266,7 @@
           <a:srgbClr val="000000"/>
         </a:buClr>
         <a:buFont typeface="Arial"/>
-        <a:defRPr b="0" i="0" sz="1400" u="none" cap="none" strike="noStrike">
+        <a:defRPr b="0" i="0" spc="0" sz="1400" u="none" cap="none" strike="noStrike">
           <a:solidFill>
             <a:srgbClr val="000000"/>
           </a:solidFill>
@@ -6190,7 +6290,7 @@
           <a:srgbClr val="000000"/>
         </a:buClr>
         <a:buFont typeface="Arial"/>
-        <a:defRPr b="0" i="0" sz="1400" u="none" cap="none" strike="noStrike">
+        <a:defRPr b="0" i="0" spc="0" sz="1400" u="none" cap="none" strike="noStrike">
           <a:solidFill>
             <a:srgbClr val="000000"/>
           </a:solidFill>
@@ -6227,7 +6327,7 @@
           <a:srgbClr val="000000"/>
         </a:buClr>
         <a:buFont typeface="Arial"/>
-        <a:defRPr b="0" i="0" sz="1400" u="none" cap="none" strike="noStrike">
+        <a:defRPr b="0" i="0" spc="0" sz="1400" u="none" cap="none" strike="noStrike">
           <a:solidFill>
             <a:srgbClr val="000000"/>
           </a:solidFill>
@@ -6251,7 +6351,7 @@
           <a:srgbClr val="000000"/>
         </a:buClr>
         <a:buFont typeface="Arial"/>
-        <a:defRPr b="0" i="0" sz="1400" u="none" cap="none" strike="noStrike">
+        <a:defRPr b="0" i="0" spc="0" sz="1400" u="none" cap="none" strike="noStrike">
           <a:solidFill>
             <a:srgbClr val="000000"/>
           </a:solidFill>
@@ -6275,7 +6375,7 @@
           <a:srgbClr val="000000"/>
         </a:buClr>
         <a:buFont typeface="Arial"/>
-        <a:defRPr b="0" i="0" sz="1400" u="none" cap="none" strike="noStrike">
+        <a:defRPr b="0" i="0" spc="0" sz="1400" u="none" cap="none" strike="noStrike">
           <a:solidFill>
             <a:srgbClr val="000000"/>
           </a:solidFill>
@@ -6299,7 +6399,7 @@
           <a:srgbClr val="000000"/>
         </a:buClr>
         <a:buFont typeface="Arial"/>
-        <a:defRPr b="0" i="0" sz="1400" u="none" cap="none" strike="noStrike">
+        <a:defRPr b="0" i="0" spc="0" sz="1400" u="none" cap="none" strike="noStrike">
           <a:solidFill>
             <a:srgbClr val="000000"/>
           </a:solidFill>
@@ -6323,7 +6423,7 @@
           <a:srgbClr val="000000"/>
         </a:buClr>
         <a:buFont typeface="Arial"/>
-        <a:defRPr b="0" i="0" sz="1400" u="none" cap="none" strike="noStrike">
+        <a:defRPr b="0" i="0" spc="0" sz="1400" u="none" cap="none" strike="noStrike">
           <a:solidFill>
             <a:srgbClr val="000000"/>
           </a:solidFill>
@@ -6347,7 +6447,7 @@
           <a:srgbClr val="000000"/>
         </a:buClr>
         <a:buFont typeface="Arial"/>
-        <a:defRPr b="0" i="0" sz="1400" u="none" cap="none" strike="noStrike">
+        <a:defRPr b="0" i="0" spc="0" sz="1400" u="none" cap="none" strike="noStrike">
           <a:solidFill>
             <a:srgbClr val="000000"/>
           </a:solidFill>
@@ -6371,7 +6471,7 @@
           <a:srgbClr val="000000"/>
         </a:buClr>
         <a:buFont typeface="Arial"/>
-        <a:defRPr b="0" i="0" sz="1400" u="none" cap="none" strike="noStrike">
+        <a:defRPr b="0" i="0" spc="0" sz="1400" u="none" cap="none" strike="noStrike">
           <a:solidFill>
             <a:srgbClr val="000000"/>
           </a:solidFill>
@@ -6395,7 +6495,7 @@
           <a:srgbClr val="000000"/>
         </a:buClr>
         <a:buFont typeface="Arial"/>
-        <a:defRPr b="0" i="0" sz="1400" u="none" cap="none" strike="noStrike">
+        <a:defRPr b="0" i="0" spc="0" sz="1400" u="none" cap="none" strike="noStrike">
           <a:solidFill>
             <a:srgbClr val="000000"/>
           </a:solidFill>
@@ -6419,7 +6519,7 @@
           <a:srgbClr val="000000"/>
         </a:buClr>
         <a:buFont typeface="Arial"/>
-        <a:defRPr b="0" i="0" sz="1400" u="none" cap="none" strike="noStrike">
+        <a:defRPr b="0" i="0" spc="0" sz="1400" u="none" cap="none" strike="noStrike">
           <a:solidFill>
             <a:srgbClr val="000000"/>
           </a:solidFill>
@@ -6679,15 +6779,15 @@
         </p:nvSpPr>
         <p:spPr>
           <a:xfrm>
-            <a:off x="274320" y="2743200"/>
-            <a:ext cx="4114800" cy="1828800"/>
+            <a:off x="274320" y="914400"/>
+            <a:ext cx="8595300" cy="4114800"/>
           </a:xfrm>
           <a:prstGeom prst="rect">
             <a:avLst/>
           </a:prstGeom>
         </p:spPr>
         <p:txBody>
-          <a:bodyPr anchorCtr="0" anchor="t" bIns="91425" lIns="0" spcFirstLastPara="1" rIns="91425" wrap="square" tIns="0">
+          <a:bodyPr anchorCtr="0" anchor="t" bIns="0" lIns="0" spcFirstLastPara="1" rIns="0" wrap="square" tIns="0">
             <a:noAutofit/>
           </a:bodyPr>
           <a:lstStyle/>
@@ -6699,68 +6799,54 @@
               <a:spcAft>
                 <a:spcPts val="0"/>
               </a:spcAft>
+              <a:buClr>
+                <a:schemeClr val="dk1"/>
+              </a:buClr>
+              <a:buSzPts val="1100"/>
+              <a:buFont typeface="Arial"/>
               <a:buNone/>
             </a:pPr>
             <a:r>
-              <a:rPr b="1" lang="en" sz="1800"/>
-              <a:t>B. Open source </a:t>
+              <a:rPr lang="en"/>
+              <a:t>A sequence of exercises building on each other</a:t>
             </a:r>
-            <a:r>
-              <a:rPr b="1" lang="en"/>
-              <a:t>governance</a:t>
-            </a:r>
-            <a:endParaRPr b="1" sz="1800"/>
+            <a:endParaRPr/>
           </a:p>
           <a:p>
-            <a:pPr indent="-317500" lvl="0" marL="457200" rtl="0" algn="l">
+            <a:pPr indent="0" lvl="0" marL="0" rtl="0" algn="l">
               <a:spcBef>
                 <a:spcPts val="1200"/>
               </a:spcBef>
               <a:spcAft>
                 <a:spcPts val="0"/>
               </a:spcAft>
-              <a:buSzPts val="1400"/>
-              <a:buAutoNum type="arabicPeriod" startAt="4"/>
+              <a:buClr>
+                <a:schemeClr val="dk1"/>
+              </a:buClr>
+              <a:buSzPts val="1100"/>
+              <a:buFont typeface="Arial"/>
+              <a:buNone/>
             </a:pPr>
             <a:r>
-              <a:rPr lang="en" sz="1400"/>
-              <a:t>Open-source software licenses</a:t>
+              <a:rPr lang="en"/>
+              <a:t>All exercises are graded and will be reviewed in class</a:t>
             </a:r>
-            <a:endParaRPr sz="1400"/>
+            <a:endParaRPr/>
           </a:p>
           <a:p>
-            <a:pPr indent="-317500" lvl="0" marL="457200" rtl="0" algn="l">
-              <a:spcBef>
-                <a:spcPts val="0"/>
-              </a:spcBef>
-              <a:spcAft>
-                <a:spcPts val="0"/>
-              </a:spcAft>
-              <a:buSzPts val="1400"/>
-              <a:buAutoNum type="arabicPeriod" startAt="4"/>
+            <a:pPr indent="0" lvl="0" marL="0" rtl="0" algn="l">
+              <a:spcBef>
+                <a:spcPts val="1200"/>
+              </a:spcBef>
+              <a:spcAft>
+                <a:spcPts val="1200"/>
+              </a:spcAft>
+              <a:buNone/>
             </a:pPr>
             <a:r>
-              <a:rPr lang="en" sz="1400"/>
-              <a:t>Copyleft and intellectual property risks</a:t>
+              <a:t/>
             </a:r>
-            <a:endParaRPr sz="1400"/>
-          </a:p>
-          <a:p>
-            <a:pPr indent="-317500" lvl="0" marL="457200" rtl="0" algn="l">
-              <a:spcBef>
-                <a:spcPts val="0"/>
-              </a:spcBef>
-              <a:spcAft>
-                <a:spcPts val="0"/>
-              </a:spcAft>
-              <a:buSzPts val="1400"/>
-              <a:buAutoNum type="arabicPeriod" startAt="4"/>
-            </a:pPr>
-            <a:r>
-              <a:rPr lang="en" sz="1400"/>
-              <a:t>The open source program office</a:t>
-            </a:r>
-            <a:endParaRPr sz="1400"/>
+            <a:endParaRPr/>
           </a:p>
         </p:txBody>
       </p:sp>
@@ -6782,552 +6868,6 @@
           </a:prstGeom>
         </p:spPr>
         <p:txBody>
-          <a:bodyPr anchorCtr="0" anchor="ctr" bIns="0" lIns="274300" spcFirstLastPara="1" rIns="0" wrap="square" tIns="0">
-            <a:noAutofit/>
-          </a:bodyPr>
-          <a:lstStyle/>
-          <a:p>
-            <a:pPr indent="0" lvl="0" marL="0" rtl="0" algn="l">
-              <a:spcBef>
-                <a:spcPts val="0"/>
-              </a:spcBef>
-              <a:spcAft>
-                <a:spcPts val="0"/>
-              </a:spcAft>
-              <a:buNone/>
-            </a:pPr>
-            <a:r>
-              <a:rPr lang="en"/>
-              <a:t>Course Overview</a:t>
-            </a:r>
-            <a:endParaRPr/>
-          </a:p>
-        </p:txBody>
-      </p:sp>
-      <p:sp>
-        <p:nvSpPr>
-          <p:cNvPr id="117" name="Google Shape;117;p17"/>
-          <p:cNvSpPr txBox="1"/>
-          <p:nvPr>
-            <p:ph idx="1" type="body"/>
-          </p:nvPr>
-        </p:nvSpPr>
-        <p:spPr>
-          <a:xfrm>
-            <a:off x="274320" y="914400"/>
-            <a:ext cx="4114800" cy="1828800"/>
-          </a:xfrm>
-          <a:prstGeom prst="rect">
-            <a:avLst/>
-          </a:prstGeom>
-        </p:spPr>
-        <p:txBody>
-          <a:bodyPr anchorCtr="0" anchor="t" bIns="91425" lIns="0" spcFirstLastPara="1" rIns="91425" wrap="square" tIns="0">
-            <a:noAutofit/>
-          </a:bodyPr>
-          <a:lstStyle/>
-          <a:p>
-            <a:pPr indent="0" lvl="0" marL="0" rtl="0" algn="l">
-              <a:spcBef>
-                <a:spcPts val="0"/>
-              </a:spcBef>
-              <a:spcAft>
-                <a:spcPts val="0"/>
-              </a:spcAft>
-              <a:buNone/>
-            </a:pPr>
-            <a:r>
-              <a:rPr b="1" lang="en" sz="1800"/>
-              <a:t>A. </a:t>
-            </a:r>
-            <a:r>
-              <a:rPr b="1" lang="en"/>
-              <a:t>The software bill of materials</a:t>
-            </a:r>
-            <a:endParaRPr b="1" sz="1800"/>
-          </a:p>
-          <a:p>
-            <a:pPr indent="-317500" lvl="0" marL="457200" rtl="0" algn="l">
-              <a:spcBef>
-                <a:spcPts val="1200"/>
-              </a:spcBef>
-              <a:spcAft>
-                <a:spcPts val="0"/>
-              </a:spcAft>
-              <a:buSzPts val="1400"/>
-              <a:buAutoNum type="arabicPeriod"/>
-            </a:pPr>
-            <a:r>
-              <a:rPr lang="en" sz="1400"/>
-              <a:t>The software bill of materials</a:t>
-            </a:r>
-            <a:endParaRPr sz="1400"/>
-          </a:p>
-          <a:p>
-            <a:pPr indent="-317500" lvl="0" marL="457200" rtl="0" algn="l">
-              <a:spcBef>
-                <a:spcPts val="0"/>
-              </a:spcBef>
-              <a:spcAft>
-                <a:spcPts val="0"/>
-              </a:spcAft>
-              <a:buSzPts val="1400"/>
-              <a:buAutoNum type="arabicPeriod"/>
-            </a:pPr>
-            <a:r>
-              <a:rPr lang="en" sz="1400"/>
-              <a:t>The dependency graph</a:t>
-            </a:r>
-            <a:endParaRPr sz="1400"/>
-          </a:p>
-          <a:p>
-            <a:pPr indent="-317500" lvl="0" marL="457200" rtl="0" algn="l">
-              <a:spcBef>
-                <a:spcPts val="0"/>
-              </a:spcBef>
-              <a:spcAft>
-                <a:spcPts val="0"/>
-              </a:spcAft>
-              <a:buSzPts val="1400"/>
-              <a:buAutoNum type="arabicPeriod"/>
-            </a:pPr>
-            <a:r>
-              <a:rPr lang="en" sz="1400"/>
-              <a:t>Software composition analysis</a:t>
-            </a:r>
-            <a:endParaRPr sz="1400"/>
-          </a:p>
-        </p:txBody>
-      </p:sp>
-      <p:sp>
-        <p:nvSpPr>
-          <p:cNvPr id="118" name="Google Shape;118;p17"/>
-          <p:cNvSpPr txBox="1"/>
-          <p:nvPr>
-            <p:ph idx="12" type="sldNum"/>
-          </p:nvPr>
-        </p:nvSpPr>
-        <p:spPr>
-          <a:xfrm>
-            <a:off x="7315202" y="4416550"/>
-            <a:ext cx="1828800" cy="731400"/>
-          </a:xfrm>
-          <a:prstGeom prst="rect">
-            <a:avLst/>
-          </a:prstGeom>
-        </p:spPr>
-        <p:txBody>
-          <a:bodyPr anchorCtr="0" anchor="b" bIns="91425" lIns="91425" spcFirstLastPara="1" rIns="91425" wrap="square" tIns="91425">
-            <a:noAutofit/>
-          </a:bodyPr>
-          <a:lstStyle/>
-          <a:p>
-            <a:pPr indent="0" lvl="0" marL="0" rtl="0" algn="r">
-              <a:spcBef>
-                <a:spcPts val="0"/>
-              </a:spcBef>
-              <a:spcAft>
-                <a:spcPts val="0"/>
-              </a:spcAft>
-              <a:buNone/>
-            </a:pPr>
-            <a:fld id="{00000000-1234-1234-1234-123412341234}" type="slidenum">
-              <a:rPr lang="en"/>
-              <a:t>‹#›</a:t>
-            </a:fld>
-            <a:endParaRPr/>
-          </a:p>
-          <a:p>
-            <a:pPr indent="0" lvl="0" marL="0" rtl="0" algn="r">
-              <a:spcBef>
-                <a:spcPts val="0"/>
-              </a:spcBef>
-              <a:spcAft>
-                <a:spcPts val="0"/>
-              </a:spcAft>
-              <a:buClr>
-                <a:schemeClr val="dk1"/>
-              </a:buClr>
-              <a:buSzPts val="1100"/>
-              <a:buFont typeface="Arial"/>
-              <a:buNone/>
-            </a:pPr>
-            <a:r>
-              <a:rPr b="0" lang="en" sz="900" u="sng">
-                <a:solidFill>
-                  <a:schemeClr val="hlink"/>
-                </a:solidFill>
-                <a:hlinkClick r:id="rId3"/>
-              </a:rPr>
-              <a:t>https://oss.cs.fau.de</a:t>
-            </a:r>
-            <a:endParaRPr>
-              <a:solidFill>
-                <a:schemeClr val="dk2"/>
-              </a:solidFill>
-            </a:endParaRPr>
-          </a:p>
-        </p:txBody>
-      </p:sp>
-      <p:sp>
-        <p:nvSpPr>
-          <p:cNvPr id="119" name="Google Shape;119;p17"/>
-          <p:cNvSpPr txBox="1"/>
-          <p:nvPr>
-            <p:ph idx="2" type="body"/>
-          </p:nvPr>
-        </p:nvSpPr>
-        <p:spPr>
-          <a:xfrm>
-            <a:off x="4846320" y="914400"/>
-            <a:ext cx="4114800" cy="1828800"/>
-          </a:xfrm>
-          <a:prstGeom prst="rect">
-            <a:avLst/>
-          </a:prstGeom>
-        </p:spPr>
-        <p:txBody>
-          <a:bodyPr anchorCtr="0" anchor="t" bIns="0" lIns="0" spcFirstLastPara="1" rIns="0" wrap="square" tIns="0">
-            <a:noAutofit/>
-          </a:bodyPr>
-          <a:lstStyle/>
-          <a:p>
-            <a:pPr indent="0" lvl="0" marL="0" rtl="0" algn="l">
-              <a:spcBef>
-                <a:spcPts val="0"/>
-              </a:spcBef>
-              <a:spcAft>
-                <a:spcPts val="0"/>
-              </a:spcAft>
-              <a:buNone/>
-            </a:pPr>
-            <a:r>
-              <a:rPr b="1" lang="en" sz="1800"/>
-              <a:t>C. </a:t>
-            </a:r>
-            <a:r>
-              <a:rPr b="1" lang="en"/>
-              <a:t>License compliance</a:t>
-            </a:r>
-            <a:endParaRPr b="1" sz="1800"/>
-          </a:p>
-          <a:p>
-            <a:pPr indent="-317500" lvl="0" marL="457200" rtl="0" algn="l">
-              <a:spcBef>
-                <a:spcPts val="1200"/>
-              </a:spcBef>
-              <a:spcAft>
-                <a:spcPts val="0"/>
-              </a:spcAft>
-              <a:buSzPts val="1400"/>
-              <a:buAutoNum type="arabicPeriod" startAt="7"/>
-            </a:pPr>
-            <a:r>
-              <a:rPr lang="en" sz="1400"/>
-              <a:t>The open source legal notices</a:t>
-            </a:r>
-            <a:endParaRPr sz="1400"/>
-          </a:p>
-          <a:p>
-            <a:pPr indent="-317500" lvl="0" marL="457200" rtl="0" algn="l">
-              <a:spcBef>
-                <a:spcPts val="0"/>
-              </a:spcBef>
-              <a:spcAft>
-                <a:spcPts val="0"/>
-              </a:spcAft>
-              <a:buSzPts val="1400"/>
-              <a:buAutoNum type="arabicPeriod" startAt="7"/>
-            </a:pPr>
-            <a:r>
-              <a:rPr lang="en" sz="1400"/>
-              <a:t>Efficient engineering workflows</a:t>
-            </a:r>
-            <a:endParaRPr sz="1400"/>
-          </a:p>
-          <a:p>
-            <a:pPr indent="-317500" lvl="0" marL="457200" rtl="0" algn="l">
-              <a:spcBef>
-                <a:spcPts val="0"/>
-              </a:spcBef>
-              <a:spcAft>
-                <a:spcPts val="0"/>
-              </a:spcAft>
-              <a:buSzPts val="1400"/>
-              <a:buAutoNum type="arabicPeriod" startAt="7"/>
-            </a:pPr>
-            <a:r>
-              <a:rPr lang="en" sz="1400"/>
-              <a:t>Current compliance challenges</a:t>
-            </a:r>
-            <a:endParaRPr sz="1400"/>
-          </a:p>
-          <a:p>
-            <a:pPr indent="0" lvl="0" marL="0" rtl="0" algn="l">
-              <a:spcBef>
-                <a:spcPts val="1200"/>
-              </a:spcBef>
-              <a:spcAft>
-                <a:spcPts val="0"/>
-              </a:spcAft>
-              <a:buNone/>
-            </a:pPr>
-            <a:r>
-              <a:t/>
-            </a:r>
-            <a:endParaRPr/>
-          </a:p>
-          <a:p>
-            <a:pPr indent="0" lvl="0" marL="457200" rtl="0" algn="l">
-              <a:spcBef>
-                <a:spcPts val="1200"/>
-              </a:spcBef>
-              <a:spcAft>
-                <a:spcPts val="1200"/>
-              </a:spcAft>
-              <a:buNone/>
-            </a:pPr>
-            <a:r>
-              <a:t/>
-            </a:r>
-            <a:endParaRPr/>
-          </a:p>
-        </p:txBody>
-      </p:sp>
-      <p:sp>
-        <p:nvSpPr>
-          <p:cNvPr id="120" name="Google Shape;120;p17"/>
-          <p:cNvSpPr txBox="1"/>
-          <p:nvPr>
-            <p:ph idx="2" type="body"/>
-          </p:nvPr>
-        </p:nvSpPr>
-        <p:spPr>
-          <a:xfrm>
-            <a:off x="4846320" y="2743200"/>
-            <a:ext cx="4114800" cy="1828800"/>
-          </a:xfrm>
-          <a:prstGeom prst="rect">
-            <a:avLst/>
-          </a:prstGeom>
-        </p:spPr>
-        <p:txBody>
-          <a:bodyPr anchorCtr="0" anchor="t" bIns="0" lIns="0" spcFirstLastPara="1" rIns="0" wrap="square" tIns="0">
-            <a:noAutofit/>
-          </a:bodyPr>
-          <a:lstStyle/>
-          <a:p>
-            <a:pPr indent="0" lvl="0" marL="0" rtl="0" algn="l">
-              <a:spcBef>
-                <a:spcPts val="0"/>
-              </a:spcBef>
-              <a:spcAft>
-                <a:spcPts val="0"/>
-              </a:spcAft>
-              <a:buNone/>
-            </a:pPr>
-            <a:r>
-              <a:rPr b="1" lang="en" sz="1800"/>
-              <a:t>D. </a:t>
-            </a:r>
-            <a:r>
-              <a:rPr b="1" lang="en"/>
-              <a:t>Regulatory compliance</a:t>
-            </a:r>
-            <a:endParaRPr b="1" sz="1800"/>
-          </a:p>
-          <a:p>
-            <a:pPr indent="-271780" lvl="0" marL="457200" rtl="0" algn="l">
-              <a:spcBef>
-                <a:spcPts val="1200"/>
-              </a:spcBef>
-              <a:spcAft>
-                <a:spcPts val="0"/>
-              </a:spcAft>
-              <a:buSzPts val="1400"/>
-              <a:buAutoNum type="arabicPeriod" startAt="10"/>
-            </a:pPr>
-            <a:r>
-              <a:rPr lang="en" sz="1400"/>
-              <a:t>The software supply chain</a:t>
-            </a:r>
-            <a:endParaRPr sz="1400"/>
-          </a:p>
-          <a:p>
-            <a:pPr indent="-271780" lvl="0" marL="457200" rtl="0" algn="l">
-              <a:spcBef>
-                <a:spcPts val="0"/>
-              </a:spcBef>
-              <a:spcAft>
-                <a:spcPts val="0"/>
-              </a:spcAft>
-              <a:buSzPts val="1400"/>
-              <a:buAutoNum type="arabicPeriod" startAt="10"/>
-            </a:pPr>
-            <a:r>
-              <a:rPr lang="en" sz="1400"/>
-              <a:t>Open source compliance regulation</a:t>
-            </a:r>
-            <a:endParaRPr sz="1400"/>
-          </a:p>
-          <a:p>
-            <a:pPr indent="-271780" lvl="0" marL="457200" rtl="0" algn="l">
-              <a:spcBef>
-                <a:spcPts val="0"/>
-              </a:spcBef>
-              <a:spcAft>
-                <a:spcPts val="0"/>
-              </a:spcAft>
-              <a:buSzPts val="1400"/>
-              <a:buAutoNum type="arabicPeriod" startAt="10"/>
-            </a:pPr>
-            <a:r>
-              <a:rPr lang="en" sz="1400"/>
-              <a:t>Vulnerability management</a:t>
-            </a:r>
-            <a:endParaRPr sz="1400"/>
-          </a:p>
-          <a:p>
-            <a:pPr indent="0" lvl="0" marL="457200" rtl="0" algn="l">
-              <a:spcBef>
-                <a:spcPts val="1200"/>
-              </a:spcBef>
-              <a:spcAft>
-                <a:spcPts val="1200"/>
-              </a:spcAft>
-              <a:buNone/>
-            </a:pPr>
-            <a:r>
-              <a:t/>
-            </a:r>
-            <a:endParaRPr/>
-          </a:p>
-        </p:txBody>
-      </p:sp>
-    </p:spTree>
-  </p:cSld>
-  <p:clrMapOvr>
-    <a:masterClrMapping/>
-  </p:clrMapOvr>
-</p:sld>
-</file>
-
-<file path=ppt/slides/slide11.xml><?xml version="1.0" encoding="utf-8"?>
-<p:sld xmlns:a="http://schemas.openxmlformats.org/drawingml/2006/main" xmlns:r="http://schemas.openxmlformats.org/officeDocument/2006/relationships" xmlns:mc="http://schemas.openxmlformats.org/markup-compatibility/2006" xmlns:mv="urn:schemas-microsoft-com:mac:vml" xmlns:p="http://schemas.openxmlformats.org/presentationml/2006/main" xmlns:c="http://schemas.openxmlformats.org/drawingml/2006/chart" xmlns:dgm="http://schemas.openxmlformats.org/drawingml/2006/diagram" xmlns:o="urn:schemas-microsoft-com:office:office" xmlns:v="urn:schemas-microsoft-com:vml" xmlns:pvml="urn:schemas-microsoft-com:office:powerpoint" xmlns:com="http://schemas.openxmlformats.org/drawingml/2006/compatibility" xmlns:p14="http://schemas.microsoft.com/office/powerpoint/2010/main" xmlns:p15="http://schemas.microsoft.com/office/powerpoint/2012/main" xmlns:ahyp="http://schemas.microsoft.com/office/drawing/2018/hyperlinkcolor">
-  <p:cSld>
-    <p:spTree>
-      <p:nvGrpSpPr>
-        <p:cNvPr id="124" name="Shape 124"/>
-        <p:cNvGrpSpPr/>
-        <p:nvPr/>
-      </p:nvGrpSpPr>
-      <p:grpSpPr>
-        <a:xfrm>
-          <a:off x="0" y="0"/>
-          <a:ext cx="0" cy="0"/>
-          <a:chOff x="0" y="0"/>
-          <a:chExt cx="0" cy="0"/>
-        </a:xfrm>
-      </p:grpSpPr>
-      <p:sp>
-        <p:nvSpPr>
-          <p:cNvPr id="125" name="Google Shape;125;p18"/>
-          <p:cNvSpPr txBox="1"/>
-          <p:nvPr>
-            <p:ph idx="1" type="body"/>
-          </p:nvPr>
-        </p:nvSpPr>
-        <p:spPr>
-          <a:xfrm>
-            <a:off x="274320" y="914400"/>
-            <a:ext cx="8595300" cy="4114800"/>
-          </a:xfrm>
-          <a:prstGeom prst="rect">
-            <a:avLst/>
-          </a:prstGeom>
-        </p:spPr>
-        <p:txBody>
-          <a:bodyPr anchorCtr="0" anchor="t" bIns="0" lIns="0" spcFirstLastPara="1" rIns="0" wrap="square" tIns="0">
-            <a:noAutofit/>
-          </a:bodyPr>
-          <a:lstStyle/>
-          <a:p>
-            <a:pPr indent="0" lvl="0" marL="0" rtl="0" algn="l">
-              <a:spcBef>
-                <a:spcPts val="0"/>
-              </a:spcBef>
-              <a:spcAft>
-                <a:spcPts val="0"/>
-              </a:spcAft>
-              <a:buClr>
-                <a:schemeClr val="dk1"/>
-              </a:buClr>
-              <a:buSzPts val="1100"/>
-              <a:buFont typeface="Arial"/>
-              <a:buNone/>
-            </a:pPr>
-            <a:r>
-              <a:rPr lang="en"/>
-              <a:t>Four exercises of different weighting</a:t>
-            </a:r>
-            <a:endParaRPr/>
-          </a:p>
-          <a:p>
-            <a:pPr indent="0" lvl="0" marL="0" rtl="0" algn="l">
-              <a:spcBef>
-                <a:spcPts val="1200"/>
-              </a:spcBef>
-              <a:spcAft>
-                <a:spcPts val="0"/>
-              </a:spcAft>
-              <a:buClr>
-                <a:schemeClr val="dk1"/>
-              </a:buClr>
-              <a:buSzPts val="1100"/>
-              <a:buFont typeface="Arial"/>
-              <a:buNone/>
-            </a:pPr>
-            <a:r>
-              <a:rPr lang="en"/>
-              <a:t>Miss more than one exercise and you fail the course</a:t>
-            </a:r>
-            <a:endParaRPr/>
-          </a:p>
-          <a:p>
-            <a:pPr indent="0" lvl="0" marL="0" rtl="0" algn="l">
-              <a:spcBef>
-                <a:spcPts val="1200"/>
-              </a:spcBef>
-              <a:spcAft>
-                <a:spcPts val="1200"/>
-              </a:spcAft>
-              <a:buNone/>
-            </a:pPr>
-            <a:r>
-              <a:t/>
-            </a:r>
-            <a:endParaRPr/>
-          </a:p>
-        </p:txBody>
-      </p:sp>
-      <p:sp>
-        <p:nvSpPr>
-          <p:cNvPr id="126" name="Google Shape;126;p18"/>
-          <p:cNvSpPr txBox="1"/>
-          <p:nvPr>
-            <p:ph type="title"/>
-          </p:nvPr>
-        </p:nvSpPr>
-        <p:spPr>
-          <a:xfrm>
-            <a:off x="0" y="0"/>
-            <a:ext cx="9144000" cy="685800"/>
-          </a:xfrm>
-          <a:prstGeom prst="rect">
-            <a:avLst/>
-          </a:prstGeom>
-        </p:spPr>
-        <p:txBody>
           <a:bodyPr anchorCtr="0" anchor="ctr" bIns="91425" lIns="274300" spcFirstLastPara="1" rIns="91425" wrap="square" tIns="91425">
             <a:noAutofit/>
           </a:bodyPr>
@@ -7352,7 +6892,7 @@
       </p:sp>
       <p:sp>
         <p:nvSpPr>
-          <p:cNvPr id="127" name="Google Shape;127;p18"/>
+          <p:cNvPr id="117" name="Google Shape;117;p17"/>
           <p:cNvSpPr txBox="1"/>
           <p:nvPr>
             <p:ph idx="12" type="sldNum"/>
@@ -7431,12 +6971,12 @@
 </p:sld>
 </file>
 
-<file path=ppt/slides/slide12.xml><?xml version="1.0" encoding="utf-8"?>
+<file path=ppt/slides/slide11.xml><?xml version="1.0" encoding="utf-8"?>
 <p:sld xmlns:a="http://schemas.openxmlformats.org/drawingml/2006/main" xmlns:r="http://schemas.openxmlformats.org/officeDocument/2006/relationships" xmlns:mc="http://schemas.openxmlformats.org/markup-compatibility/2006" xmlns:mv="urn:schemas-microsoft-com:mac:vml" xmlns:p="http://schemas.openxmlformats.org/presentationml/2006/main" xmlns:c="http://schemas.openxmlformats.org/drawingml/2006/chart" xmlns:dgm="http://schemas.openxmlformats.org/drawingml/2006/diagram" xmlns:o="urn:schemas-microsoft-com:office:office" xmlns:v="urn:schemas-microsoft-com:vml" xmlns:pvml="urn:schemas-microsoft-com:office:powerpoint" xmlns:com="http://schemas.openxmlformats.org/drawingml/2006/compatibility" xmlns:p14="http://schemas.microsoft.com/office/powerpoint/2010/main" xmlns:p15="http://schemas.microsoft.com/office/powerpoint/2012/main" xmlns:ahyp="http://schemas.microsoft.com/office/drawing/2018/hyperlinkcolor">
   <p:cSld>
     <p:spTree>
       <p:nvGrpSpPr>
-        <p:cNvPr id="131" name="Shape 131"/>
+        <p:cNvPr id="121" name="Shape 121"/>
         <p:cNvGrpSpPr/>
         <p:nvPr/>
       </p:nvGrpSpPr>
@@ -7450,7 +6990,7 @@
       </p:grpSpPr>
       <p:sp>
         <p:nvSpPr>
-          <p:cNvPr id="132" name="Google Shape;132;p19"/>
+          <p:cNvPr id="122" name="Google Shape;122;p18"/>
           <p:cNvSpPr txBox="1"/>
           <p:nvPr>
             <p:ph type="title"/>
@@ -7482,7 +7022,7 @@
             </a:pPr>
             <a:r>
               <a:rPr lang="en"/>
-              <a:t>Course Management System</a:t>
+              <a:t>Use of AIs in Class and for Homework</a:t>
             </a:r>
             <a:endParaRPr/>
           </a:p>
@@ -7490,7 +7030,80 @@
       </p:sp>
       <p:sp>
         <p:nvSpPr>
-          <p:cNvPr id="133" name="Google Shape;133;p19"/>
+          <p:cNvPr id="123" name="Google Shape;123;p18"/>
+          <p:cNvSpPr txBox="1"/>
+          <p:nvPr>
+            <p:ph idx="12" type="sldNum"/>
+          </p:nvPr>
+        </p:nvSpPr>
+        <p:spPr>
+          <a:xfrm>
+            <a:off x="7315202" y="4416550"/>
+            <a:ext cx="1828800" cy="731400"/>
+          </a:xfrm>
+          <a:prstGeom prst="rect">
+            <a:avLst/>
+          </a:prstGeom>
+        </p:spPr>
+        <p:txBody>
+          <a:bodyPr anchorCtr="0" anchor="b" bIns="91425" lIns="91425" spcFirstLastPara="1" rIns="91425" wrap="square" tIns="91425">
+            <a:noAutofit/>
+          </a:bodyPr>
+          <a:lstStyle/>
+          <a:p>
+            <a:pPr indent="0" lvl="0" marL="0" rtl="0" algn="r">
+              <a:spcBef>
+                <a:spcPts val="0"/>
+              </a:spcBef>
+              <a:spcAft>
+                <a:spcPts val="0"/>
+              </a:spcAft>
+              <a:buNone/>
+            </a:pPr>
+            <a:fld id="{00000000-1234-1234-1234-123412341234}" type="slidenum">
+              <a:rPr lang="en"/>
+              <a:t>‹#›</a:t>
+            </a:fld>
+            <a:endParaRPr/>
+          </a:p>
+          <a:p>
+            <a:pPr indent="0" lvl="0" marL="0" rtl="0" algn="r">
+              <a:spcBef>
+                <a:spcPts val="0"/>
+              </a:spcBef>
+              <a:spcAft>
+                <a:spcPts val="0"/>
+              </a:spcAft>
+              <a:buNone/>
+            </a:pPr>
+            <a:r>
+              <a:rPr b="0" lang="en" sz="900" u="sng">
+                <a:solidFill>
+                  <a:schemeClr val="hlink"/>
+                </a:solidFill>
+                <a:hlinkClick r:id="rId3"/>
+              </a:rPr>
+              <a:t>https://oss.cs.fau.de</a:t>
+            </a:r>
+            <a:r>
+              <a:rPr b="0" lang="en" sz="900">
+                <a:solidFill>
+                  <a:schemeClr val="dk2"/>
+                </a:solidFill>
+              </a:rPr>
+              <a:t> </a:t>
+            </a:r>
+            <a:endParaRPr b="0" sz="900">
+              <a:solidFill>
+                <a:schemeClr val="dk2"/>
+              </a:solidFill>
+            </a:endParaRPr>
+          </a:p>
+        </p:txBody>
+      </p:sp>
+      <p:sp>
+        <p:nvSpPr>
+          <p:cNvPr id="124" name="Google Shape;124;p18"/>
           <p:cNvSpPr txBox="1"/>
           <p:nvPr>
             <p:ph idx="1" type="body"/>
@@ -7522,20 +7135,11 @@
             </a:pPr>
             <a:r>
               <a:rPr lang="en"/>
-              <a:t>Please sign up on </a:t>
-            </a:r>
-            <a:r>
-              <a:rPr lang="en" u="sng">
-                <a:solidFill>
-                  <a:schemeClr val="hlink"/>
-                </a:solidFill>
-                <a:hlinkClick r:id="rId3"/>
-              </a:rPr>
-              <a:t>https://myc.uni1.de</a:t>
+              <a:t>The use of AIs to support your work is generally </a:t>
             </a:r>
             <a:r>
               <a:rPr lang="en"/>
-              <a:t> for the course [1]</a:t>
+              <a:t>allowed</a:t>
             </a:r>
             <a:endParaRPr/>
           </a:p>
@@ -7551,7 +7155,7 @@
             </a:pPr>
             <a:r>
               <a:rPr lang="en"/>
-              <a:t>Make sure your first and last name match your university credentials</a:t>
+              <a:t>You remain responsible for the results of your work</a:t>
             </a:r>
             <a:endParaRPr/>
           </a:p>
@@ -7566,7 +7170,73 @@
               <a:buNone/>
             </a:pPr>
             <a:r>
-              <a:t/>
+              <a:rPr lang="en"/>
+              <a:t>Use of an AI has to be declared together with the work</a:t>
+            </a:r>
+            <a:endParaRPr/>
+          </a:p>
+        </p:txBody>
+      </p:sp>
+    </p:spTree>
+  </p:cSld>
+  <p:clrMapOvr>
+    <a:masterClrMapping/>
+  </p:clrMapOvr>
+</p:sld>
+</file>
+
+<file path=ppt/slides/slide12.xml><?xml version="1.0" encoding="utf-8"?>
+<p:sld xmlns:a="http://schemas.openxmlformats.org/drawingml/2006/main" xmlns:r="http://schemas.openxmlformats.org/officeDocument/2006/relationships" xmlns:mc="http://schemas.openxmlformats.org/markup-compatibility/2006" xmlns:mv="urn:schemas-microsoft-com:mac:vml" xmlns:p="http://schemas.openxmlformats.org/presentationml/2006/main" xmlns:c="http://schemas.openxmlformats.org/drawingml/2006/chart" xmlns:dgm="http://schemas.openxmlformats.org/drawingml/2006/diagram" xmlns:o="urn:schemas-microsoft-com:office:office" xmlns:v="urn:schemas-microsoft-com:vml" xmlns:pvml="urn:schemas-microsoft-com:office:powerpoint" xmlns:com="http://schemas.openxmlformats.org/drawingml/2006/compatibility" xmlns:p14="http://schemas.microsoft.com/office/powerpoint/2010/main" xmlns:p15="http://schemas.microsoft.com/office/powerpoint/2012/main" xmlns:ahyp="http://schemas.microsoft.com/office/drawing/2018/hyperlinkcolor">
+  <p:cSld>
+    <p:spTree>
+      <p:nvGrpSpPr>
+        <p:cNvPr id="128" name="Shape 128"/>
+        <p:cNvGrpSpPr/>
+        <p:nvPr/>
+      </p:nvGrpSpPr>
+      <p:grpSpPr>
+        <a:xfrm>
+          <a:off x="0" y="0"/>
+          <a:ext cx="0" cy="0"/>
+          <a:chOff x="0" y="0"/>
+          <a:chExt cx="0" cy="0"/>
+        </a:xfrm>
+      </p:grpSpPr>
+      <p:sp>
+        <p:nvSpPr>
+          <p:cNvPr id="129" name="Google Shape;129;p19"/>
+          <p:cNvSpPr txBox="1"/>
+          <p:nvPr>
+            <p:ph type="title"/>
+          </p:nvPr>
+        </p:nvSpPr>
+        <p:spPr>
+          <a:xfrm>
+            <a:off x="0" y="0"/>
+            <a:ext cx="9144000" cy="685800"/>
+          </a:xfrm>
+          <a:prstGeom prst="rect">
+            <a:avLst/>
+          </a:prstGeom>
+        </p:spPr>
+        <p:txBody>
+          <a:bodyPr anchorCtr="0" anchor="ctr" bIns="91425" lIns="274300" spcFirstLastPara="1" rIns="91425" wrap="square" tIns="91425">
+            <a:noAutofit/>
+          </a:bodyPr>
+          <a:lstStyle/>
+          <a:p>
+            <a:pPr indent="0" lvl="0" marL="0" rtl="0" algn="l">
+              <a:spcBef>
+                <a:spcPts val="0"/>
+              </a:spcBef>
+              <a:spcAft>
+                <a:spcPts val="0"/>
+              </a:spcAft>
+              <a:buNone/>
+            </a:pPr>
+            <a:r>
+              <a:rPr lang="en"/>
+              <a:t>Responsibility for Internet Connection</a:t>
             </a:r>
             <a:endParaRPr/>
           </a:p>
@@ -7574,7 +7244,64 @@
       </p:sp>
       <p:sp>
         <p:nvSpPr>
-          <p:cNvPr id="134" name="Google Shape;134;p19"/>
+          <p:cNvPr id="130" name="Google Shape;130;p19"/>
+          <p:cNvSpPr txBox="1"/>
+          <p:nvPr>
+            <p:ph idx="1" type="body"/>
+          </p:nvPr>
+        </p:nvSpPr>
+        <p:spPr>
+          <a:xfrm>
+            <a:off x="274320" y="914400"/>
+            <a:ext cx="8595300" cy="4114800"/>
+          </a:xfrm>
+          <a:prstGeom prst="rect">
+            <a:avLst/>
+          </a:prstGeom>
+        </p:spPr>
+        <p:txBody>
+          <a:bodyPr anchorCtr="0" anchor="t" bIns="0" lIns="0" spcFirstLastPara="1" rIns="0" wrap="square" tIns="0">
+            <a:noAutofit/>
+          </a:bodyPr>
+          <a:lstStyle/>
+          <a:p>
+            <a:pPr indent="0" lvl="0" marL="0" rtl="0" algn="l">
+              <a:spcBef>
+                <a:spcPts val="0"/>
+              </a:spcBef>
+              <a:spcAft>
+                <a:spcPts val="0"/>
+              </a:spcAft>
+              <a:buNone/>
+            </a:pPr>
+            <a:r>
+              <a:rPr lang="en"/>
+              <a:t>If this is an online course, you are responsible for your internet connection</a:t>
+            </a:r>
+            <a:endParaRPr/>
+          </a:p>
+          <a:p>
+            <a:pPr indent="-342900" lvl="0" marL="457200" rtl="0" algn="l">
+              <a:spcBef>
+                <a:spcPts val="1200"/>
+              </a:spcBef>
+              <a:spcAft>
+                <a:spcPts val="0"/>
+              </a:spcAft>
+              <a:buSzPts val="1800"/>
+              <a:buChar char="●"/>
+            </a:pPr>
+            <a:r>
+              <a:rPr lang="en"/>
+              <a:t>If I ask you a question, you need to be able to answer</a:t>
+            </a:r>
+            <a:endParaRPr/>
+          </a:p>
+        </p:txBody>
+      </p:sp>
+      <p:sp>
+        <p:nvSpPr>
+          <p:cNvPr id="131" name="Google Shape;131;p19"/>
           <p:cNvSpPr txBox="1"/>
           <p:nvPr>
             <p:ph idx="12" type="sldNum"/>
@@ -7625,7 +7352,7 @@
                 <a:solidFill>
                   <a:schemeClr val="hlink"/>
                 </a:solidFill>
-                <a:hlinkClick r:id="rId4"/>
+                <a:hlinkClick r:id="rId3"/>
               </a:rPr>
               <a:t>https://oss.cs.fau.de</a:t>
             </a:r>
@@ -7645,85 +7372,6 @@
           </a:p>
         </p:txBody>
       </p:sp>
-      <p:sp>
-        <p:nvSpPr>
-          <p:cNvPr id="135" name="Google Shape;135;p19"/>
-          <p:cNvSpPr txBox="1"/>
-          <p:nvPr/>
-        </p:nvSpPr>
-        <p:spPr>
-          <a:xfrm>
-            <a:off x="0" y="4233675"/>
-            <a:ext cx="7893600" cy="914400"/>
-          </a:xfrm>
-          <a:prstGeom prst="rect">
-            <a:avLst/>
-          </a:prstGeom>
-          <a:noFill/>
-          <a:ln>
-            <a:noFill/>
-          </a:ln>
-        </p:spPr>
-        <p:txBody>
-          <a:bodyPr anchorCtr="0" anchor="b" bIns="91425" lIns="91425" spcFirstLastPara="1" rIns="91425" wrap="square" tIns="91425">
-            <a:noAutofit/>
-          </a:bodyPr>
-          <a:lstStyle/>
-          <a:p>
-            <a:pPr indent="0" lvl="0" marL="0" rtl="0" algn="l">
-              <a:spcBef>
-                <a:spcPts val="0"/>
-              </a:spcBef>
-              <a:spcAft>
-                <a:spcPts val="0"/>
-              </a:spcAft>
-              <a:buNone/>
-            </a:pPr>
-            <a:r>
-              <a:rPr lang="en">
-                <a:solidFill>
-                  <a:schemeClr val="dk1"/>
-                </a:solidFill>
-              </a:rPr>
-              <a:t>[1] Please </a:t>
-            </a:r>
-            <a:r>
-              <a:rPr b="1" lang="en">
-                <a:solidFill>
-                  <a:schemeClr val="dk1"/>
-                </a:solidFill>
-              </a:rPr>
-              <a:t>use your university email address</a:t>
-            </a:r>
-            <a:r>
-              <a:rPr lang="en">
-                <a:solidFill>
-                  <a:schemeClr val="dk1"/>
-                </a:solidFill>
-              </a:rPr>
-              <a:t>; do not use GMX or </a:t>
-            </a:r>
-            <a:r>
-              <a:rPr lang="en" u="sng">
-                <a:solidFill>
-                  <a:schemeClr val="hlink"/>
-                </a:solidFill>
-                <a:hlinkClick r:id="rId5"/>
-              </a:rPr>
-              <a:t>web.de</a:t>
-            </a:r>
-            <a:r>
-              <a:rPr lang="en">
-                <a:solidFill>
-                  <a:schemeClr val="dk1"/>
-                </a:solidFill>
-              </a:rPr>
-              <a:t> email addresses</a:t>
-            </a:r>
-            <a:endParaRPr/>
-          </a:p>
-        </p:txBody>
-      </p:sp>
     </p:spTree>
   </p:cSld>
   <p:clrMapOvr>
@@ -7737,7 +7385,7 @@
   <p:cSld>
     <p:spTree>
       <p:nvGrpSpPr>
-        <p:cNvPr id="139" name="Shape 139"/>
+        <p:cNvPr id="135" name="Shape 135"/>
         <p:cNvGrpSpPr/>
         <p:nvPr/>
       </p:nvGrpSpPr>
@@ -7751,7 +7399,7 @@
       </p:grpSpPr>
       <p:sp>
         <p:nvSpPr>
-          <p:cNvPr id="140" name="Google Shape;140;p20"/>
+          <p:cNvPr id="136" name="Google Shape;136;p20"/>
           <p:cNvSpPr txBox="1"/>
           <p:nvPr>
             <p:ph type="title"/>
@@ -7783,7 +7431,7 @@
             </a:pPr>
             <a:r>
               <a:rPr lang="en"/>
-              <a:t>Receiving a Grade for the Course</a:t>
+              <a:t>Using SCA Tool</a:t>
             </a:r>
             <a:endParaRPr/>
           </a:p>
@@ -7791,7 +7439,7 @@
       </p:sp>
       <p:sp>
         <p:nvSpPr>
-          <p:cNvPr id="141" name="Google Shape;141;p20"/>
+          <p:cNvPr id="137" name="Google Shape;137;p20"/>
           <p:cNvSpPr txBox="1"/>
           <p:nvPr>
             <p:ph idx="1" type="body"/>
@@ -7819,16 +7467,11 @@
               <a:spcAft>
                 <a:spcPts val="0"/>
               </a:spcAft>
-              <a:buClr>
-                <a:schemeClr val="dk1"/>
-              </a:buClr>
-              <a:buSzPts val="1100"/>
-              <a:buFont typeface="Arial"/>
               <a:buNone/>
             </a:pPr>
             <a:r>
               <a:rPr lang="en"/>
-              <a:t>Course management and exam registration are two separate things</a:t>
+              <a:t>You are responsible for finishing your homework before class day</a:t>
             </a:r>
             <a:endParaRPr/>
           </a:p>
@@ -7840,67 +7483,11 @@
               <a:spcAft>
                 <a:spcPts val="0"/>
               </a:spcAft>
-              <a:buClr>
-                <a:schemeClr val="dk1"/>
-              </a:buClr>
-              <a:buSzPts val="1100"/>
-              <a:buFont typeface="Arial"/>
               <a:buNone/>
             </a:pPr>
             <a:r>
               <a:rPr lang="en"/>
-              <a:t>If you want to receive a grade</a:t>
-            </a:r>
-            <a:endParaRPr/>
-          </a:p>
-          <a:p>
-            <a:pPr indent="-342900" lvl="0" marL="457200" rtl="0" algn="l">
-              <a:spcBef>
-                <a:spcPts val="1200"/>
-              </a:spcBef>
-              <a:spcAft>
-                <a:spcPts val="0"/>
-              </a:spcAft>
-              <a:buSzPts val="1800"/>
-              <a:buChar char="●"/>
-            </a:pPr>
-            <a:r>
-              <a:rPr lang="en"/>
-              <a:t>You must register through your university’s exam registration system</a:t>
-            </a:r>
-            <a:endParaRPr/>
-          </a:p>
-          <a:p>
-            <a:pPr indent="-317500" lvl="1" marL="914400" rtl="0" algn="l">
-              <a:spcBef>
-                <a:spcPts val="0"/>
-              </a:spcBef>
-              <a:spcAft>
-                <a:spcPts val="0"/>
-              </a:spcAft>
-              <a:buSzPts val="1400"/>
-              <a:buChar char="○"/>
-            </a:pPr>
-            <a:r>
-              <a:rPr lang="en"/>
-              <a:t>Your degree program may have split the course into two (VL + UE)</a:t>
-            </a:r>
-            <a:endParaRPr/>
-          </a:p>
-          <a:p>
-            <a:pPr indent="-317500" lvl="1" marL="914400" rtl="0" algn="l">
-              <a:spcBef>
-                <a:spcPts val="0"/>
-              </a:spcBef>
-              <a:spcAft>
-                <a:spcPts val="0"/>
-              </a:spcAft>
-              <a:buSzPts val="1400"/>
-              <a:buChar char="○"/>
-            </a:pPr>
-            <a:r>
-              <a:rPr lang="en"/>
-              <a:t>Please check asap that the course is available in your degree program!</a:t>
+              <a:t>Complaints about SCA Tool on class day will be ignored</a:t>
             </a:r>
             <a:endParaRPr/>
           </a:p>
@@ -7910,33 +7497,13 @@
                 <a:spcPts val="1200"/>
               </a:spcBef>
               <a:spcAft>
-                <a:spcPts val="0"/>
-              </a:spcAft>
-              <a:buClr>
-                <a:schemeClr val="dk1"/>
-              </a:buClr>
-              <a:buSzPts val="1100"/>
-              <a:buFont typeface="Arial"/>
+                <a:spcPts val="1200"/>
+              </a:spcAft>
               <a:buNone/>
             </a:pPr>
             <a:r>
               <a:rPr lang="en"/>
-              <a:t>Otherwise: No grade</a:t>
-            </a:r>
-            <a:endParaRPr/>
-          </a:p>
-          <a:p>
-            <a:pPr indent="0" lvl="0" marL="0" rtl="0" algn="l">
-              <a:spcBef>
-                <a:spcPts val="1200"/>
-              </a:spcBef>
-              <a:spcAft>
-                <a:spcPts val="1200"/>
-              </a:spcAft>
-              <a:buNone/>
-            </a:pPr>
-            <a:r>
-              <a:t/>
+              <a:t>If you complain nevertheless, you’ll get a malus</a:t>
             </a:r>
             <a:endParaRPr/>
           </a:p>
@@ -7944,7 +7511,7 @@
       </p:sp>
       <p:sp>
         <p:nvSpPr>
-          <p:cNvPr id="142" name="Google Shape;142;p20"/>
+          <p:cNvPr id="138" name="Google Shape;138;p20"/>
           <p:cNvSpPr txBox="1"/>
           <p:nvPr>
             <p:ph idx="12" type="sldNum"/>
@@ -8028,7 +7595,7 @@
   <p:cSld>
     <p:spTree>
       <p:nvGrpSpPr>
-        <p:cNvPr id="146" name="Shape 146"/>
+        <p:cNvPr id="142" name="Shape 142"/>
         <p:cNvGrpSpPr/>
         <p:nvPr/>
       </p:nvGrpSpPr>
@@ -8042,7 +7609,241 @@
       </p:grpSpPr>
       <p:sp>
         <p:nvSpPr>
+          <p:cNvPr id="143" name="Google Shape;143;p21"/>
+          <p:cNvSpPr txBox="1"/>
+          <p:nvPr>
+            <p:ph type="title"/>
+          </p:nvPr>
+        </p:nvSpPr>
+        <p:spPr>
+          <a:xfrm>
+            <a:off x="0" y="0"/>
+            <a:ext cx="9144000" cy="685800"/>
+          </a:xfrm>
+          <a:prstGeom prst="rect">
+            <a:avLst/>
+          </a:prstGeom>
+        </p:spPr>
+        <p:txBody>
+          <a:bodyPr anchorCtr="0" anchor="ctr" bIns="0" lIns="274300" spcFirstLastPara="1" rIns="0" wrap="square" tIns="0">
+            <a:noAutofit/>
+          </a:bodyPr>
+          <a:lstStyle/>
+          <a:p>
+            <a:pPr indent="0" lvl="0" marL="0" rtl="0" algn="l">
+              <a:spcBef>
+                <a:spcPts val="0"/>
+              </a:spcBef>
+              <a:spcAft>
+                <a:spcPts val="0"/>
+              </a:spcAft>
+              <a:buNone/>
+            </a:pPr>
+            <a:r>
+              <a:rPr lang="en"/>
+              <a:t>Three Steps to Proper Registration</a:t>
+            </a:r>
+            <a:endParaRPr/>
+          </a:p>
+        </p:txBody>
+      </p:sp>
+      <p:sp>
+        <p:nvSpPr>
+          <p:cNvPr id="144" name="Google Shape;144;p21"/>
+          <p:cNvSpPr txBox="1"/>
+          <p:nvPr>
+            <p:ph idx="12" type="sldNum"/>
+          </p:nvPr>
+        </p:nvSpPr>
+        <p:spPr>
+          <a:xfrm>
+            <a:off x="7315202" y="4416550"/>
+            <a:ext cx="1828800" cy="731400"/>
+          </a:xfrm>
+          <a:prstGeom prst="rect">
+            <a:avLst/>
+          </a:prstGeom>
+        </p:spPr>
+        <p:txBody>
+          <a:bodyPr anchorCtr="0" anchor="b" bIns="91425" lIns="91425" spcFirstLastPara="1" rIns="91425" wrap="square" tIns="91425">
+            <a:noAutofit/>
+          </a:bodyPr>
+          <a:lstStyle/>
+          <a:p>
+            <a:pPr indent="0" lvl="0" marL="0" rtl="0" algn="r">
+              <a:spcBef>
+                <a:spcPts val="0"/>
+              </a:spcBef>
+              <a:spcAft>
+                <a:spcPts val="0"/>
+              </a:spcAft>
+              <a:buNone/>
+            </a:pPr>
+            <a:fld id="{00000000-1234-1234-1234-123412341234}" type="slidenum">
+              <a:rPr lang="en"/>
+              <a:t>‹#›</a:t>
+            </a:fld>
+            <a:endParaRPr/>
+          </a:p>
+          <a:p>
+            <a:pPr indent="0" lvl="0" marL="0" rtl="0" algn="r">
+              <a:spcBef>
+                <a:spcPts val="0"/>
+              </a:spcBef>
+              <a:spcAft>
+                <a:spcPts val="0"/>
+              </a:spcAft>
+              <a:buNone/>
+            </a:pPr>
+            <a:r>
+              <a:rPr b="0" lang="en" sz="900" u="sng">
+                <a:solidFill>
+                  <a:schemeClr val="hlink"/>
+                </a:solidFill>
+                <a:hlinkClick r:id="rId3"/>
+              </a:rPr>
+              <a:t>https://oss.cs.fau.de</a:t>
+            </a:r>
+            <a:r>
+              <a:rPr b="0" lang="en" sz="900">
+                <a:solidFill>
+                  <a:schemeClr val="dk2"/>
+                </a:solidFill>
+              </a:rPr>
+              <a:t> </a:t>
+            </a:r>
+            <a:endParaRPr>
+              <a:solidFill>
+                <a:schemeClr val="dk2"/>
+              </a:solidFill>
+            </a:endParaRPr>
+          </a:p>
+        </p:txBody>
+      </p:sp>
+      <p:pic>
+        <p:nvPicPr>
+          <p:cNvPr id="145" name="Google Shape;145;p21"/>
+          <p:cNvPicPr preferRelativeResize="0"/>
+          <p:nvPr/>
+        </p:nvPicPr>
+        <p:blipFill>
+          <a:blip r:embed="rId4">
+            <a:alphaModFix/>
+          </a:blip>
+          <a:stretch>
+            <a:fillRect/>
+          </a:stretch>
+        </p:blipFill>
+        <p:spPr>
+          <a:xfrm>
+            <a:off x="672350" y="1657350"/>
+            <a:ext cx="1828800" cy="1828800"/>
+          </a:xfrm>
+          <a:prstGeom prst="rect">
+            <a:avLst/>
+          </a:prstGeom>
+          <a:noFill/>
+          <a:ln>
+            <a:noFill/>
+          </a:ln>
+        </p:spPr>
+      </p:pic>
+      <p:pic>
+        <p:nvPicPr>
+          <p:cNvPr id="146" name="Google Shape;146;p21"/>
+          <p:cNvPicPr preferRelativeResize="0"/>
+          <p:nvPr/>
+        </p:nvPicPr>
+        <p:blipFill>
+          <a:blip r:embed="rId5">
+            <a:alphaModFix/>
+          </a:blip>
+          <a:stretch>
+            <a:fillRect/>
+          </a:stretch>
+        </p:blipFill>
+        <p:spPr>
+          <a:xfrm>
+            <a:off x="3202794" y="1657350"/>
+            <a:ext cx="2738413" cy="1828800"/>
+          </a:xfrm>
+          <a:prstGeom prst="rect">
+            <a:avLst/>
+          </a:prstGeom>
+          <a:noFill/>
+          <a:ln cap="flat" cmpd="sng" w="9525">
+            <a:solidFill>
+              <a:schemeClr val="dk2"/>
+            </a:solidFill>
+            <a:prstDash val="solid"/>
+            <a:round/>
+            <a:headEnd len="sm" w="sm" type="none"/>
+            <a:tailEnd len="sm" w="sm" type="none"/>
+          </a:ln>
+        </p:spPr>
+      </p:pic>
+      <p:pic>
+        <p:nvPicPr>
           <p:cNvPr id="147" name="Google Shape;147;p21"/>
+          <p:cNvPicPr preferRelativeResize="0"/>
+          <p:nvPr/>
+        </p:nvPicPr>
+        <p:blipFill>
+          <a:blip r:embed="rId6">
+            <a:alphaModFix/>
+          </a:blip>
+          <a:stretch>
+            <a:fillRect/>
+          </a:stretch>
+        </p:blipFill>
+        <p:spPr>
+          <a:xfrm>
+            <a:off x="6642850" y="1657350"/>
+            <a:ext cx="1828800" cy="1828800"/>
+          </a:xfrm>
+          <a:prstGeom prst="rect">
+            <a:avLst/>
+          </a:prstGeom>
+          <a:noFill/>
+          <a:ln cap="flat" cmpd="sng" w="9525">
+            <a:solidFill>
+              <a:schemeClr val="dk2"/>
+            </a:solidFill>
+            <a:prstDash val="solid"/>
+            <a:round/>
+            <a:headEnd len="sm" w="sm" type="none"/>
+            <a:tailEnd len="sm" w="sm" type="none"/>
+          </a:ln>
+        </p:spPr>
+      </p:pic>
+    </p:spTree>
+  </p:cSld>
+  <p:clrMapOvr>
+    <a:masterClrMapping/>
+  </p:clrMapOvr>
+</p:sld>
+</file>
+
+<file path=ppt/slides/slide15.xml><?xml version="1.0" encoding="utf-8"?>
+<p:sld xmlns:a="http://schemas.openxmlformats.org/drawingml/2006/main" xmlns:r="http://schemas.openxmlformats.org/officeDocument/2006/relationships" xmlns:mc="http://schemas.openxmlformats.org/markup-compatibility/2006" xmlns:mv="urn:schemas-microsoft-com:mac:vml" xmlns:p="http://schemas.openxmlformats.org/presentationml/2006/main" xmlns:c="http://schemas.openxmlformats.org/drawingml/2006/chart" xmlns:dgm="http://schemas.openxmlformats.org/drawingml/2006/diagram" xmlns:o="urn:schemas-microsoft-com:office:office" xmlns:v="urn:schemas-microsoft-com:vml" xmlns:pvml="urn:schemas-microsoft-com:office:powerpoint" xmlns:com="http://schemas.openxmlformats.org/drawingml/2006/compatibility" xmlns:p14="http://schemas.microsoft.com/office/powerpoint/2010/main" xmlns:p15="http://schemas.microsoft.com/office/powerpoint/2012/main" xmlns:ahyp="http://schemas.microsoft.com/office/drawing/2018/hyperlinkcolor">
+  <p:cSld>
+    <p:spTree>
+      <p:nvGrpSpPr>
+        <p:cNvPr id="151" name="Shape 151"/>
+        <p:cNvGrpSpPr/>
+        <p:nvPr/>
+      </p:nvGrpSpPr>
+      <p:grpSpPr>
+        <a:xfrm>
+          <a:off x="0" y="0"/>
+          <a:ext cx="0" cy="0"/>
+          <a:chOff x="0" y="0"/>
+          <a:chExt cx="0" cy="0"/>
+        </a:xfrm>
+      </p:grpSpPr>
+      <p:sp>
+        <p:nvSpPr>
+          <p:cNvPr id="152" name="Google Shape;152;p22"/>
           <p:cNvSpPr txBox="1"/>
           <p:nvPr>
             <p:ph type="title"/>
@@ -8082,7 +7883,7 @@
       </p:sp>
       <p:pic>
         <p:nvPicPr>
-          <p:cNvPr id="148" name="Google Shape;148;p21"/>
+          <p:cNvPr id="153" name="Google Shape;153;p22"/>
           <p:cNvPicPr preferRelativeResize="0"/>
           <p:nvPr/>
         </p:nvPicPr>
@@ -8110,7 +7911,7 @@
       </p:pic>
       <p:sp>
         <p:nvSpPr>
-          <p:cNvPr id="149" name="Google Shape;149;p21"/>
+          <p:cNvPr id="154" name="Google Shape;154;p22"/>
           <p:cNvSpPr txBox="1"/>
           <p:nvPr/>
         </p:nvSpPr>
@@ -8152,7 +7953,7 @@
       </p:sp>
       <p:sp>
         <p:nvSpPr>
-          <p:cNvPr id="150" name="Google Shape;150;p21"/>
+          <p:cNvPr id="155" name="Google Shape;155;p22"/>
           <p:cNvSpPr txBox="1"/>
           <p:nvPr>
             <p:ph idx="12" type="sldNum"/>
@@ -8231,12 +8032,12 @@
 </p:sld>
 </file>
 
-<file path=ppt/slides/slide15.xml><?xml version="1.0" encoding="utf-8"?>
+<file path=ppt/slides/slide16.xml><?xml version="1.0" encoding="utf-8"?>
 <p:sld xmlns:a="http://schemas.openxmlformats.org/drawingml/2006/main" xmlns:r="http://schemas.openxmlformats.org/officeDocument/2006/relationships" xmlns:mc="http://schemas.openxmlformats.org/markup-compatibility/2006" xmlns:mv="urn:schemas-microsoft-com:mac:vml" xmlns:p="http://schemas.openxmlformats.org/presentationml/2006/main" xmlns:c="http://schemas.openxmlformats.org/drawingml/2006/chart" xmlns:dgm="http://schemas.openxmlformats.org/drawingml/2006/diagram" xmlns:o="urn:schemas-microsoft-com:office:office" xmlns:v="urn:schemas-microsoft-com:vml" xmlns:pvml="urn:schemas-microsoft-com:office:powerpoint" xmlns:com="http://schemas.openxmlformats.org/drawingml/2006/compatibility" xmlns:p14="http://schemas.microsoft.com/office/powerpoint/2010/main" xmlns:p15="http://schemas.microsoft.com/office/powerpoint/2012/main" xmlns:ahyp="http://schemas.microsoft.com/office/drawing/2018/hyperlinkcolor">
   <p:cSld>
     <p:spTree>
       <p:nvGrpSpPr>
-        <p:cNvPr id="154" name="Shape 154"/>
+        <p:cNvPr id="159" name="Shape 159"/>
         <p:cNvGrpSpPr/>
         <p:nvPr/>
       </p:nvGrpSpPr>
@@ -8250,7 +8051,7 @@
       </p:grpSpPr>
       <p:sp>
         <p:nvSpPr>
-          <p:cNvPr id="155" name="Google Shape;155;p22"/>
+          <p:cNvPr id="160" name="Google Shape;160;p23"/>
           <p:cNvSpPr txBox="1"/>
           <p:nvPr>
             <p:ph type="title"/>
@@ -8290,7 +8091,7 @@
       </p:sp>
       <p:sp>
         <p:nvSpPr>
-          <p:cNvPr id="156" name="Google Shape;156;p22"/>
+          <p:cNvPr id="161" name="Google Shape;161;p23"/>
           <p:cNvSpPr txBox="1"/>
           <p:nvPr>
             <p:ph idx="12" type="sldNum"/>
@@ -8363,7 +8164,7 @@
       </p:sp>
       <p:sp>
         <p:nvSpPr>
-          <p:cNvPr id="157" name="Google Shape;157;p22"/>
+          <p:cNvPr id="162" name="Google Shape;162;p23"/>
           <p:cNvSpPr txBox="1"/>
           <p:nvPr>
             <p:ph idx="1" type="body"/>
@@ -8434,7 +8235,7 @@
             </a:pPr>
             <a:r>
               <a:rPr lang="en"/>
-              <a:t>Student: English</a:t>
+              <a:t>Student: English or German</a:t>
             </a:r>
             <a:endParaRPr/>
           </a:p>
@@ -8463,12 +8264,12 @@
 </p:sld>
 </file>
 
-<file path=ppt/slides/slide16.xml><?xml version="1.0" encoding="utf-8"?>
+<file path=ppt/slides/slide17.xml><?xml version="1.0" encoding="utf-8"?>
 <p:sld xmlns:a="http://schemas.openxmlformats.org/drawingml/2006/main" xmlns:r="http://schemas.openxmlformats.org/officeDocument/2006/relationships" xmlns:mc="http://schemas.openxmlformats.org/markup-compatibility/2006" xmlns:mv="urn:schemas-microsoft-com:mac:vml" xmlns:p="http://schemas.openxmlformats.org/presentationml/2006/main" xmlns:c="http://schemas.openxmlformats.org/drawingml/2006/chart" xmlns:dgm="http://schemas.openxmlformats.org/drawingml/2006/diagram" xmlns:o="urn:schemas-microsoft-com:office:office" xmlns:v="urn:schemas-microsoft-com:vml" xmlns:pvml="urn:schemas-microsoft-com:office:powerpoint" xmlns:com="http://schemas.openxmlformats.org/drawingml/2006/compatibility" xmlns:p14="http://schemas.microsoft.com/office/powerpoint/2010/main" xmlns:p15="http://schemas.microsoft.com/office/powerpoint/2012/main" xmlns:ahyp="http://schemas.microsoft.com/office/drawing/2018/hyperlinkcolor">
   <p:cSld>
     <p:spTree>
       <p:nvGrpSpPr>
-        <p:cNvPr id="161" name="Shape 161"/>
+        <p:cNvPr id="166" name="Shape 166"/>
         <p:cNvGrpSpPr/>
         <p:nvPr/>
       </p:nvGrpSpPr>
@@ -8482,7 +8283,7 @@
       </p:grpSpPr>
       <p:sp>
         <p:nvSpPr>
-          <p:cNvPr id="162" name="Google Shape;162;p23"/>
+          <p:cNvPr id="167" name="Google Shape;167;p24"/>
           <p:cNvSpPr txBox="1"/>
           <p:nvPr>
             <p:ph type="title"/>
@@ -8522,7 +8323,7 @@
       </p:sp>
       <p:sp>
         <p:nvSpPr>
-          <p:cNvPr id="163" name="Google Shape;163;p23"/>
+          <p:cNvPr id="168" name="Google Shape;168;p24"/>
           <p:cNvSpPr txBox="1"/>
           <p:nvPr>
             <p:ph idx="1" type="body"/>
@@ -8550,29 +8351,7 @@
               <a:spcAft>
                 <a:spcPts val="0"/>
               </a:spcAft>
-              <a:buClr>
-                <a:schemeClr val="dk1"/>
-              </a:buClr>
-              <a:buSzPts val="1100"/>
-              <a:buFont typeface="Arial"/>
-              <a:buNone/>
-            </a:pPr>
-            <a:r>
-              <a:rPr lang="en"/>
-              <a:t>Course organization a.k.a. information index</a:t>
-            </a:r>
-            <a:endParaRPr/>
-          </a:p>
-          <a:p>
-            <a:pPr indent="-342900" lvl="0" marL="457200" rtl="0" algn="l">
-              <a:spcBef>
-                <a:spcPts val="1200"/>
-              </a:spcBef>
-              <a:spcAft>
-                <a:spcPts val="0"/>
-              </a:spcAft>
-              <a:buSzPts val="1800"/>
-              <a:buChar char="●"/>
+              <a:buNone/>
             </a:pPr>
             <a:r>
               <a:rPr lang="en"/>
@@ -8587,68 +8366,6 @@
               </a:rPr>
               <a:t>https://foss.uni1.de</a:t>
             </a:r>
-            <a:r>
-              <a:rPr lang="en"/>
-              <a:t>   </a:t>
-            </a:r>
-            <a:endParaRPr/>
-          </a:p>
-          <a:p>
-            <a:pPr indent="0" lvl="0" marL="0" rtl="0" algn="l">
-              <a:spcBef>
-                <a:spcPts val="1200"/>
-              </a:spcBef>
-              <a:spcAft>
-                <a:spcPts val="0"/>
-              </a:spcAft>
-              <a:buClr>
-                <a:schemeClr val="dk1"/>
-              </a:buClr>
-              <a:buSzPts val="1100"/>
-              <a:buFont typeface="Arial"/>
-              <a:buNone/>
-            </a:pPr>
-            <a:r>
-              <a:rPr lang="en"/>
-              <a:t>Course schedule</a:t>
-            </a:r>
-            <a:endParaRPr/>
-          </a:p>
-          <a:p>
-            <a:pPr indent="-342900" lvl="0" marL="457200" rtl="0" algn="l">
-              <a:spcBef>
-                <a:spcPts val="1200"/>
-              </a:spcBef>
-              <a:spcAft>
-                <a:spcPts val="0"/>
-              </a:spcAft>
-              <a:buSzPts val="1800"/>
-              <a:buChar char="●"/>
-            </a:pPr>
-            <a:r>
-              <a:rPr lang="en"/>
-              <a:t>See Schedule tab on Course organization doc</a:t>
-            </a:r>
-            <a:endParaRPr/>
-          </a:p>
-          <a:p>
-            <a:pPr indent="0" lvl="0" marL="0" rtl="0" algn="l">
-              <a:spcBef>
-                <a:spcPts val="1200"/>
-              </a:spcBef>
-              <a:spcAft>
-                <a:spcPts val="0"/>
-              </a:spcAft>
-              <a:buClr>
-                <a:schemeClr val="dk1"/>
-              </a:buClr>
-              <a:buSzPts val="1100"/>
-              <a:buFont typeface="Arial"/>
-              <a:buNone/>
-            </a:pPr>
-            <a:r>
-              <a:t/>
-            </a:r>
             <a:endParaRPr/>
           </a:p>
           <a:p>
@@ -8670,7 +8387,7 @@
       </p:sp>
       <p:sp>
         <p:nvSpPr>
-          <p:cNvPr id="164" name="Google Shape;164;p23"/>
+          <p:cNvPr id="169" name="Google Shape;169;p24"/>
           <p:cNvSpPr txBox="1"/>
           <p:nvPr>
             <p:ph idx="12" type="sldNum"/>
@@ -8749,12 +8466,12 @@
 </p:sld>
 </file>
 
-<file path=ppt/slides/slide17.xml><?xml version="1.0" encoding="utf-8"?>
+<file path=ppt/slides/slide18.xml><?xml version="1.0" encoding="utf-8"?>
 <p:sld xmlns:a="http://schemas.openxmlformats.org/drawingml/2006/main" xmlns:r="http://schemas.openxmlformats.org/officeDocument/2006/relationships" xmlns:mc="http://schemas.openxmlformats.org/markup-compatibility/2006" xmlns:mv="urn:schemas-microsoft-com:mac:vml" xmlns:p="http://schemas.openxmlformats.org/presentationml/2006/main" xmlns:c="http://schemas.openxmlformats.org/drawingml/2006/chart" xmlns:dgm="http://schemas.openxmlformats.org/drawingml/2006/diagram" xmlns:o="urn:schemas-microsoft-com:office:office" xmlns:v="urn:schemas-microsoft-com:vml" xmlns:pvml="urn:schemas-microsoft-com:office:powerpoint" xmlns:com="http://schemas.openxmlformats.org/drawingml/2006/compatibility" xmlns:p14="http://schemas.microsoft.com/office/powerpoint/2010/main" xmlns:p15="http://schemas.microsoft.com/office/powerpoint/2012/main" xmlns:ahyp="http://schemas.microsoft.com/office/drawing/2018/hyperlinkcolor">
   <p:cSld>
     <p:spTree>
       <p:nvGrpSpPr>
-        <p:cNvPr id="168" name="Shape 168"/>
+        <p:cNvPr id="173" name="Shape 173"/>
         <p:cNvGrpSpPr/>
         <p:nvPr/>
       </p:nvGrpSpPr>
@@ -8768,7 +8485,7 @@
       </p:grpSpPr>
       <p:sp>
         <p:nvSpPr>
-          <p:cNvPr id="169" name="Google Shape;169;p24"/>
+          <p:cNvPr id="174" name="Google Shape;174;p25"/>
           <p:cNvSpPr txBox="1"/>
           <p:nvPr>
             <p:ph type="title"/>
@@ -8808,7 +8525,7 @@
       </p:sp>
       <p:sp>
         <p:nvSpPr>
-          <p:cNvPr id="170" name="Google Shape;170;p24"/>
+          <p:cNvPr id="175" name="Google Shape;175;p25"/>
           <p:cNvSpPr txBox="1"/>
           <p:nvPr>
             <p:ph idx="12" type="sldNum"/>
@@ -8881,7 +8598,7 @@
       </p:sp>
       <p:sp>
         <p:nvSpPr>
-          <p:cNvPr id="171" name="Google Shape;171;p24"/>
+          <p:cNvPr id="176" name="Google Shape;176;p25"/>
           <p:cNvSpPr txBox="1"/>
           <p:nvPr>
             <p:ph idx="1" type="body"/>
@@ -8962,12 +8679,12 @@
 </p:sld>
 </file>
 
-<file path=ppt/slides/slide18.xml><?xml version="1.0" encoding="utf-8"?>
+<file path=ppt/slides/slide19.xml><?xml version="1.0" encoding="utf-8"?>
 <p:sld xmlns:a="http://schemas.openxmlformats.org/drawingml/2006/main" xmlns:r="http://schemas.openxmlformats.org/officeDocument/2006/relationships" xmlns:mc="http://schemas.openxmlformats.org/markup-compatibility/2006" xmlns:mv="urn:schemas-microsoft-com:mac:vml" xmlns:p="http://schemas.openxmlformats.org/presentationml/2006/main" xmlns:c="http://schemas.openxmlformats.org/drawingml/2006/chart" xmlns:dgm="http://schemas.openxmlformats.org/drawingml/2006/diagram" xmlns:o="urn:schemas-microsoft-com:office:office" xmlns:v="urn:schemas-microsoft-com:vml" xmlns:pvml="urn:schemas-microsoft-com:office:powerpoint" xmlns:com="http://schemas.openxmlformats.org/drawingml/2006/compatibility" xmlns:p14="http://schemas.microsoft.com/office/powerpoint/2010/main" xmlns:p15="http://schemas.microsoft.com/office/powerpoint/2012/main" xmlns:ahyp="http://schemas.microsoft.com/office/drawing/2018/hyperlinkcolor">
   <p:cSld>
     <p:spTree>
       <p:nvGrpSpPr>
-        <p:cNvPr id="175" name="Shape 175"/>
+        <p:cNvPr id="180" name="Shape 180"/>
         <p:cNvGrpSpPr/>
         <p:nvPr/>
       </p:nvGrpSpPr>
@@ -8981,7 +8698,7 @@
       </p:grpSpPr>
       <p:sp>
         <p:nvSpPr>
-          <p:cNvPr id="176" name="Google Shape;176;p25"/>
+          <p:cNvPr id="181" name="Google Shape;181;p26"/>
           <p:cNvSpPr txBox="1"/>
           <p:nvPr>
             <p:ph type="title"/>
@@ -9021,7 +8738,7 @@
       </p:sp>
       <p:sp>
         <p:nvSpPr>
-          <p:cNvPr id="177" name="Google Shape;177;p25"/>
+          <p:cNvPr id="182" name="Google Shape;182;p26"/>
           <p:cNvSpPr txBox="1"/>
           <p:nvPr>
             <p:ph idx="1" type="body"/>
@@ -9145,7 +8862,7 @@
       </p:sp>
       <p:sp>
         <p:nvSpPr>
-          <p:cNvPr id="178" name="Google Shape;178;p25"/>
+          <p:cNvPr id="183" name="Google Shape;183;p26"/>
           <p:cNvSpPr txBox="1"/>
           <p:nvPr>
             <p:ph idx="12" type="sldNum"/>
@@ -9213,190 +8930,6 @@
                 <a:schemeClr val="dk2"/>
               </a:solidFill>
             </a:endParaRPr>
-          </a:p>
-        </p:txBody>
-      </p:sp>
-    </p:spTree>
-  </p:cSld>
-  <p:clrMapOvr>
-    <a:masterClrMapping/>
-  </p:clrMapOvr>
-</p:sld>
-</file>
-
-<file path=ppt/slides/slide19.xml><?xml version="1.0" encoding="utf-8"?>
-<p:sld xmlns:a="http://schemas.openxmlformats.org/drawingml/2006/main" xmlns:r="http://schemas.openxmlformats.org/officeDocument/2006/relationships" xmlns:mc="http://schemas.openxmlformats.org/markup-compatibility/2006" xmlns:mv="urn:schemas-microsoft-com:mac:vml" xmlns:p="http://schemas.openxmlformats.org/presentationml/2006/main" xmlns:c="http://schemas.openxmlformats.org/drawingml/2006/chart" xmlns:dgm="http://schemas.openxmlformats.org/drawingml/2006/diagram" xmlns:o="urn:schemas-microsoft-com:office:office" xmlns:v="urn:schemas-microsoft-com:vml" xmlns:pvml="urn:schemas-microsoft-com:office:powerpoint" xmlns:com="http://schemas.openxmlformats.org/drawingml/2006/compatibility" xmlns:p14="http://schemas.microsoft.com/office/powerpoint/2010/main" xmlns:p15="http://schemas.microsoft.com/office/powerpoint/2012/main" xmlns:ahyp="http://schemas.microsoft.com/office/drawing/2018/hyperlinkcolor">
-  <p:cSld>
-    <p:spTree>
-      <p:nvGrpSpPr>
-        <p:cNvPr id="182" name="Shape 182"/>
-        <p:cNvGrpSpPr/>
-        <p:nvPr/>
-      </p:nvGrpSpPr>
-      <p:grpSpPr>
-        <a:xfrm>
-          <a:off x="0" y="0"/>
-          <a:ext cx="0" cy="0"/>
-          <a:chOff x="0" y="0"/>
-          <a:chExt cx="0" cy="0"/>
-        </a:xfrm>
-      </p:grpSpPr>
-      <p:sp>
-        <p:nvSpPr>
-          <p:cNvPr id="183" name="Google Shape;183;p26"/>
-          <p:cNvSpPr txBox="1"/>
-          <p:nvPr>
-            <p:ph type="ctrTitle"/>
-          </p:nvPr>
-        </p:nvSpPr>
-        <p:spPr>
-          <a:xfrm>
-            <a:off x="0" y="0"/>
-            <a:ext cx="9144000" cy="2388900"/>
-          </a:xfrm>
-          <a:prstGeom prst="rect">
-            <a:avLst/>
-          </a:prstGeom>
-        </p:spPr>
-        <p:txBody>
-          <a:bodyPr anchorCtr="0" anchor="b" bIns="274300" lIns="91425" spcFirstLastPara="1" rIns="91425" wrap="square" tIns="91425">
-            <a:noAutofit/>
-          </a:bodyPr>
-          <a:lstStyle/>
-          <a:p>
-            <a:pPr indent="0" lvl="0" marL="0" rtl="0" algn="ctr">
-              <a:spcBef>
-                <a:spcPts val="0"/>
-              </a:spcBef>
-              <a:spcAft>
-                <a:spcPts val="0"/>
-              </a:spcAft>
-              <a:buNone/>
-            </a:pPr>
-            <a:r>
-              <a:rPr lang="en"/>
-              <a:t>Thank you! Any questions?</a:t>
-            </a:r>
-            <a:endParaRPr/>
-          </a:p>
-        </p:txBody>
-      </p:sp>
-      <p:sp>
-        <p:nvSpPr>
-          <p:cNvPr id="184" name="Google Shape;184;p26"/>
-          <p:cNvSpPr txBox="1"/>
-          <p:nvPr>
-            <p:ph idx="1" type="subTitle"/>
-          </p:nvPr>
-        </p:nvSpPr>
-        <p:spPr>
-          <a:xfrm>
-            <a:off x="0" y="2569475"/>
-            <a:ext cx="9144000" cy="2574000"/>
-          </a:xfrm>
-          <a:prstGeom prst="rect">
-            <a:avLst/>
-          </a:prstGeom>
-        </p:spPr>
-        <p:txBody>
-          <a:bodyPr anchorCtr="0" anchor="t" bIns="91425" lIns="91425" spcFirstLastPara="1" rIns="91425" wrap="square" tIns="274300">
-            <a:noAutofit/>
-          </a:bodyPr>
-          <a:lstStyle/>
-          <a:p>
-            <a:pPr indent="0" lvl="0" marL="0" rtl="0" algn="ctr">
-              <a:lnSpc>
-                <a:spcPct val="150000"/>
-              </a:lnSpc>
-              <a:spcBef>
-                <a:spcPts val="0"/>
-              </a:spcBef>
-              <a:spcAft>
-                <a:spcPts val="0"/>
-              </a:spcAft>
-              <a:buNone/>
-            </a:pPr>
-            <a:r>
-              <a:rPr lang="en" u="sng">
-                <a:solidFill>
-                  <a:schemeClr val="hlink"/>
-                </a:solidFill>
-                <a:hlinkClick r:id="rId3"/>
-              </a:rPr>
-              <a:t>dirk.riehle@fau.de</a:t>
-            </a:r>
-            <a:r>
-              <a:rPr lang="en"/>
-              <a:t> </a:t>
-            </a:r>
-            <a:r>
-              <a:rPr lang="en" sz="2400"/>
-              <a:t>–</a:t>
-            </a:r>
-            <a:r>
-              <a:rPr lang="en"/>
-              <a:t> </a:t>
-            </a:r>
-            <a:r>
-              <a:rPr lang="en" u="sng">
-                <a:solidFill>
-                  <a:schemeClr val="hlink"/>
-                </a:solidFill>
-                <a:hlinkClick r:id="rId4"/>
-              </a:rPr>
-              <a:t>https://oss.cs.fau.de</a:t>
-            </a:r>
-            <a:endParaRPr/>
-          </a:p>
-          <a:p>
-            <a:pPr indent="0" lvl="0" marL="0" rtl="0" algn="ctr">
-              <a:lnSpc>
-                <a:spcPct val="150000"/>
-              </a:lnSpc>
-              <a:spcBef>
-                <a:spcPts val="0"/>
-              </a:spcBef>
-              <a:spcAft>
-                <a:spcPts val="0"/>
-              </a:spcAft>
-              <a:buNone/>
-            </a:pPr>
-            <a:r>
-              <a:rPr lang="en" sz="2400" u="sng">
-                <a:solidFill>
-                  <a:schemeClr val="hlink"/>
-                </a:solidFill>
-                <a:hlinkClick r:id="rId5"/>
-              </a:rPr>
-              <a:t>dirk@riehle.org</a:t>
-            </a:r>
-            <a:r>
-              <a:rPr lang="en" sz="2400"/>
-              <a:t> – </a:t>
-            </a:r>
-            <a:r>
-              <a:rPr lang="en" sz="2400" u="sng">
-                <a:solidFill>
-                  <a:schemeClr val="hlink"/>
-                </a:solidFill>
-                <a:hlinkClick r:id="rId6"/>
-              </a:rPr>
-              <a:t>https://dirkriehle.com</a:t>
-            </a:r>
-            <a:r>
-              <a:rPr lang="en" sz="2400"/>
-              <a:t> – </a:t>
-            </a:r>
-            <a:r>
-              <a:rPr lang="en" sz="2400" u="sng">
-                <a:solidFill>
-                  <a:schemeClr val="hlink"/>
-                </a:solidFill>
-                <a:hlinkClick r:id="rId7"/>
-              </a:rPr>
-              <a:t>@dirkriehle</a:t>
-            </a:r>
-            <a:endParaRPr sz="2400"/>
           </a:p>
         </p:txBody>
       </p:sp>
@@ -9708,7 +9241,7 @@
   <p:cSld>
     <p:spTree>
       <p:nvGrpSpPr>
-        <p:cNvPr id="188" name="Shape 188"/>
+        <p:cNvPr id="187" name="Shape 187"/>
         <p:cNvGrpSpPr/>
         <p:nvPr/>
       </p:nvGrpSpPr>
@@ -9722,7 +9255,191 @@
       </p:grpSpPr>
       <p:sp>
         <p:nvSpPr>
+          <p:cNvPr id="188" name="Google Shape;188;p27"/>
+          <p:cNvSpPr txBox="1"/>
+          <p:nvPr>
+            <p:ph type="ctrTitle"/>
+          </p:nvPr>
+        </p:nvSpPr>
+        <p:spPr>
+          <a:xfrm>
+            <a:off x="0" y="0"/>
+            <a:ext cx="9144000" cy="2388900"/>
+          </a:xfrm>
+          <a:prstGeom prst="rect">
+            <a:avLst/>
+          </a:prstGeom>
+        </p:spPr>
+        <p:txBody>
+          <a:bodyPr anchorCtr="0" anchor="b" bIns="274300" lIns="91425" spcFirstLastPara="1" rIns="91425" wrap="square" tIns="91425">
+            <a:noAutofit/>
+          </a:bodyPr>
+          <a:lstStyle/>
+          <a:p>
+            <a:pPr indent="0" lvl="0" marL="0" rtl="0" algn="ctr">
+              <a:spcBef>
+                <a:spcPts val="0"/>
+              </a:spcBef>
+              <a:spcAft>
+                <a:spcPts val="0"/>
+              </a:spcAft>
+              <a:buNone/>
+            </a:pPr>
+            <a:r>
+              <a:rPr lang="en"/>
+              <a:t>Thank you! Any questions?</a:t>
+            </a:r>
+            <a:endParaRPr/>
+          </a:p>
+        </p:txBody>
+      </p:sp>
+      <p:sp>
+        <p:nvSpPr>
           <p:cNvPr id="189" name="Google Shape;189;p27"/>
+          <p:cNvSpPr txBox="1"/>
+          <p:nvPr>
+            <p:ph idx="1" type="subTitle"/>
+          </p:nvPr>
+        </p:nvSpPr>
+        <p:spPr>
+          <a:xfrm>
+            <a:off x="0" y="2569475"/>
+            <a:ext cx="9144000" cy="2574000"/>
+          </a:xfrm>
+          <a:prstGeom prst="rect">
+            <a:avLst/>
+          </a:prstGeom>
+        </p:spPr>
+        <p:txBody>
+          <a:bodyPr anchorCtr="0" anchor="t" bIns="91425" lIns="91425" spcFirstLastPara="1" rIns="91425" wrap="square" tIns="274300">
+            <a:noAutofit/>
+          </a:bodyPr>
+          <a:lstStyle/>
+          <a:p>
+            <a:pPr indent="0" lvl="0" marL="0" rtl="0" algn="ctr">
+              <a:lnSpc>
+                <a:spcPct val="150000"/>
+              </a:lnSpc>
+              <a:spcBef>
+                <a:spcPts val="0"/>
+              </a:spcBef>
+              <a:spcAft>
+                <a:spcPts val="0"/>
+              </a:spcAft>
+              <a:buNone/>
+            </a:pPr>
+            <a:r>
+              <a:rPr lang="en" u="sng">
+                <a:solidFill>
+                  <a:schemeClr val="hlink"/>
+                </a:solidFill>
+                <a:hlinkClick r:id="rId3"/>
+              </a:rPr>
+              <a:t>dirk.riehle@fau.de</a:t>
+            </a:r>
+            <a:r>
+              <a:rPr lang="en"/>
+              <a:t> </a:t>
+            </a:r>
+            <a:r>
+              <a:rPr lang="en" sz="2400"/>
+              <a:t>–</a:t>
+            </a:r>
+            <a:r>
+              <a:rPr lang="en"/>
+              <a:t> </a:t>
+            </a:r>
+            <a:r>
+              <a:rPr lang="en" u="sng">
+                <a:solidFill>
+                  <a:schemeClr val="hlink"/>
+                </a:solidFill>
+                <a:hlinkClick r:id="rId4"/>
+              </a:rPr>
+              <a:t>https://oss.cs.fau.de</a:t>
+            </a:r>
+            <a:endParaRPr/>
+          </a:p>
+          <a:p>
+            <a:pPr indent="0" lvl="0" marL="0" rtl="0" algn="ctr">
+              <a:lnSpc>
+                <a:spcPct val="150000"/>
+              </a:lnSpc>
+              <a:spcBef>
+                <a:spcPts val="0"/>
+              </a:spcBef>
+              <a:spcAft>
+                <a:spcPts val="0"/>
+              </a:spcAft>
+              <a:buNone/>
+            </a:pPr>
+            <a:r>
+              <a:rPr lang="en" sz="2400" u="sng">
+                <a:solidFill>
+                  <a:schemeClr val="hlink"/>
+                </a:solidFill>
+                <a:hlinkClick r:id="rId5"/>
+              </a:rPr>
+              <a:t>dirk@riehle.org</a:t>
+            </a:r>
+            <a:r>
+              <a:rPr lang="en" sz="2400"/>
+              <a:t> – </a:t>
+            </a:r>
+            <a:r>
+              <a:rPr lang="en" sz="2400" u="sng">
+                <a:solidFill>
+                  <a:schemeClr val="hlink"/>
+                </a:solidFill>
+                <a:hlinkClick r:id="rId6"/>
+              </a:rPr>
+              <a:t>https://dirkriehle.com</a:t>
+            </a:r>
+            <a:r>
+              <a:rPr lang="en" sz="2400"/>
+              <a:t> – </a:t>
+            </a:r>
+            <a:r>
+              <a:rPr lang="en" sz="2400" u="sng">
+                <a:solidFill>
+                  <a:schemeClr val="hlink"/>
+                </a:solidFill>
+                <a:hlinkClick r:id="rId7"/>
+              </a:rPr>
+              <a:t>@dirkriehle</a:t>
+            </a:r>
+            <a:endParaRPr sz="2400"/>
+          </a:p>
+        </p:txBody>
+      </p:sp>
+    </p:spTree>
+  </p:cSld>
+  <p:clrMapOvr>
+    <a:masterClrMapping/>
+  </p:clrMapOvr>
+</p:sld>
+</file>
+
+<file path=ppt/slides/slide21.xml><?xml version="1.0" encoding="utf-8"?>
+<p:sld xmlns:a="http://schemas.openxmlformats.org/drawingml/2006/main" xmlns:r="http://schemas.openxmlformats.org/officeDocument/2006/relationships" xmlns:mc="http://schemas.openxmlformats.org/markup-compatibility/2006" xmlns:mv="urn:schemas-microsoft-com:mac:vml" xmlns:p="http://schemas.openxmlformats.org/presentationml/2006/main" xmlns:c="http://schemas.openxmlformats.org/drawingml/2006/chart" xmlns:dgm="http://schemas.openxmlformats.org/drawingml/2006/diagram" xmlns:o="urn:schemas-microsoft-com:office:office" xmlns:v="urn:schemas-microsoft-com:vml" xmlns:pvml="urn:schemas-microsoft-com:office:powerpoint" xmlns:com="http://schemas.openxmlformats.org/drawingml/2006/compatibility" xmlns:p14="http://schemas.microsoft.com/office/powerpoint/2010/main" xmlns:p15="http://schemas.microsoft.com/office/powerpoint/2012/main" xmlns:ahyp="http://schemas.microsoft.com/office/drawing/2018/hyperlinkcolor">
+  <p:cSld>
+    <p:spTree>
+      <p:nvGrpSpPr>
+        <p:cNvPr id="193" name="Shape 193"/>
+        <p:cNvGrpSpPr/>
+        <p:nvPr/>
+      </p:nvGrpSpPr>
+      <p:grpSpPr>
+        <a:xfrm>
+          <a:off x="0" y="0"/>
+          <a:ext cx="0" cy="0"/>
+          <a:chOff x="0" y="0"/>
+          <a:chExt cx="0" cy="0"/>
+        </a:xfrm>
+      </p:grpSpPr>
+      <p:sp>
+        <p:nvSpPr>
+          <p:cNvPr id="194" name="Google Shape;194;p28"/>
           <p:cNvSpPr txBox="1"/>
           <p:nvPr>
             <p:ph type="title"/>
@@ -9762,7 +9479,7 @@
       </p:sp>
       <p:sp>
         <p:nvSpPr>
-          <p:cNvPr id="190" name="Google Shape;190;p27"/>
+          <p:cNvPr id="195" name="Google Shape;195;p28"/>
           <p:cNvSpPr txBox="1"/>
           <p:nvPr>
             <p:ph idx="12" type="sldNum"/>
@@ -9835,7 +9552,7 @@
       </p:sp>
       <p:sp>
         <p:nvSpPr>
-          <p:cNvPr id="191" name="Google Shape;191;p27"/>
+          <p:cNvPr id="196" name="Google Shape;196;p28"/>
           <p:cNvSpPr txBox="1"/>
           <p:nvPr>
             <p:ph idx="1" type="body"/>
@@ -10385,22 +10102,20 @@
             <a:tbl>
               <a:tblPr>
                 <a:noFill/>
-                <a:tableStyleId>{FBE28AA6-2891-4B8B-83EB-426D49BFAAA5}</a:tableStyleId>
+                <a:tableStyleId>{8602C2C5-D920-434D-A42E-D2763E1DA5D8}</a:tableStyleId>
               </a:tblPr>
               <a:tblGrid>
-                <a:gridCol w="859550"/>
-                <a:gridCol w="859550"/>
-                <a:gridCol w="859550"/>
-                <a:gridCol w="859550"/>
-                <a:gridCol w="859550"/>
-                <a:gridCol w="859550"/>
-                <a:gridCol w="859550"/>
-                <a:gridCol w="859550"/>
-                <a:gridCol w="859550"/>
-                <a:gridCol w="859550"/>
+                <a:gridCol w="1074425"/>
+                <a:gridCol w="1074425"/>
+                <a:gridCol w="1074425"/>
+                <a:gridCol w="1074425"/>
+                <a:gridCol w="1074425"/>
+                <a:gridCol w="1074425"/>
+                <a:gridCol w="1074425"/>
+                <a:gridCol w="1074425"/>
               </a:tblGrid>
-              <a:tr h="457200">
-                <a:tc gridSpan="6">
+              <a:tr h="522525">
+                <a:tc gridSpan="4">
                   <a:txBody>
                     <a:bodyPr/>
                     <a:lstStyle/>
@@ -10474,8 +10189,6 @@
                 <a:tc hMerge="1"/>
                 <a:tc hMerge="1"/>
                 <a:tc hMerge="1"/>
-                <a:tc hMerge="1"/>
-                <a:tc hMerge="1"/>
                 <a:tc gridSpan="4">
                   <a:txBody>
                     <a:bodyPr/>
@@ -10551,7 +10264,291 @@
                 <a:tc hMerge="1"/>
                 <a:tc hMerge="1"/>
               </a:tr>
-              <a:tr h="457200">
+              <a:tr h="522525">
+                <a:tc>
+                  <a:txBody>
+                    <a:bodyPr/>
+                    <a:lstStyle/>
+                    <a:p>
+                      <a:pPr indent="0" lvl="0" marL="0" rtl="0" algn="ctr">
+                        <a:spcBef>
+                          <a:spcPts val="0"/>
+                        </a:spcBef>
+                        <a:spcAft>
+                          <a:spcPts val="0"/>
+                        </a:spcAft>
+                        <a:buNone/>
+                      </a:pPr>
+                      <a:r>
+                        <a:rPr b="1" lang="en">
+                          <a:solidFill>
+                            <a:schemeClr val="lt1"/>
+                          </a:solidFill>
+                        </a:rPr>
+                        <a:t>3</a:t>
+                      </a:r>
+                      <a:endParaRPr b="1">
+                        <a:solidFill>
+                          <a:schemeClr val="lt1"/>
+                        </a:solidFill>
+                      </a:endParaRPr>
+                    </a:p>
+                  </a:txBody>
+                  <a:tcPr marT="91425" marB="91425" marR="91425" marL="91425" anchor="ctr">
+                    <a:lnL cap="flat" cmpd="sng" w="38100">
+                      <a:solidFill>
+                        <a:schemeClr val="lt1"/>
+                      </a:solidFill>
+                      <a:prstDash val="solid"/>
+                      <a:round/>
+                      <a:headEnd len="sm" w="sm" type="none"/>
+                      <a:tailEnd len="sm" w="sm" type="none"/>
+                    </a:lnL>
+                    <a:lnR cap="flat" cmpd="sng" w="38100">
+                      <a:solidFill>
+                        <a:schemeClr val="lt1"/>
+                      </a:solidFill>
+                      <a:prstDash val="solid"/>
+                      <a:round/>
+                      <a:headEnd len="sm" w="sm" type="none"/>
+                      <a:tailEnd len="sm" w="sm" type="none"/>
+                    </a:lnR>
+                    <a:lnT cap="flat" cmpd="sng" w="38100">
+                      <a:solidFill>
+                        <a:schemeClr val="lt1"/>
+                      </a:solidFill>
+                      <a:prstDash val="solid"/>
+                      <a:round/>
+                      <a:headEnd len="sm" w="sm" type="none"/>
+                      <a:tailEnd len="sm" w="sm" type="none"/>
+                    </a:lnT>
+                    <a:lnB cap="flat" cmpd="sng" w="38100">
+                      <a:solidFill>
+                        <a:schemeClr val="lt1"/>
+                      </a:solidFill>
+                      <a:prstDash val="solid"/>
+                      <a:round/>
+                      <a:headEnd len="sm" w="sm" type="none"/>
+                      <a:tailEnd len="sm" w="sm" type="none"/>
+                    </a:lnB>
+                    <a:solidFill>
+                      <a:schemeClr val="lt2"/>
+                    </a:solidFill>
+                  </a:tcPr>
+                </a:tc>
+                <a:tc>
+                  <a:txBody>
+                    <a:bodyPr/>
+                    <a:lstStyle/>
+                    <a:p>
+                      <a:pPr indent="0" lvl="0" marL="0" rtl="0" algn="ctr">
+                        <a:spcBef>
+                          <a:spcPts val="0"/>
+                        </a:spcBef>
+                        <a:spcAft>
+                          <a:spcPts val="0"/>
+                        </a:spcAft>
+                        <a:buNone/>
+                      </a:pPr>
+                      <a:r>
+                        <a:rPr b="1" lang="en">
+                          <a:solidFill>
+                            <a:schemeClr val="lt1"/>
+                          </a:solidFill>
+                        </a:rPr>
+                        <a:t>4</a:t>
+                      </a:r>
+                      <a:endParaRPr b="1">
+                        <a:solidFill>
+                          <a:schemeClr val="lt1"/>
+                        </a:solidFill>
+                      </a:endParaRPr>
+                    </a:p>
+                  </a:txBody>
+                  <a:tcPr marT="91425" marB="91425" marR="91425" marL="91425" anchor="ctr">
+                    <a:lnL cap="flat" cmpd="sng" w="38100">
+                      <a:solidFill>
+                        <a:schemeClr val="lt1"/>
+                      </a:solidFill>
+                      <a:prstDash val="solid"/>
+                      <a:round/>
+                      <a:headEnd len="sm" w="sm" type="none"/>
+                      <a:tailEnd len="sm" w="sm" type="none"/>
+                    </a:lnL>
+                    <a:lnR cap="flat" cmpd="sng" w="38100">
+                      <a:solidFill>
+                        <a:schemeClr val="lt1"/>
+                      </a:solidFill>
+                      <a:prstDash val="solid"/>
+                      <a:round/>
+                      <a:headEnd len="sm" w="sm" type="none"/>
+                      <a:tailEnd len="sm" w="sm" type="none"/>
+                    </a:lnR>
+                    <a:lnT cap="flat" cmpd="sng" w="38100">
+                      <a:solidFill>
+                        <a:schemeClr val="lt1"/>
+                      </a:solidFill>
+                      <a:prstDash val="solid"/>
+                      <a:round/>
+                      <a:headEnd len="sm" w="sm" type="none"/>
+                      <a:tailEnd len="sm" w="sm" type="none"/>
+                    </a:lnT>
+                    <a:lnB cap="flat" cmpd="sng" w="38100">
+                      <a:solidFill>
+                        <a:schemeClr val="lt1"/>
+                      </a:solidFill>
+                      <a:prstDash val="solid"/>
+                      <a:round/>
+                      <a:headEnd len="sm" w="sm" type="none"/>
+                      <a:tailEnd len="sm" w="sm" type="none"/>
+                    </a:lnB>
+                    <a:solidFill>
+                      <a:schemeClr val="lt2"/>
+                    </a:solidFill>
+                  </a:tcPr>
+                </a:tc>
+                <a:tc>
+                  <a:txBody>
+                    <a:bodyPr/>
+                    <a:lstStyle/>
+                    <a:p>
+                      <a:pPr indent="0" lvl="0" marL="0" rtl="0" algn="ctr">
+                        <a:spcBef>
+                          <a:spcPts val="0"/>
+                        </a:spcBef>
+                        <a:spcAft>
+                          <a:spcPts val="0"/>
+                        </a:spcAft>
+                        <a:buNone/>
+                      </a:pPr>
+                      <a:r>
+                        <a:rPr b="1" lang="en">
+                          <a:solidFill>
+                            <a:schemeClr val="lt1"/>
+                          </a:solidFill>
+                        </a:rPr>
+                        <a:t>5</a:t>
+                      </a:r>
+                      <a:endParaRPr b="1">
+                        <a:solidFill>
+                          <a:schemeClr val="lt1"/>
+                        </a:solidFill>
+                      </a:endParaRPr>
+                    </a:p>
+                  </a:txBody>
+                  <a:tcPr marT="91425" marB="91425" marR="91425" marL="91425" anchor="ctr">
+                    <a:lnL cap="flat" cmpd="sng" w="38100">
+                      <a:solidFill>
+                        <a:schemeClr val="lt1"/>
+                      </a:solidFill>
+                      <a:prstDash val="solid"/>
+                      <a:round/>
+                      <a:headEnd len="sm" w="sm" type="none"/>
+                      <a:tailEnd len="sm" w="sm" type="none"/>
+                    </a:lnL>
+                    <a:lnR cap="flat" cmpd="sng" w="38100">
+                      <a:solidFill>
+                        <a:schemeClr val="lt1"/>
+                      </a:solidFill>
+                      <a:prstDash val="solid"/>
+                      <a:round/>
+                      <a:headEnd len="sm" w="sm" type="none"/>
+                      <a:tailEnd len="sm" w="sm" type="none"/>
+                    </a:lnR>
+                    <a:lnT cap="flat" cmpd="sng" w="38100">
+                      <a:solidFill>
+                        <a:schemeClr val="lt1"/>
+                      </a:solidFill>
+                      <a:prstDash val="solid"/>
+                      <a:round/>
+                      <a:headEnd len="sm" w="sm" type="none"/>
+                      <a:tailEnd len="sm" w="sm" type="none"/>
+                    </a:lnT>
+                    <a:lnB cap="flat" cmpd="sng" w="38100">
+                      <a:solidFill>
+                        <a:schemeClr val="lt1"/>
+                      </a:solidFill>
+                      <a:prstDash val="solid"/>
+                      <a:round/>
+                      <a:headEnd len="sm" w="sm" type="none"/>
+                      <a:tailEnd len="sm" w="sm" type="none"/>
+                    </a:lnB>
+                    <a:solidFill>
+                      <a:schemeClr val="lt2"/>
+                    </a:solidFill>
+                  </a:tcPr>
+                </a:tc>
+                <a:tc>
+                  <a:txBody>
+                    <a:bodyPr/>
+                    <a:lstStyle/>
+                    <a:p>
+                      <a:pPr indent="0" lvl="0" marL="0" rtl="0" algn="ctr">
+                        <a:spcBef>
+                          <a:spcPts val="0"/>
+                        </a:spcBef>
+                        <a:spcAft>
+                          <a:spcPts val="0"/>
+                        </a:spcAft>
+                        <a:buNone/>
+                      </a:pPr>
+                      <a:r>
+                        <a:rPr b="1" lang="en">
+                          <a:solidFill>
+                            <a:schemeClr val="lt1"/>
+                          </a:solidFill>
+                        </a:rPr>
+                        <a:t>6</a:t>
+                      </a:r>
+                      <a:endParaRPr b="1">
+                        <a:solidFill>
+                          <a:schemeClr val="lt1"/>
+                        </a:solidFill>
+                      </a:endParaRPr>
+                    </a:p>
+                  </a:txBody>
+                  <a:tcPr marT="91425" marB="91425" marR="91425" marL="91425" anchor="ctr">
+                    <a:lnL cap="flat" cmpd="sng" w="38100">
+                      <a:solidFill>
+                        <a:schemeClr val="lt1"/>
+                      </a:solidFill>
+                      <a:prstDash val="solid"/>
+                      <a:round/>
+                      <a:headEnd len="sm" w="sm" type="none"/>
+                      <a:tailEnd len="sm" w="sm" type="none"/>
+                    </a:lnL>
+                    <a:lnR cap="flat" cmpd="sng" w="38100">
+                      <a:solidFill>
+                        <a:schemeClr val="lt1"/>
+                      </a:solidFill>
+                      <a:prstDash val="solid"/>
+                      <a:round/>
+                      <a:headEnd len="sm" w="sm" type="none"/>
+                      <a:tailEnd len="sm" w="sm" type="none"/>
+                    </a:lnR>
+                    <a:lnT cap="flat" cmpd="sng" w="38100">
+                      <a:solidFill>
+                        <a:schemeClr val="lt1"/>
+                      </a:solidFill>
+                      <a:prstDash val="solid"/>
+                      <a:round/>
+                      <a:headEnd len="sm" w="sm" type="none"/>
+                      <a:tailEnd len="sm" w="sm" type="none"/>
+                    </a:lnT>
+                    <a:lnB cap="flat" cmpd="sng" w="38100">
+                      <a:solidFill>
+                        <a:schemeClr val="lt1"/>
+                      </a:solidFill>
+                      <a:prstDash val="solid"/>
+                      <a:round/>
+                      <a:headEnd len="sm" w="sm" type="none"/>
+                      <a:tailEnd len="sm" w="sm" type="none"/>
+                    </a:lnB>
+                    <a:solidFill>
+                      <a:schemeClr val="lt2"/>
+                    </a:solidFill>
+                  </a:tcPr>
+                </a:tc>
                 <a:tc>
                   <a:txBody>
                     <a:bodyPr/>
@@ -10836,566 +10833,8 @@
                     </a:solidFill>
                   </a:tcPr>
                 </a:tc>
-                <a:tc>
-                  <a:txBody>
-                    <a:bodyPr/>
-                    <a:lstStyle/>
-                    <a:p>
-                      <a:pPr indent="0" lvl="0" marL="0" rtl="0" algn="ctr">
-                        <a:spcBef>
-                          <a:spcPts val="0"/>
-                        </a:spcBef>
-                        <a:spcAft>
-                          <a:spcPts val="0"/>
-                        </a:spcAft>
-                        <a:buNone/>
-                      </a:pPr>
-                      <a:r>
-                        <a:rPr b="1" lang="en">
-                          <a:solidFill>
-                            <a:schemeClr val="lt1"/>
-                          </a:solidFill>
-                        </a:rPr>
-                        <a:t>5</a:t>
-                      </a:r>
-                      <a:endParaRPr b="1">
-                        <a:solidFill>
-                          <a:schemeClr val="lt1"/>
-                        </a:solidFill>
-                      </a:endParaRPr>
-                    </a:p>
-                  </a:txBody>
-                  <a:tcPr marT="91425" marB="91425" marR="91425" marL="91425" anchor="ctr">
-                    <a:lnL cap="flat" cmpd="sng" w="38100">
-                      <a:solidFill>
-                        <a:schemeClr val="lt1"/>
-                      </a:solidFill>
-                      <a:prstDash val="solid"/>
-                      <a:round/>
-                      <a:headEnd len="sm" w="sm" type="none"/>
-                      <a:tailEnd len="sm" w="sm" type="none"/>
-                    </a:lnL>
-                    <a:lnR cap="flat" cmpd="sng" w="38100">
-                      <a:solidFill>
-                        <a:schemeClr val="lt1"/>
-                      </a:solidFill>
-                      <a:prstDash val="solid"/>
-                      <a:round/>
-                      <a:headEnd len="sm" w="sm" type="none"/>
-                      <a:tailEnd len="sm" w="sm" type="none"/>
-                    </a:lnR>
-                    <a:lnT cap="flat" cmpd="sng" w="38100">
-                      <a:solidFill>
-                        <a:schemeClr val="lt1"/>
-                      </a:solidFill>
-                      <a:prstDash val="solid"/>
-                      <a:round/>
-                      <a:headEnd len="sm" w="sm" type="none"/>
-                      <a:tailEnd len="sm" w="sm" type="none"/>
-                    </a:lnT>
-                    <a:lnB cap="flat" cmpd="sng" w="38100">
-                      <a:solidFill>
-                        <a:schemeClr val="lt1"/>
-                      </a:solidFill>
-                      <a:prstDash val="solid"/>
-                      <a:round/>
-                      <a:headEnd len="sm" w="sm" type="none"/>
-                      <a:tailEnd len="sm" w="sm" type="none"/>
-                    </a:lnB>
-                    <a:solidFill>
-                      <a:schemeClr val="lt2"/>
-                    </a:solidFill>
-                  </a:tcPr>
-                </a:tc>
-                <a:tc>
-                  <a:txBody>
-                    <a:bodyPr/>
-                    <a:lstStyle/>
-                    <a:p>
-                      <a:pPr indent="0" lvl="0" marL="0" rtl="0" algn="ctr">
-                        <a:spcBef>
-                          <a:spcPts val="0"/>
-                        </a:spcBef>
-                        <a:spcAft>
-                          <a:spcPts val="0"/>
-                        </a:spcAft>
-                        <a:buNone/>
-                      </a:pPr>
-                      <a:r>
-                        <a:rPr b="1" lang="en">
-                          <a:solidFill>
-                            <a:schemeClr val="lt1"/>
-                          </a:solidFill>
-                        </a:rPr>
-                        <a:t>6</a:t>
-                      </a:r>
-                      <a:endParaRPr b="1">
-                        <a:solidFill>
-                          <a:schemeClr val="lt1"/>
-                        </a:solidFill>
-                      </a:endParaRPr>
-                    </a:p>
-                  </a:txBody>
-                  <a:tcPr marT="91425" marB="91425" marR="91425" marL="91425" anchor="ctr">
-                    <a:lnL cap="flat" cmpd="sng" w="38100">
-                      <a:solidFill>
-                        <a:schemeClr val="lt1"/>
-                      </a:solidFill>
-                      <a:prstDash val="solid"/>
-                      <a:round/>
-                      <a:headEnd len="sm" w="sm" type="none"/>
-                      <a:tailEnd len="sm" w="sm" type="none"/>
-                    </a:lnL>
-                    <a:lnR cap="flat" cmpd="sng" w="38100">
-                      <a:solidFill>
-                        <a:schemeClr val="lt1"/>
-                      </a:solidFill>
-                      <a:prstDash val="solid"/>
-                      <a:round/>
-                      <a:headEnd len="sm" w="sm" type="none"/>
-                      <a:tailEnd len="sm" w="sm" type="none"/>
-                    </a:lnR>
-                    <a:lnT cap="flat" cmpd="sng" w="38100">
-                      <a:solidFill>
-                        <a:schemeClr val="lt1"/>
-                      </a:solidFill>
-                      <a:prstDash val="solid"/>
-                      <a:round/>
-                      <a:headEnd len="sm" w="sm" type="none"/>
-                      <a:tailEnd len="sm" w="sm" type="none"/>
-                    </a:lnT>
-                    <a:lnB cap="flat" cmpd="sng" w="38100">
-                      <a:solidFill>
-                        <a:schemeClr val="lt1"/>
-                      </a:solidFill>
-                      <a:prstDash val="solid"/>
-                      <a:round/>
-                      <a:headEnd len="sm" w="sm" type="none"/>
-                      <a:tailEnd len="sm" w="sm" type="none"/>
-                    </a:lnB>
-                    <a:solidFill>
-                      <a:schemeClr val="lt2"/>
-                    </a:solidFill>
-                  </a:tcPr>
-                </a:tc>
-                <a:tc>
-                  <a:txBody>
-                    <a:bodyPr/>
-                    <a:lstStyle/>
-                    <a:p>
-                      <a:pPr indent="0" lvl="0" marL="0" rtl="0" algn="ctr">
-                        <a:spcBef>
-                          <a:spcPts val="0"/>
-                        </a:spcBef>
-                        <a:spcAft>
-                          <a:spcPts val="0"/>
-                        </a:spcAft>
-                        <a:buNone/>
-                      </a:pPr>
-                      <a:r>
-                        <a:rPr b="1" lang="en">
-                          <a:solidFill>
-                            <a:schemeClr val="lt1"/>
-                          </a:solidFill>
-                        </a:rPr>
-                        <a:t>1</a:t>
-                      </a:r>
-                      <a:endParaRPr b="1">
-                        <a:solidFill>
-                          <a:schemeClr val="lt1"/>
-                        </a:solidFill>
-                      </a:endParaRPr>
-                    </a:p>
-                  </a:txBody>
-                  <a:tcPr marT="91425" marB="91425" marR="91425" marL="91425" anchor="ctr">
-                    <a:lnL cap="flat" cmpd="sng" w="38100">
-                      <a:solidFill>
-                        <a:schemeClr val="lt1"/>
-                      </a:solidFill>
-                      <a:prstDash val="solid"/>
-                      <a:round/>
-                      <a:headEnd len="sm" w="sm" type="none"/>
-                      <a:tailEnd len="sm" w="sm" type="none"/>
-                    </a:lnL>
-                    <a:lnR cap="flat" cmpd="sng" w="38100">
-                      <a:solidFill>
-                        <a:schemeClr val="lt1"/>
-                      </a:solidFill>
-                      <a:prstDash val="solid"/>
-                      <a:round/>
-                      <a:headEnd len="sm" w="sm" type="none"/>
-                      <a:tailEnd len="sm" w="sm" type="none"/>
-                    </a:lnR>
-                    <a:lnT cap="flat" cmpd="sng" w="38100">
-                      <a:solidFill>
-                        <a:schemeClr val="lt1"/>
-                      </a:solidFill>
-                      <a:prstDash val="solid"/>
-                      <a:round/>
-                      <a:headEnd len="sm" w="sm" type="none"/>
-                      <a:tailEnd len="sm" w="sm" type="none"/>
-                    </a:lnT>
-                    <a:lnB cap="flat" cmpd="sng" w="38100">
-                      <a:solidFill>
-                        <a:schemeClr val="lt1"/>
-                      </a:solidFill>
-                      <a:prstDash val="solid"/>
-                      <a:round/>
-                      <a:headEnd len="sm" w="sm" type="none"/>
-                      <a:tailEnd len="sm" w="sm" type="none"/>
-                    </a:lnB>
-                    <a:solidFill>
-                      <a:schemeClr val="lt2"/>
-                    </a:solidFill>
-                  </a:tcPr>
-                </a:tc>
-                <a:tc>
-                  <a:txBody>
-                    <a:bodyPr/>
-                    <a:lstStyle/>
-                    <a:p>
-                      <a:pPr indent="0" lvl="0" marL="0" rtl="0" algn="ctr">
-                        <a:spcBef>
-                          <a:spcPts val="0"/>
-                        </a:spcBef>
-                        <a:spcAft>
-                          <a:spcPts val="0"/>
-                        </a:spcAft>
-                        <a:buNone/>
-                      </a:pPr>
-                      <a:r>
-                        <a:rPr b="1" lang="en">
-                          <a:solidFill>
-                            <a:schemeClr val="lt1"/>
-                          </a:solidFill>
-                        </a:rPr>
-                        <a:t>2</a:t>
-                      </a:r>
-                      <a:endParaRPr b="1">
-                        <a:solidFill>
-                          <a:schemeClr val="lt1"/>
-                        </a:solidFill>
-                      </a:endParaRPr>
-                    </a:p>
-                  </a:txBody>
-                  <a:tcPr marT="91425" marB="91425" marR="91425" marL="91425" anchor="ctr">
-                    <a:lnL cap="flat" cmpd="sng" w="38100">
-                      <a:solidFill>
-                        <a:schemeClr val="lt1"/>
-                      </a:solidFill>
-                      <a:prstDash val="solid"/>
-                      <a:round/>
-                      <a:headEnd len="sm" w="sm" type="none"/>
-                      <a:tailEnd len="sm" w="sm" type="none"/>
-                    </a:lnL>
-                    <a:lnR cap="flat" cmpd="sng" w="38100">
-                      <a:solidFill>
-                        <a:schemeClr val="lt1"/>
-                      </a:solidFill>
-                      <a:prstDash val="solid"/>
-                      <a:round/>
-                      <a:headEnd len="sm" w="sm" type="none"/>
-                      <a:tailEnd len="sm" w="sm" type="none"/>
-                    </a:lnR>
-                    <a:lnT cap="flat" cmpd="sng" w="38100">
-                      <a:solidFill>
-                        <a:schemeClr val="lt1"/>
-                      </a:solidFill>
-                      <a:prstDash val="solid"/>
-                      <a:round/>
-                      <a:headEnd len="sm" w="sm" type="none"/>
-                      <a:tailEnd len="sm" w="sm" type="none"/>
-                    </a:lnT>
-                    <a:lnB cap="flat" cmpd="sng" w="38100">
-                      <a:solidFill>
-                        <a:schemeClr val="lt1"/>
-                      </a:solidFill>
-                      <a:prstDash val="solid"/>
-                      <a:round/>
-                      <a:headEnd len="sm" w="sm" type="none"/>
-                      <a:tailEnd len="sm" w="sm" type="none"/>
-                    </a:lnB>
-                    <a:solidFill>
-                      <a:schemeClr val="lt2"/>
-                    </a:solidFill>
-                  </a:tcPr>
-                </a:tc>
-                <a:tc>
-                  <a:txBody>
-                    <a:bodyPr/>
-                    <a:lstStyle/>
-                    <a:p>
-                      <a:pPr indent="0" lvl="0" marL="0" rtl="0" algn="ctr">
-                        <a:spcBef>
-                          <a:spcPts val="0"/>
-                        </a:spcBef>
-                        <a:spcAft>
-                          <a:spcPts val="0"/>
-                        </a:spcAft>
-                        <a:buNone/>
-                      </a:pPr>
-                      <a:r>
-                        <a:rPr b="1" lang="en">
-                          <a:solidFill>
-                            <a:schemeClr val="lt1"/>
-                          </a:solidFill>
-                        </a:rPr>
-                        <a:t>3</a:t>
-                      </a:r>
-                      <a:endParaRPr b="1">
-                        <a:solidFill>
-                          <a:schemeClr val="lt1"/>
-                        </a:solidFill>
-                      </a:endParaRPr>
-                    </a:p>
-                  </a:txBody>
-                  <a:tcPr marT="91425" marB="91425" marR="91425" marL="91425" anchor="ctr">
-                    <a:lnL cap="flat" cmpd="sng" w="38100">
-                      <a:solidFill>
-                        <a:schemeClr val="lt1"/>
-                      </a:solidFill>
-                      <a:prstDash val="solid"/>
-                      <a:round/>
-                      <a:headEnd len="sm" w="sm" type="none"/>
-                      <a:tailEnd len="sm" w="sm" type="none"/>
-                    </a:lnL>
-                    <a:lnR cap="flat" cmpd="sng" w="38100">
-                      <a:solidFill>
-                        <a:schemeClr val="lt1"/>
-                      </a:solidFill>
-                      <a:prstDash val="solid"/>
-                      <a:round/>
-                      <a:headEnd len="sm" w="sm" type="none"/>
-                      <a:tailEnd len="sm" w="sm" type="none"/>
-                    </a:lnR>
-                    <a:lnT cap="flat" cmpd="sng" w="38100">
-                      <a:solidFill>
-                        <a:schemeClr val="lt1"/>
-                      </a:solidFill>
-                      <a:prstDash val="solid"/>
-                      <a:round/>
-                      <a:headEnd len="sm" w="sm" type="none"/>
-                      <a:tailEnd len="sm" w="sm" type="none"/>
-                    </a:lnT>
-                    <a:lnB cap="flat" cmpd="sng" w="38100">
-                      <a:solidFill>
-                        <a:schemeClr val="lt1"/>
-                      </a:solidFill>
-                      <a:prstDash val="solid"/>
-                      <a:round/>
-                      <a:headEnd len="sm" w="sm" type="none"/>
-                      <a:tailEnd len="sm" w="sm" type="none"/>
-                    </a:lnB>
-                    <a:solidFill>
-                      <a:schemeClr val="lt2"/>
-                    </a:solidFill>
-                  </a:tcPr>
-                </a:tc>
-                <a:tc>
-                  <a:txBody>
-                    <a:bodyPr/>
-                    <a:lstStyle/>
-                    <a:p>
-                      <a:pPr indent="0" lvl="0" marL="0" rtl="0" algn="ctr">
-                        <a:spcBef>
-                          <a:spcPts val="0"/>
-                        </a:spcBef>
-                        <a:spcAft>
-                          <a:spcPts val="0"/>
-                        </a:spcAft>
-                        <a:buNone/>
-                      </a:pPr>
-                      <a:r>
-                        <a:rPr b="1" lang="en">
-                          <a:solidFill>
-                            <a:schemeClr val="lt1"/>
-                          </a:solidFill>
-                        </a:rPr>
-                        <a:t>4</a:t>
-                      </a:r>
-                      <a:endParaRPr b="1">
-                        <a:solidFill>
-                          <a:schemeClr val="lt1"/>
-                        </a:solidFill>
-                      </a:endParaRPr>
-                    </a:p>
-                  </a:txBody>
-                  <a:tcPr marT="91425" marB="91425" marR="91425" marL="91425" anchor="ctr">
-                    <a:lnL cap="flat" cmpd="sng" w="38100">
-                      <a:solidFill>
-                        <a:schemeClr val="lt1"/>
-                      </a:solidFill>
-                      <a:prstDash val="solid"/>
-                      <a:round/>
-                      <a:headEnd len="sm" w="sm" type="none"/>
-                      <a:tailEnd len="sm" w="sm" type="none"/>
-                    </a:lnL>
-                    <a:lnR cap="flat" cmpd="sng" w="38100">
-                      <a:solidFill>
-                        <a:schemeClr val="lt1"/>
-                      </a:solidFill>
-                      <a:prstDash val="solid"/>
-                      <a:round/>
-                      <a:headEnd len="sm" w="sm" type="none"/>
-                      <a:tailEnd len="sm" w="sm" type="none"/>
-                    </a:lnR>
-                    <a:lnT cap="flat" cmpd="sng" w="38100">
-                      <a:solidFill>
-                        <a:schemeClr val="lt1"/>
-                      </a:solidFill>
-                      <a:prstDash val="solid"/>
-                      <a:round/>
-                      <a:headEnd len="sm" w="sm" type="none"/>
-                      <a:tailEnd len="sm" w="sm" type="none"/>
-                    </a:lnT>
-                    <a:lnB cap="flat" cmpd="sng" w="38100">
-                      <a:solidFill>
-                        <a:schemeClr val="lt1"/>
-                      </a:solidFill>
-                      <a:prstDash val="solid"/>
-                      <a:round/>
-                      <a:headEnd len="sm" w="sm" type="none"/>
-                      <a:tailEnd len="sm" w="sm" type="none"/>
-                    </a:lnB>
-                    <a:solidFill>
-                      <a:schemeClr val="lt2"/>
-                    </a:solidFill>
-                  </a:tcPr>
-                </a:tc>
               </a:tr>
-              <a:tr h="457200">
-                <a:tc>
-                  <a:txBody>
-                    <a:bodyPr/>
-                    <a:lstStyle/>
-                    <a:p>
-                      <a:pPr indent="0" lvl="0" marL="0" rtl="0" algn="ctr">
-                        <a:spcBef>
-                          <a:spcPts val="0"/>
-                        </a:spcBef>
-                        <a:spcAft>
-                          <a:spcPts val="0"/>
-                        </a:spcAft>
-                        <a:buNone/>
-                      </a:pPr>
-                      <a:r>
-                        <a:t/>
-                      </a:r>
-                      <a:endParaRPr b="1">
-                        <a:solidFill>
-                          <a:schemeClr val="lt1"/>
-                        </a:solidFill>
-                      </a:endParaRPr>
-                    </a:p>
-                  </a:txBody>
-                  <a:tcPr marT="91425" marB="91425" marR="91425" marL="91425" anchor="ctr">
-                    <a:lnL cap="flat" cmpd="sng" w="38100">
-                      <a:solidFill>
-                        <a:schemeClr val="lt1"/>
-                      </a:solidFill>
-                      <a:prstDash val="solid"/>
-                      <a:round/>
-                      <a:headEnd len="sm" w="sm" type="none"/>
-                      <a:tailEnd len="sm" w="sm" type="none"/>
-                    </a:lnL>
-                    <a:lnR cap="flat" cmpd="sng" w="38100">
-                      <a:solidFill>
-                        <a:schemeClr val="lt1"/>
-                      </a:solidFill>
-                      <a:prstDash val="solid"/>
-                      <a:round/>
-                      <a:headEnd len="sm" w="sm" type="none"/>
-                      <a:tailEnd len="sm" w="sm" type="none"/>
-                    </a:lnR>
-                    <a:lnT cap="flat" cmpd="sng" w="38100">
-                      <a:solidFill>
-                        <a:schemeClr val="lt1"/>
-                      </a:solidFill>
-                      <a:prstDash val="solid"/>
-                      <a:round/>
-                      <a:headEnd len="sm" w="sm" type="none"/>
-                      <a:tailEnd len="sm" w="sm" type="none"/>
-                    </a:lnT>
-                    <a:lnB cap="flat" cmpd="sng" w="38100">
-                      <a:solidFill>
-                        <a:schemeClr val="lt1"/>
-                      </a:solidFill>
-                      <a:prstDash val="solid"/>
-                      <a:round/>
-                      <a:headEnd len="sm" w="sm" type="none"/>
-                      <a:tailEnd len="sm" w="sm" type="none"/>
-                    </a:lnB>
-                    <a:solidFill>
-                      <a:schemeClr val="accent1"/>
-                    </a:solidFill>
-                  </a:tcPr>
-                </a:tc>
-                <a:tc>
-                  <a:txBody>
-                    <a:bodyPr/>
-                    <a:lstStyle/>
-                    <a:p>
-                      <a:pPr indent="0" lvl="0" marL="0" rtl="0" algn="ctr">
-                        <a:spcBef>
-                          <a:spcPts val="0"/>
-                        </a:spcBef>
-                        <a:spcAft>
-                          <a:spcPts val="0"/>
-                        </a:spcAft>
-                        <a:buNone/>
-                      </a:pPr>
-                      <a:r>
-                        <a:t/>
-                      </a:r>
-                      <a:endParaRPr b="1">
-                        <a:solidFill>
-                          <a:schemeClr val="lt1"/>
-                        </a:solidFill>
-                      </a:endParaRPr>
-                    </a:p>
-                  </a:txBody>
-                  <a:tcPr marT="91425" marB="91425" marR="91425" marL="91425" anchor="ctr">
-                    <a:lnL cap="flat" cmpd="sng" w="38100">
-                      <a:solidFill>
-                        <a:schemeClr val="lt1"/>
-                      </a:solidFill>
-                      <a:prstDash val="solid"/>
-                      <a:round/>
-                      <a:headEnd len="sm" w="sm" type="none"/>
-                      <a:tailEnd len="sm" w="sm" type="none"/>
-                    </a:lnL>
-                    <a:lnR cap="flat" cmpd="sng" w="38100">
-                      <a:solidFill>
-                        <a:schemeClr val="lt1"/>
-                      </a:solidFill>
-                      <a:prstDash val="solid"/>
-                      <a:round/>
-                      <a:headEnd len="sm" w="sm" type="none"/>
-                      <a:tailEnd len="sm" w="sm" type="none"/>
-                    </a:lnR>
-                    <a:lnT cap="flat" cmpd="sng" w="38100">
-                      <a:solidFill>
-                        <a:schemeClr val="lt1"/>
-                      </a:solidFill>
-                      <a:prstDash val="solid"/>
-                      <a:round/>
-                      <a:headEnd len="sm" w="sm" type="none"/>
-                      <a:tailEnd len="sm" w="sm" type="none"/>
-                    </a:lnT>
-                    <a:lnB cap="flat" cmpd="sng" w="38100">
-                      <a:solidFill>
-                        <a:schemeClr val="lt1"/>
-                      </a:solidFill>
-                      <a:prstDash val="solid"/>
-                      <a:round/>
-                      <a:headEnd len="sm" w="sm" type="none"/>
-                      <a:tailEnd len="sm" w="sm" type="none"/>
-                    </a:lnB>
-                    <a:solidFill>
-                      <a:schemeClr val="accent1"/>
-                    </a:solidFill>
-                  </a:tcPr>
-                </a:tc>
+              <a:tr h="522525">
                 <a:tc>
                   <a:txBody>
                     <a:bodyPr/>
@@ -11670,73 +11109,7 @@
                     </a:solidFill>
                   </a:tcPr>
                 </a:tc>
-                <a:tc>
-                  <a:txBody>
-                    <a:bodyPr/>
-                    <a:lstStyle/>
-                    <a:p>
-                      <a:pPr indent="0" lvl="0" marL="0" rtl="0" algn="ctr">
-                        <a:spcBef>
-                          <a:spcPts val="0"/>
-                        </a:spcBef>
-                        <a:spcAft>
-                          <a:spcPts val="0"/>
-                        </a:spcAft>
-                        <a:buNone/>
-                      </a:pPr>
-                      <a:r>
-                        <a:t/>
-                      </a:r>
-                      <a:endParaRPr b="1">
-                        <a:solidFill>
-                          <a:schemeClr val="lt1"/>
-                        </a:solidFill>
-                      </a:endParaRPr>
-                    </a:p>
-                  </a:txBody>
-                  <a:tcPr marT="91425" marB="91425" marR="91425" marL="91425" anchor="ctr">
-                    <a:lnL cap="flat" cmpd="sng" w="38100">
-                      <a:solidFill>
-                        <a:schemeClr val="lt1"/>
-                      </a:solidFill>
-                      <a:prstDash val="solid"/>
-                      <a:round/>
-                      <a:headEnd len="sm" w="sm" type="none"/>
-                      <a:tailEnd len="sm" w="sm" type="none"/>
-                    </a:lnL>
-                    <a:lnR cap="flat" cmpd="sng" w="38100">
-                      <a:solidFill>
-                        <a:schemeClr val="lt1"/>
-                      </a:solidFill>
-                      <a:prstDash val="solid"/>
-                      <a:round/>
-                      <a:headEnd len="sm" w="sm" type="none"/>
-                      <a:tailEnd len="sm" w="sm" type="none"/>
-                    </a:lnR>
-                    <a:lnT cap="flat" cmpd="sng" w="38100">
-                      <a:solidFill>
-                        <a:schemeClr val="lt1"/>
-                      </a:solidFill>
-                      <a:prstDash val="solid"/>
-                      <a:round/>
-                      <a:headEnd len="sm" w="sm" type="none"/>
-                      <a:tailEnd len="sm" w="sm" type="none"/>
-                    </a:lnT>
-                    <a:lnB cap="flat" cmpd="sng" w="38100">
-                      <a:solidFill>
-                        <a:schemeClr val="lt1"/>
-                      </a:solidFill>
-                      <a:prstDash val="solid"/>
-                      <a:round/>
-                      <a:headEnd len="sm" w="sm" type="none"/>
-                      <a:tailEnd len="sm" w="sm" type="none"/>
-                    </a:lnB>
-                    <a:solidFill>
-                      <a:schemeClr val="accent1"/>
-                    </a:solidFill>
-                  </a:tcPr>
-                </a:tc>
-                <a:tc>
+                <a:tc gridSpan="4">
                   <a:txBody>
                     <a:bodyPr/>
                     <a:lstStyle/>
@@ -11807,150 +11180,11 @@
                     </a:solidFill>
                   </a:tcPr>
                 </a:tc>
-                <a:tc>
-                  <a:txBody>
-                    <a:bodyPr/>
-                    <a:lstStyle/>
-                    <a:p>
-                      <a:pPr indent="0" lvl="0" marL="0" rtl="0" algn="ctr">
-                        <a:spcBef>
-                          <a:spcPts val="0"/>
-                        </a:spcBef>
-                        <a:spcAft>
-                          <a:spcPts val="0"/>
-                        </a:spcAft>
-                        <a:buNone/>
-                      </a:pPr>
-                      <a:r>
-                        <a:rPr b="1" lang="en">
-                          <a:solidFill>
-                            <a:schemeClr val="lt1"/>
-                          </a:solidFill>
-                        </a:rPr>
-                        <a:t>AMOS</a:t>
-                      </a:r>
-                      <a:endParaRPr b="1">
-                        <a:solidFill>
-                          <a:schemeClr val="lt1"/>
-                        </a:solidFill>
-                      </a:endParaRPr>
-                    </a:p>
-                  </a:txBody>
-                  <a:tcPr marT="91425" marB="91425" marR="91425" marL="91425" anchor="ctr">
-                    <a:lnL cap="flat" cmpd="sng" w="38100">
-                      <a:solidFill>
-                        <a:schemeClr val="lt1"/>
-                      </a:solidFill>
-                      <a:prstDash val="solid"/>
-                      <a:round/>
-                      <a:headEnd len="sm" w="sm" type="none"/>
-                      <a:tailEnd len="sm" w="sm" type="none"/>
-                    </a:lnL>
-                    <a:lnR cap="flat" cmpd="sng" w="38100">
-                      <a:solidFill>
-                        <a:schemeClr val="lt1"/>
-                      </a:solidFill>
-                      <a:prstDash val="solid"/>
-                      <a:round/>
-                      <a:headEnd len="sm" w="sm" type="none"/>
-                      <a:tailEnd len="sm" w="sm" type="none"/>
-                    </a:lnR>
-                    <a:lnT cap="flat" cmpd="sng" w="38100">
-                      <a:solidFill>
-                        <a:schemeClr val="lt1"/>
-                      </a:solidFill>
-                      <a:prstDash val="solid"/>
-                      <a:round/>
-                      <a:headEnd len="sm" w="sm" type="none"/>
-                      <a:tailEnd len="sm" w="sm" type="none"/>
-                    </a:lnT>
-                    <a:lnB cap="flat" cmpd="sng" w="38100">
-                      <a:solidFill>
-                        <a:schemeClr val="lt1"/>
-                      </a:solidFill>
-                      <a:prstDash val="solid"/>
-                      <a:round/>
-                      <a:headEnd len="sm" w="sm" type="none"/>
-                      <a:tailEnd len="sm" w="sm" type="none"/>
-                    </a:lnB>
-                    <a:solidFill>
-                      <a:schemeClr val="accent6"/>
-                    </a:solidFill>
-                  </a:tcPr>
-                </a:tc>
-                <a:tc rowSpan="5">
-                  <a:txBody>
-                    <a:bodyPr/>
-                    <a:lstStyle/>
-                    <a:p>
-                      <a:pPr indent="0" lvl="0" marL="0" rtl="0" algn="ctr">
-                        <a:spcBef>
-                          <a:spcPts val="0"/>
-                        </a:spcBef>
-                        <a:spcAft>
-                          <a:spcPts val="0"/>
-                        </a:spcAft>
-                        <a:buNone/>
-                      </a:pPr>
-                      <a:r>
-                        <a:rPr b="1" lang="en">
-                          <a:solidFill>
-                            <a:schemeClr val="lt1"/>
-                          </a:solidFill>
-                        </a:rPr>
-                        <a:t>MATH</a:t>
-                      </a:r>
-                      <a:endParaRPr b="1">
-                        <a:solidFill>
-                          <a:schemeClr val="lt1"/>
-                        </a:solidFill>
-                      </a:endParaRPr>
-                    </a:p>
-                  </a:txBody>
-                  <a:tcPr marT="91425" marB="91425" marR="91425" marL="91425" anchor="ctr">
-                    <a:lnL cap="flat" cmpd="sng" w="38100">
-                      <a:solidFill>
-                        <a:schemeClr val="lt1"/>
-                      </a:solidFill>
-                      <a:prstDash val="solid"/>
-                      <a:round/>
-                      <a:headEnd len="sm" w="sm" type="none"/>
-                      <a:tailEnd len="sm" w="sm" type="none"/>
-                    </a:lnL>
-                    <a:lnR cap="flat" cmpd="sng" w="38100">
-                      <a:solidFill>
-                        <a:schemeClr val="lt1"/>
-                      </a:solidFill>
-                      <a:prstDash val="solid"/>
-                      <a:round/>
-                      <a:headEnd len="sm" w="sm" type="none"/>
-                      <a:tailEnd len="sm" w="sm" type="none"/>
-                    </a:lnR>
-                    <a:lnT cap="flat" cmpd="sng" w="38100">
-                      <a:solidFill>
-                        <a:schemeClr val="lt1"/>
-                      </a:solidFill>
-                      <a:prstDash val="solid"/>
-                      <a:round/>
-                      <a:headEnd len="sm" w="sm" type="none"/>
-                      <a:tailEnd len="sm" w="sm" type="none"/>
-                    </a:lnT>
-                    <a:lnB cap="flat" cmpd="sng" w="38100">
-                      <a:solidFill>
-                        <a:schemeClr val="lt1"/>
-                      </a:solidFill>
-                      <a:prstDash val="solid"/>
-                      <a:round/>
-                      <a:headEnd len="sm" w="sm" type="none"/>
-                      <a:tailEnd len="sm" w="sm" type="none"/>
-                    </a:lnB>
-                    <a:solidFill>
-                      <a:schemeClr val="dk2"/>
-                    </a:solidFill>
-                  </a:tcPr>
-                </a:tc>
+                <a:tc hMerge="1"/>
+                <a:tc hMerge="1"/>
+                <a:tc hMerge="1"/>
               </a:tr>
-              <a:tr h="457200">
+              <a:tr h="522525">
                 <a:tc>
                   <a:txBody>
                     <a:bodyPr/>
@@ -12083,139 +11317,7 @@
                     </a:solidFill>
                   </a:tcPr>
                 </a:tc>
-                <a:tc>
-                  <a:txBody>
-                    <a:bodyPr/>
-                    <a:lstStyle/>
-                    <a:p>
-                      <a:pPr indent="0" lvl="0" marL="0" rtl="0" algn="ctr">
-                        <a:spcBef>
-                          <a:spcPts val="0"/>
-                        </a:spcBef>
-                        <a:spcAft>
-                          <a:spcPts val="0"/>
-                        </a:spcAft>
-                        <a:buNone/>
-                      </a:pPr>
-                      <a:r>
-                        <a:t/>
-                      </a:r>
-                      <a:endParaRPr b="1">
-                        <a:solidFill>
-                          <a:schemeClr val="lt1"/>
-                        </a:solidFill>
-                      </a:endParaRPr>
-                    </a:p>
-                  </a:txBody>
-                  <a:tcPr marT="91425" marB="91425" marR="91425" marL="91425" anchor="ctr">
-                    <a:lnL cap="flat" cmpd="sng" w="38100">
-                      <a:solidFill>
-                        <a:schemeClr val="lt1"/>
-                      </a:solidFill>
-                      <a:prstDash val="solid"/>
-                      <a:round/>
-                      <a:headEnd len="sm" w="sm" type="none"/>
-                      <a:tailEnd len="sm" w="sm" type="none"/>
-                    </a:lnL>
-                    <a:lnR cap="flat" cmpd="sng" w="38100">
-                      <a:solidFill>
-                        <a:schemeClr val="lt1"/>
-                      </a:solidFill>
-                      <a:prstDash val="solid"/>
-                      <a:round/>
-                      <a:headEnd len="sm" w="sm" type="none"/>
-                      <a:tailEnd len="sm" w="sm" type="none"/>
-                    </a:lnR>
-                    <a:lnT cap="flat" cmpd="sng" w="38100">
-                      <a:solidFill>
-                        <a:schemeClr val="lt1"/>
-                      </a:solidFill>
-                      <a:prstDash val="solid"/>
-                      <a:round/>
-                      <a:headEnd len="sm" w="sm" type="none"/>
-                      <a:tailEnd len="sm" w="sm" type="none"/>
-                    </a:lnT>
-                    <a:lnB cap="flat" cmpd="sng" w="38100">
-                      <a:solidFill>
-                        <a:schemeClr val="lt1"/>
-                      </a:solidFill>
-                      <a:prstDash val="solid"/>
-                      <a:round/>
-                      <a:headEnd len="sm" w="sm" type="none"/>
-                      <a:tailEnd len="sm" w="sm" type="none"/>
-                    </a:lnB>
-                    <a:solidFill>
-                      <a:schemeClr val="lt1"/>
-                    </a:solidFill>
-                  </a:tcPr>
-                </a:tc>
-                <a:tc>
-                  <a:txBody>
-                    <a:bodyPr/>
-                    <a:lstStyle/>
-                    <a:p>
-                      <a:pPr indent="0" lvl="0" marL="0" rtl="0" algn="ctr">
-                        <a:spcBef>
-                          <a:spcPts val="0"/>
-                        </a:spcBef>
-                        <a:spcAft>
-                          <a:spcPts val="0"/>
-                        </a:spcAft>
-                        <a:buNone/>
-                      </a:pPr>
-                      <a:r>
-                        <a:t/>
-                      </a:r>
-                      <a:endParaRPr b="1">
-                        <a:solidFill>
-                          <a:schemeClr val="lt1"/>
-                        </a:solidFill>
-                      </a:endParaRPr>
-                    </a:p>
-                  </a:txBody>
-                  <a:tcPr marT="91425" marB="91425" marR="91425" marL="91425" anchor="ctr">
-                    <a:lnL cap="flat" cmpd="sng" w="38100">
-                      <a:solidFill>
-                        <a:schemeClr val="lt1"/>
-                      </a:solidFill>
-                      <a:prstDash val="solid"/>
-                      <a:round/>
-                      <a:headEnd len="sm" w="sm" type="none"/>
-                      <a:tailEnd len="sm" w="sm" type="none"/>
-                    </a:lnL>
-                    <a:lnR cap="flat" cmpd="sng" w="38100">
-                      <a:solidFill>
-                        <a:schemeClr val="lt1"/>
-                      </a:solidFill>
-                      <a:prstDash val="solid"/>
-                      <a:round/>
-                      <a:headEnd len="sm" w="sm" type="none"/>
-                      <a:tailEnd len="sm" w="sm" type="none"/>
-                    </a:lnR>
-                    <a:lnT cap="flat" cmpd="sng" w="38100">
-                      <a:solidFill>
-                        <a:schemeClr val="lt1"/>
-                      </a:solidFill>
-                      <a:prstDash val="solid"/>
-                      <a:round/>
-                      <a:headEnd len="sm" w="sm" type="none"/>
-                      <a:tailEnd len="sm" w="sm" type="none"/>
-                    </a:lnT>
-                    <a:lnB cap="flat" cmpd="sng" w="38100">
-                      <a:solidFill>
-                        <a:schemeClr val="lt1"/>
-                      </a:solidFill>
-                      <a:prstDash val="solid"/>
-                      <a:round/>
-                      <a:headEnd len="sm" w="sm" type="none"/>
-                      <a:tailEnd len="sm" w="sm" type="none"/>
-                    </a:lnB>
-                    <a:solidFill>
-                      <a:schemeClr val="lt1"/>
-                    </a:solidFill>
-                  </a:tcPr>
-                </a:tc>
-                <a:tc>
+                <a:tc gridSpan="2">
                   <a:txBody>
                     <a:bodyPr/>
                     <a:lstStyle/>
@@ -12286,144 +11388,8 @@
                     </a:solidFill>
                   </a:tcPr>
                 </a:tc>
-                <a:tc>
-                  <a:txBody>
-                    <a:bodyPr/>
-                    <a:lstStyle/>
-                    <a:p>
-                      <a:pPr indent="0" lvl="0" marL="0" rtl="0" algn="ctr">
-                        <a:spcBef>
-                          <a:spcPts val="0"/>
-                        </a:spcBef>
-                        <a:spcAft>
-                          <a:spcPts val="0"/>
-                        </a:spcAft>
-                        <a:buNone/>
-                      </a:pPr>
-                      <a:r>
-                        <a:rPr b="1" lang="en">
-                          <a:solidFill>
-                            <a:schemeClr val="lt1"/>
-                          </a:solidFill>
-                        </a:rPr>
-                        <a:t>FOSS</a:t>
-                      </a:r>
-                      <a:endParaRPr b="1">
-                        <a:solidFill>
-                          <a:schemeClr val="lt1"/>
-                        </a:solidFill>
-                      </a:endParaRPr>
-                    </a:p>
-                  </a:txBody>
-                  <a:tcPr marT="91425" marB="91425" marR="91425" marL="91425" anchor="ctr">
-                    <a:lnL cap="flat" cmpd="sng" w="38100">
-                      <a:solidFill>
-                        <a:schemeClr val="lt1"/>
-                      </a:solidFill>
-                      <a:prstDash val="solid"/>
-                      <a:round/>
-                      <a:headEnd len="sm" w="sm" type="none"/>
-                      <a:tailEnd len="sm" w="sm" type="none"/>
-                    </a:lnL>
-                    <a:lnR cap="flat" cmpd="sng" w="38100">
-                      <a:solidFill>
-                        <a:schemeClr val="lt1"/>
-                      </a:solidFill>
-                      <a:prstDash val="solid"/>
-                      <a:round/>
-                      <a:headEnd len="sm" w="sm" type="none"/>
-                      <a:tailEnd len="sm" w="sm" type="none"/>
-                    </a:lnR>
-                    <a:lnT cap="flat" cmpd="sng" w="38100">
-                      <a:solidFill>
-                        <a:schemeClr val="lt1"/>
-                      </a:solidFill>
-                      <a:prstDash val="solid"/>
-                      <a:round/>
-                      <a:headEnd len="sm" w="sm" type="none"/>
-                      <a:tailEnd len="sm" w="sm" type="none"/>
-                    </a:lnT>
-                    <a:lnB cap="flat" cmpd="sng" w="38100">
-                      <a:solidFill>
-                        <a:schemeClr val="lt1"/>
-                      </a:solidFill>
-                      <a:prstDash val="solid"/>
-                      <a:round/>
-                      <a:headEnd len="sm" w="sm" type="none"/>
-                      <a:tailEnd len="sm" w="sm" type="none"/>
-                    </a:lnB>
-                    <a:solidFill>
-                      <a:schemeClr val="accent2"/>
-                    </a:solidFill>
-                  </a:tcPr>
-                </a:tc>
-                <a:tc>
-                  <a:txBody>
-                    <a:bodyPr/>
-                    <a:lstStyle/>
-                    <a:p>
-                      <a:pPr indent="0" lvl="0" marL="0" rtl="0" algn="ctr">
-                        <a:spcBef>
-                          <a:spcPts val="0"/>
-                        </a:spcBef>
-                        <a:spcAft>
-                          <a:spcPts val="0"/>
-                        </a:spcAft>
-                        <a:buNone/>
-                      </a:pPr>
-                      <a:r>
-                        <a:t/>
-                      </a:r>
-                      <a:endParaRPr b="1">
-                        <a:solidFill>
-                          <a:schemeClr val="lt1"/>
-                        </a:solidFill>
-                      </a:endParaRPr>
-                    </a:p>
-                  </a:txBody>
-                  <a:tcPr marT="91425" marB="91425" marR="91425" marL="91425" anchor="ctr">
-                    <a:lnL cap="flat" cmpd="sng" w="38100">
-                      <a:solidFill>
-                        <a:schemeClr val="lt1"/>
-                      </a:solidFill>
-                      <a:prstDash val="solid"/>
-                      <a:round/>
-                      <a:headEnd len="sm" w="sm" type="none"/>
-                      <a:tailEnd len="sm" w="sm" type="none"/>
-                    </a:lnL>
-                    <a:lnR cap="flat" cmpd="sng" w="38100">
-                      <a:solidFill>
-                        <a:schemeClr val="lt1"/>
-                      </a:solidFill>
-                      <a:prstDash val="solid"/>
-                      <a:round/>
-                      <a:headEnd len="sm" w="sm" type="none"/>
-                      <a:tailEnd len="sm" w="sm" type="none"/>
-                    </a:lnR>
-                    <a:lnT cap="flat" cmpd="sng" w="38100">
-                      <a:solidFill>
-                        <a:schemeClr val="lt1"/>
-                      </a:solidFill>
-                      <a:prstDash val="solid"/>
-                      <a:round/>
-                      <a:headEnd len="sm" w="sm" type="none"/>
-                      <a:tailEnd len="sm" w="sm" type="none"/>
-                    </a:lnT>
-                    <a:lnB cap="flat" cmpd="sng" w="38100">
-                      <a:solidFill>
-                        <a:schemeClr val="lt1"/>
-                      </a:solidFill>
-                      <a:prstDash val="solid"/>
-                      <a:round/>
-                      <a:headEnd len="sm" w="sm" type="none"/>
-                      <a:tailEnd len="sm" w="sm" type="none"/>
-                    </a:lnB>
-                    <a:solidFill>
-                      <a:schemeClr val="lt1"/>
-                    </a:solidFill>
-                  </a:tcPr>
-                </a:tc>
-                <a:tc>
+                <a:tc hMerge="1"/>
+                <a:tc gridSpan="4">
                   <a:txBody>
                     <a:bodyPr/>
                     <a:lstStyle/>
@@ -12494,80 +11460,11 @@
                     </a:solidFill>
                   </a:tcPr>
                 </a:tc>
-                <a:tc>
-                  <a:txBody>
-                    <a:bodyPr/>
-                    <a:lstStyle/>
-                    <a:p>
-                      <a:pPr indent="0" lvl="0" marL="0" rtl="0" algn="ctr">
-                        <a:spcBef>
-                          <a:spcPts val="0"/>
-                        </a:spcBef>
-                        <a:spcAft>
-                          <a:spcPts val="0"/>
-                        </a:spcAft>
-                        <a:buNone/>
-                      </a:pPr>
-                      <a:r>
-                        <a:rPr b="1" lang="en">
-                          <a:solidFill>
-                            <a:schemeClr val="lt1"/>
-                          </a:solidFill>
-                        </a:rPr>
-                        <a:t>COACH</a:t>
-                      </a:r>
-                      <a:endParaRPr b="1">
-                        <a:solidFill>
-                          <a:schemeClr val="lt1"/>
-                        </a:solidFill>
-                      </a:endParaRPr>
-                    </a:p>
-                  </a:txBody>
-                  <a:tcPr marT="91425" marB="91425" marR="91425" marL="91425" anchor="ctr">
-                    <a:lnL cap="flat" cmpd="sng" w="38100">
-                      <a:solidFill>
-                        <a:schemeClr val="lt1"/>
-                      </a:solidFill>
-                      <a:prstDash val="solid"/>
-                      <a:round/>
-                      <a:headEnd len="sm" w="sm" type="none"/>
-                      <a:tailEnd len="sm" w="sm" type="none"/>
-                    </a:lnL>
-                    <a:lnR cap="flat" cmpd="sng" w="38100">
-                      <a:solidFill>
-                        <a:schemeClr val="lt1"/>
-                      </a:solidFill>
-                      <a:prstDash val="solid"/>
-                      <a:round/>
-                      <a:headEnd len="sm" w="sm" type="none"/>
-                      <a:tailEnd len="sm" w="sm" type="none"/>
-                    </a:lnR>
-                    <a:lnT cap="flat" cmpd="sng" w="38100">
-                      <a:solidFill>
-                        <a:schemeClr val="lt1"/>
-                      </a:solidFill>
-                      <a:prstDash val="solid"/>
-                      <a:round/>
-                      <a:headEnd len="sm" w="sm" type="none"/>
-                      <a:tailEnd len="sm" w="sm" type="none"/>
-                    </a:lnT>
-                    <a:lnB cap="flat" cmpd="sng" w="38100">
-                      <a:solidFill>
-                        <a:schemeClr val="lt1"/>
-                      </a:solidFill>
-                      <a:prstDash val="solid"/>
-                      <a:round/>
-                      <a:headEnd len="sm" w="sm" type="none"/>
-                      <a:tailEnd len="sm" w="sm" type="none"/>
-                    </a:lnB>
-                    <a:solidFill>
-                      <a:schemeClr val="accent4"/>
-                    </a:solidFill>
-                  </a:tcPr>
-                </a:tc>
-                <a:tc vMerge="1"/>
+                <a:tc hMerge="1"/>
+                <a:tc hMerge="1"/>
+                <a:tc hMerge="1"/>
               </a:tr>
-              <a:tr h="457200">
+              <a:tr h="522525">
                 <a:tc>
                   <a:txBody>
                     <a:bodyPr/>
@@ -12692,6 +11589,426 @@
                     </a:solidFill>
                   </a:tcPr>
                 </a:tc>
+                <a:tc gridSpan="2">
+                  <a:txBody>
+                    <a:bodyPr/>
+                    <a:lstStyle/>
+                    <a:p>
+                      <a:pPr indent="0" lvl="0" marL="0" rtl="0" algn="ctr">
+                        <a:spcBef>
+                          <a:spcPts val="0"/>
+                        </a:spcBef>
+                        <a:spcAft>
+                          <a:spcPts val="0"/>
+                        </a:spcAft>
+                        <a:buNone/>
+                      </a:pPr>
+                      <a:r>
+                        <a:rPr b="1" lang="en">
+                          <a:solidFill>
+                            <a:schemeClr val="lt1"/>
+                          </a:solidFill>
+                        </a:rPr>
+                        <a:t>Seminar (SEMI)</a:t>
+                      </a:r>
+                      <a:endParaRPr b="1">
+                        <a:solidFill>
+                          <a:schemeClr val="lt1"/>
+                        </a:solidFill>
+                      </a:endParaRPr>
+                    </a:p>
+                  </a:txBody>
+                  <a:tcPr marT="91425" marB="91425" marR="91425" marL="91425" anchor="ctr">
+                    <a:lnL cap="flat" cmpd="sng" w="38100">
+                      <a:solidFill>
+                        <a:schemeClr val="lt1"/>
+                      </a:solidFill>
+                      <a:prstDash val="solid"/>
+                      <a:round/>
+                      <a:headEnd len="sm" w="sm" type="none"/>
+                      <a:tailEnd len="sm" w="sm" type="none"/>
+                    </a:lnL>
+                    <a:lnR cap="flat" cmpd="sng" w="38100">
+                      <a:solidFill>
+                        <a:schemeClr val="lt1"/>
+                      </a:solidFill>
+                      <a:prstDash val="solid"/>
+                      <a:round/>
+                      <a:headEnd len="sm" w="sm" type="none"/>
+                      <a:tailEnd len="sm" w="sm" type="none"/>
+                    </a:lnR>
+                    <a:lnT cap="flat" cmpd="sng" w="38100">
+                      <a:solidFill>
+                        <a:schemeClr val="lt1"/>
+                      </a:solidFill>
+                      <a:prstDash val="solid"/>
+                      <a:round/>
+                      <a:headEnd len="sm" w="sm" type="none"/>
+                      <a:tailEnd len="sm" w="sm" type="none"/>
+                    </a:lnT>
+                    <a:lnB cap="flat" cmpd="sng" w="38100">
+                      <a:solidFill>
+                        <a:schemeClr val="lt1"/>
+                      </a:solidFill>
+                      <a:prstDash val="solid"/>
+                      <a:round/>
+                      <a:headEnd len="sm" w="sm" type="none"/>
+                      <a:tailEnd len="sm" w="sm" type="none"/>
+                    </a:lnB>
+                    <a:solidFill>
+                      <a:schemeClr val="lt2"/>
+                    </a:solidFill>
+                  </a:tcPr>
+                </a:tc>
+                <a:tc hMerge="1"/>
+                <a:tc gridSpan="4">
+                  <a:txBody>
+                    <a:bodyPr/>
+                    <a:lstStyle/>
+                    <a:p>
+                      <a:pPr indent="0" lvl="0" marL="0" rtl="0" algn="ctr">
+                        <a:spcBef>
+                          <a:spcPts val="0"/>
+                        </a:spcBef>
+                        <a:spcAft>
+                          <a:spcPts val="0"/>
+                        </a:spcAft>
+                        <a:buNone/>
+                      </a:pPr>
+                      <a:r>
+                        <a:rPr b="1" lang="en">
+                          <a:solidFill>
+                            <a:schemeClr val="lt1"/>
+                          </a:solidFill>
+                        </a:rPr>
+                        <a:t>Seminar (SEMI / ASES)</a:t>
+                      </a:r>
+                      <a:endParaRPr b="1">
+                        <a:solidFill>
+                          <a:schemeClr val="lt1"/>
+                        </a:solidFill>
+                      </a:endParaRPr>
+                    </a:p>
+                  </a:txBody>
+                  <a:tcPr marT="0" marB="0" marR="91425" marL="91425" anchor="ctr">
+                    <a:lnL cap="flat" cmpd="sng" w="38100">
+                      <a:solidFill>
+                        <a:schemeClr val="lt1"/>
+                      </a:solidFill>
+                      <a:prstDash val="solid"/>
+                      <a:round/>
+                      <a:headEnd len="sm" w="sm" type="none"/>
+                      <a:tailEnd len="sm" w="sm" type="none"/>
+                    </a:lnL>
+                    <a:lnR cap="flat" cmpd="sng" w="38100">
+                      <a:solidFill>
+                        <a:schemeClr val="lt1"/>
+                      </a:solidFill>
+                      <a:prstDash val="solid"/>
+                      <a:round/>
+                      <a:headEnd len="sm" w="sm" type="none"/>
+                      <a:tailEnd len="sm" w="sm" type="none"/>
+                    </a:lnR>
+                    <a:lnT cap="flat" cmpd="sng" w="38100">
+                      <a:solidFill>
+                        <a:schemeClr val="lt1"/>
+                      </a:solidFill>
+                      <a:prstDash val="solid"/>
+                      <a:round/>
+                      <a:headEnd len="sm" w="sm" type="none"/>
+                      <a:tailEnd len="sm" w="sm" type="none"/>
+                    </a:lnT>
+                    <a:lnB cap="flat" cmpd="sng" w="38100">
+                      <a:solidFill>
+                        <a:schemeClr val="lt1"/>
+                      </a:solidFill>
+                      <a:prstDash val="solid"/>
+                      <a:round/>
+                      <a:headEnd len="sm" w="sm" type="none"/>
+                      <a:tailEnd len="sm" w="sm" type="none"/>
+                    </a:lnB>
+                    <a:solidFill>
+                      <a:schemeClr val="lt2"/>
+                    </a:solidFill>
+                  </a:tcPr>
+                </a:tc>
+                <a:tc hMerge="1"/>
+                <a:tc hMerge="1"/>
+                <a:tc hMerge="1"/>
+              </a:tr>
+              <a:tr h="522525">
+                <a:tc>
+                  <a:txBody>
+                    <a:bodyPr/>
+                    <a:lstStyle/>
+                    <a:p>
+                      <a:pPr indent="0" lvl="0" marL="0" rtl="0" algn="ctr">
+                        <a:spcBef>
+                          <a:spcPts val="0"/>
+                        </a:spcBef>
+                        <a:spcAft>
+                          <a:spcPts val="0"/>
+                        </a:spcAft>
+                        <a:buNone/>
+                      </a:pPr>
+                      <a:r>
+                        <a:t/>
+                      </a:r>
+                      <a:endParaRPr/>
+                    </a:p>
+                  </a:txBody>
+                  <a:tcPr marT="91425" marB="91425" marR="91425" marL="91425" anchor="ctr">
+                    <a:lnL cap="flat" cmpd="sng" w="38100">
+                      <a:solidFill>
+                        <a:schemeClr val="lt1"/>
+                      </a:solidFill>
+                      <a:prstDash val="solid"/>
+                      <a:round/>
+                      <a:headEnd len="sm" w="sm" type="none"/>
+                      <a:tailEnd len="sm" w="sm" type="none"/>
+                    </a:lnL>
+                    <a:lnR cap="flat" cmpd="sng" w="38100">
+                      <a:solidFill>
+                        <a:schemeClr val="lt1"/>
+                      </a:solidFill>
+                      <a:prstDash val="solid"/>
+                      <a:round/>
+                      <a:headEnd len="sm" w="sm" type="none"/>
+                      <a:tailEnd len="sm" w="sm" type="none"/>
+                    </a:lnR>
+                    <a:lnT cap="flat" cmpd="sng" w="38100">
+                      <a:solidFill>
+                        <a:schemeClr val="lt1"/>
+                      </a:solidFill>
+                      <a:prstDash val="solid"/>
+                      <a:round/>
+                      <a:headEnd len="sm" w="sm" type="none"/>
+                      <a:tailEnd len="sm" w="sm" type="none"/>
+                    </a:lnT>
+                    <a:lnB cap="flat" cmpd="sng" w="38100">
+                      <a:solidFill>
+                        <a:schemeClr val="lt1"/>
+                      </a:solidFill>
+                      <a:prstDash val="solid"/>
+                      <a:round/>
+                      <a:headEnd len="sm" w="sm" type="none"/>
+                      <a:tailEnd len="sm" w="sm" type="none"/>
+                    </a:lnB>
+                    <a:solidFill>
+                      <a:schemeClr val="lt1"/>
+                    </a:solidFill>
+                  </a:tcPr>
+                </a:tc>
+                <a:tc>
+                  <a:txBody>
+                    <a:bodyPr/>
+                    <a:lstStyle/>
+                    <a:p>
+                      <a:pPr indent="0" lvl="0" marL="0" rtl="0" algn="ctr">
+                        <a:spcBef>
+                          <a:spcPts val="0"/>
+                        </a:spcBef>
+                        <a:spcAft>
+                          <a:spcPts val="0"/>
+                        </a:spcAft>
+                        <a:buNone/>
+                      </a:pPr>
+                      <a:r>
+                        <a:t/>
+                      </a:r>
+                      <a:endParaRPr/>
+                    </a:p>
+                  </a:txBody>
+                  <a:tcPr marT="91425" marB="91425" marR="91425" marL="91425" anchor="ctr">
+                    <a:lnL cap="flat" cmpd="sng" w="38100">
+                      <a:solidFill>
+                        <a:schemeClr val="lt1"/>
+                      </a:solidFill>
+                      <a:prstDash val="solid"/>
+                      <a:round/>
+                      <a:headEnd len="sm" w="sm" type="none"/>
+                      <a:tailEnd len="sm" w="sm" type="none"/>
+                    </a:lnL>
+                    <a:lnR cap="flat" cmpd="sng" w="38100">
+                      <a:solidFill>
+                        <a:schemeClr val="lt1"/>
+                      </a:solidFill>
+                      <a:prstDash val="solid"/>
+                      <a:round/>
+                      <a:headEnd len="sm" w="sm" type="none"/>
+                      <a:tailEnd len="sm" w="sm" type="none"/>
+                    </a:lnR>
+                    <a:lnT cap="flat" cmpd="sng" w="38100">
+                      <a:solidFill>
+                        <a:schemeClr val="lt1"/>
+                      </a:solidFill>
+                      <a:prstDash val="solid"/>
+                      <a:round/>
+                      <a:headEnd len="sm" w="sm" type="none"/>
+                      <a:tailEnd len="sm" w="sm" type="none"/>
+                    </a:lnT>
+                    <a:lnB cap="flat" cmpd="sng" w="38100">
+                      <a:solidFill>
+                        <a:schemeClr val="lt1"/>
+                      </a:solidFill>
+                      <a:prstDash val="solid"/>
+                      <a:round/>
+                      <a:headEnd len="sm" w="sm" type="none"/>
+                      <a:tailEnd len="sm" w="sm" type="none"/>
+                    </a:lnB>
+                    <a:solidFill>
+                      <a:schemeClr val="lt1"/>
+                    </a:solidFill>
+                  </a:tcPr>
+                </a:tc>
+                <a:tc gridSpan="2">
+                  <a:txBody>
+                    <a:bodyPr/>
+                    <a:lstStyle/>
+                    <a:p>
+                      <a:pPr indent="0" lvl="0" marL="0" rtl="0" algn="ctr">
+                        <a:spcBef>
+                          <a:spcPts val="0"/>
+                        </a:spcBef>
+                        <a:spcAft>
+                          <a:spcPts val="0"/>
+                        </a:spcAft>
+                        <a:buNone/>
+                      </a:pPr>
+                      <a:r>
+                        <a:rPr b="1" lang="en">
+                          <a:solidFill>
+                            <a:schemeClr val="lt1"/>
+                          </a:solidFill>
+                        </a:rPr>
+                        <a:t>Praktikum (PRAK)</a:t>
+                      </a:r>
+                      <a:endParaRPr b="1">
+                        <a:solidFill>
+                          <a:schemeClr val="lt1"/>
+                        </a:solidFill>
+                      </a:endParaRPr>
+                    </a:p>
+                  </a:txBody>
+                  <a:tcPr marT="91425" marB="91425" marR="91425" marL="91425" anchor="ctr">
+                    <a:lnL cap="flat" cmpd="sng" w="38100">
+                      <a:solidFill>
+                        <a:schemeClr val="lt1"/>
+                      </a:solidFill>
+                      <a:prstDash val="solid"/>
+                      <a:round/>
+                      <a:headEnd len="sm" w="sm" type="none"/>
+                      <a:tailEnd len="sm" w="sm" type="none"/>
+                    </a:lnL>
+                    <a:lnR cap="flat" cmpd="sng" w="38100">
+                      <a:solidFill>
+                        <a:schemeClr val="lt1"/>
+                      </a:solidFill>
+                      <a:prstDash val="solid"/>
+                      <a:round/>
+                      <a:headEnd len="sm" w="sm" type="none"/>
+                      <a:tailEnd len="sm" w="sm" type="none"/>
+                    </a:lnR>
+                    <a:lnT cap="flat" cmpd="sng" w="38100">
+                      <a:solidFill>
+                        <a:schemeClr val="lt1"/>
+                      </a:solidFill>
+                      <a:prstDash val="solid"/>
+                      <a:round/>
+                      <a:headEnd len="sm" w="sm" type="none"/>
+                      <a:tailEnd len="sm" w="sm" type="none"/>
+                    </a:lnT>
+                    <a:lnB cap="flat" cmpd="sng" w="38100">
+                      <a:solidFill>
+                        <a:schemeClr val="lt1"/>
+                      </a:solidFill>
+                      <a:prstDash val="solid"/>
+                      <a:round/>
+                      <a:headEnd len="sm" w="sm" type="none"/>
+                      <a:tailEnd len="sm" w="sm" type="none"/>
+                    </a:lnB>
+                    <a:solidFill>
+                      <a:schemeClr val="lt2"/>
+                    </a:solidFill>
+                  </a:tcPr>
+                </a:tc>
+                <a:tc hMerge="1"/>
+                <a:tc gridSpan="4">
+                  <a:txBody>
+                    <a:bodyPr/>
+                    <a:lstStyle/>
+                    <a:p>
+                      <a:pPr indent="0" lvl="0" marL="0" rtl="0" algn="ctr">
+                        <a:spcBef>
+                          <a:spcPts val="0"/>
+                        </a:spcBef>
+                        <a:spcAft>
+                          <a:spcPts val="0"/>
+                        </a:spcAft>
+                        <a:buNone/>
+                      </a:pPr>
+                      <a:r>
+                        <a:rPr b="1" lang="en">
+                          <a:solidFill>
+                            <a:schemeClr val="lt1"/>
+                          </a:solidFill>
+                        </a:rPr>
+                        <a:t>Project (PROJ / ASEP)</a:t>
+                      </a:r>
+                      <a:endParaRPr b="1">
+                        <a:solidFill>
+                          <a:schemeClr val="lt1"/>
+                        </a:solidFill>
+                      </a:endParaRPr>
+                    </a:p>
+                  </a:txBody>
+                  <a:tcPr marT="0" marB="0" marR="91425" marL="91425" anchor="ctr">
+                    <a:lnL cap="flat" cmpd="sng" w="38100">
+                      <a:solidFill>
+                        <a:schemeClr val="lt1"/>
+                      </a:solidFill>
+                      <a:prstDash val="solid"/>
+                      <a:round/>
+                      <a:headEnd len="sm" w="sm" type="none"/>
+                      <a:tailEnd len="sm" w="sm" type="none"/>
+                    </a:lnL>
+                    <a:lnR cap="flat" cmpd="sng" w="38100">
+                      <a:solidFill>
+                        <a:schemeClr val="lt1"/>
+                      </a:solidFill>
+                      <a:prstDash val="solid"/>
+                      <a:round/>
+                      <a:headEnd len="sm" w="sm" type="none"/>
+                      <a:tailEnd len="sm" w="sm" type="none"/>
+                    </a:lnR>
+                    <a:lnT cap="flat" cmpd="sng" w="38100">
+                      <a:solidFill>
+                        <a:schemeClr val="lt1"/>
+                      </a:solidFill>
+                      <a:prstDash val="solid"/>
+                      <a:round/>
+                      <a:headEnd len="sm" w="sm" type="none"/>
+                      <a:tailEnd len="sm" w="sm" type="none"/>
+                    </a:lnT>
+                    <a:lnB cap="flat" cmpd="sng" w="38100">
+                      <a:solidFill>
+                        <a:schemeClr val="lt1"/>
+                      </a:solidFill>
+                      <a:prstDash val="solid"/>
+                      <a:round/>
+                      <a:headEnd len="sm" w="sm" type="none"/>
+                      <a:tailEnd len="sm" w="sm" type="none"/>
+                    </a:lnB>
+                    <a:solidFill>
+                      <a:schemeClr val="lt2"/>
+                    </a:solidFill>
+                  </a:tcPr>
+                </a:tc>
+                <a:tc hMerge="1"/>
+                <a:tc hMerge="1"/>
+                <a:tc hMerge="1"/>
+              </a:tr>
+              <a:tr h="522525">
                 <a:tc>
                   <a:txBody>
                     <a:bodyPr/>
@@ -12816,7 +12133,7 @@
                     </a:solidFill>
                   </a:tcPr>
                 </a:tc>
-                <a:tc>
+                <a:tc gridSpan="2">
                   <a:txBody>
                     <a:bodyPr/>
                     <a:lstStyle/>
@@ -12836,7 +12153,7 @@
                             <a:schemeClr val="lt1"/>
                           </a:solidFill>
                         </a:rPr>
-                        <a:t>SEMI</a:t>
+                        <a:t>BATH + KOLL</a:t>
                       </a:r>
                       <a:endParaRPr b="1">
                         <a:solidFill>
@@ -12887,7 +12204,8 @@
                     </a:solidFill>
                   </a:tcPr>
                 </a:tc>
-                <a:tc>
+                <a:tc hMerge="1"/>
+                <a:tc gridSpan="4">
                   <a:txBody>
                     <a:bodyPr/>
                     <a:lstStyle/>
@@ -12907,7 +12225,7 @@
                             <a:schemeClr val="lt1"/>
                           </a:solidFill>
                         </a:rPr>
-                        <a:t>SEMI</a:t>
+                        <a:t>MATH + KOLL</a:t>
                       </a:r>
                       <a:endParaRPr b="1">
                         <a:solidFill>
@@ -12958,2068 +12276,9 @@
                     </a:solidFill>
                   </a:tcPr>
                 </a:tc>
-                <a:tc>
-                  <a:txBody>
-                    <a:bodyPr/>
-                    <a:lstStyle/>
-                    <a:p>
-                      <a:pPr indent="0" lvl="0" marL="0" rtl="0" algn="ctr">
-                        <a:spcBef>
-                          <a:spcPts val="0"/>
-                        </a:spcBef>
-                        <a:spcAft>
-                          <a:spcPts val="0"/>
-                        </a:spcAft>
-                        <a:buNone/>
-                      </a:pPr>
-                      <a:r>
-                        <a:rPr b="1" lang="en">
-                          <a:solidFill>
-                            <a:schemeClr val="lt1"/>
-                          </a:solidFill>
-                        </a:rPr>
-                        <a:t>SEMI</a:t>
-                      </a:r>
-                      <a:endParaRPr b="1">
-                        <a:solidFill>
-                          <a:schemeClr val="lt1"/>
-                        </a:solidFill>
-                      </a:endParaRPr>
-                    </a:p>
-                  </a:txBody>
-                  <a:tcPr marT="91425" marB="91425" marR="91425" marL="91425" anchor="ctr">
-                    <a:lnL cap="flat" cmpd="sng" w="38100">
-                      <a:solidFill>
-                        <a:schemeClr val="lt1"/>
-                      </a:solidFill>
-                      <a:prstDash val="solid"/>
-                      <a:round/>
-                      <a:headEnd len="sm" w="sm" type="none"/>
-                      <a:tailEnd len="sm" w="sm" type="none"/>
-                    </a:lnL>
-                    <a:lnR cap="flat" cmpd="sng" w="38100">
-                      <a:solidFill>
-                        <a:schemeClr val="lt1"/>
-                      </a:solidFill>
-                      <a:prstDash val="solid"/>
-                      <a:round/>
-                      <a:headEnd len="sm" w="sm" type="none"/>
-                      <a:tailEnd len="sm" w="sm" type="none"/>
-                    </a:lnR>
-                    <a:lnT cap="flat" cmpd="sng" w="38100">
-                      <a:solidFill>
-                        <a:schemeClr val="lt1"/>
-                      </a:solidFill>
-                      <a:prstDash val="solid"/>
-                      <a:round/>
-                      <a:headEnd len="sm" w="sm" type="none"/>
-                      <a:tailEnd len="sm" w="sm" type="none"/>
-                    </a:lnT>
-                    <a:lnB cap="flat" cmpd="sng" w="38100">
-                      <a:solidFill>
-                        <a:schemeClr val="lt1"/>
-                      </a:solidFill>
-                      <a:prstDash val="solid"/>
-                      <a:round/>
-                      <a:headEnd len="sm" w="sm" type="none"/>
-                      <a:tailEnd len="sm" w="sm" type="none"/>
-                    </a:lnB>
-                    <a:solidFill>
-                      <a:schemeClr val="dk2"/>
-                    </a:solidFill>
-                  </a:tcPr>
-                </a:tc>
-                <a:tc>
-                  <a:txBody>
-                    <a:bodyPr/>
-                    <a:lstStyle/>
-                    <a:p>
-                      <a:pPr indent="0" lvl="0" marL="0" rtl="0" algn="ctr">
-                        <a:spcBef>
-                          <a:spcPts val="0"/>
-                        </a:spcBef>
-                        <a:spcAft>
-                          <a:spcPts val="0"/>
-                        </a:spcAft>
-                        <a:buNone/>
-                      </a:pPr>
-                      <a:r>
-                        <a:rPr b="1" lang="en">
-                          <a:solidFill>
-                            <a:schemeClr val="lt1"/>
-                          </a:solidFill>
-                        </a:rPr>
-                        <a:t>SEMI</a:t>
-                      </a:r>
-                      <a:endParaRPr b="1">
-                        <a:solidFill>
-                          <a:schemeClr val="lt1"/>
-                        </a:solidFill>
-                      </a:endParaRPr>
-                    </a:p>
-                  </a:txBody>
-                  <a:tcPr marT="91425" marB="91425" marR="91425" marL="91425" anchor="ctr">
-                    <a:lnL cap="flat" cmpd="sng" w="38100">
-                      <a:solidFill>
-                        <a:schemeClr val="lt1"/>
-                      </a:solidFill>
-                      <a:prstDash val="solid"/>
-                      <a:round/>
-                      <a:headEnd len="sm" w="sm" type="none"/>
-                      <a:tailEnd len="sm" w="sm" type="none"/>
-                    </a:lnL>
-                    <a:lnR cap="flat" cmpd="sng" w="38100">
-                      <a:solidFill>
-                        <a:schemeClr val="lt1"/>
-                      </a:solidFill>
-                      <a:prstDash val="solid"/>
-                      <a:round/>
-                      <a:headEnd len="sm" w="sm" type="none"/>
-                      <a:tailEnd len="sm" w="sm" type="none"/>
-                    </a:lnR>
-                    <a:lnT cap="flat" cmpd="sng" w="38100">
-                      <a:solidFill>
-                        <a:schemeClr val="lt1"/>
-                      </a:solidFill>
-                      <a:prstDash val="solid"/>
-                      <a:round/>
-                      <a:headEnd len="sm" w="sm" type="none"/>
-                      <a:tailEnd len="sm" w="sm" type="none"/>
-                    </a:lnT>
-                    <a:lnB cap="flat" cmpd="sng" w="38100">
-                      <a:solidFill>
-                        <a:schemeClr val="lt1"/>
-                      </a:solidFill>
-                      <a:prstDash val="solid"/>
-                      <a:round/>
-                      <a:headEnd len="sm" w="sm" type="none"/>
-                      <a:tailEnd len="sm" w="sm" type="none"/>
-                    </a:lnB>
-                    <a:solidFill>
-                      <a:schemeClr val="dk2"/>
-                    </a:solidFill>
-                  </a:tcPr>
-                </a:tc>
-                <a:tc>
-                  <a:txBody>
-                    <a:bodyPr/>
-                    <a:lstStyle/>
-                    <a:p>
-                      <a:pPr indent="0" lvl="0" marL="0" rtl="0" algn="ctr">
-                        <a:spcBef>
-                          <a:spcPts val="0"/>
-                        </a:spcBef>
-                        <a:spcAft>
-                          <a:spcPts val="0"/>
-                        </a:spcAft>
-                        <a:buNone/>
-                      </a:pPr>
-                      <a:r>
-                        <a:rPr b="1" lang="en">
-                          <a:solidFill>
-                            <a:schemeClr val="lt1"/>
-                          </a:solidFill>
-                        </a:rPr>
-                        <a:t>SEMI</a:t>
-                      </a:r>
-                      <a:endParaRPr b="1">
-                        <a:solidFill>
-                          <a:schemeClr val="lt1"/>
-                        </a:solidFill>
-                      </a:endParaRPr>
-                    </a:p>
-                  </a:txBody>
-                  <a:tcPr marT="91425" marB="91425" marR="91425" marL="91425" anchor="ctr">
-                    <a:lnL cap="flat" cmpd="sng" w="38100">
-                      <a:solidFill>
-                        <a:schemeClr val="lt1"/>
-                      </a:solidFill>
-                      <a:prstDash val="solid"/>
-                      <a:round/>
-                      <a:headEnd len="sm" w="sm" type="none"/>
-                      <a:tailEnd len="sm" w="sm" type="none"/>
-                    </a:lnL>
-                    <a:lnR cap="flat" cmpd="sng" w="38100">
-                      <a:solidFill>
-                        <a:schemeClr val="lt1"/>
-                      </a:solidFill>
-                      <a:prstDash val="solid"/>
-                      <a:round/>
-                      <a:headEnd len="sm" w="sm" type="none"/>
-                      <a:tailEnd len="sm" w="sm" type="none"/>
-                    </a:lnR>
-                    <a:lnT cap="flat" cmpd="sng" w="38100">
-                      <a:solidFill>
-                        <a:schemeClr val="lt1"/>
-                      </a:solidFill>
-                      <a:prstDash val="solid"/>
-                      <a:round/>
-                      <a:headEnd len="sm" w="sm" type="none"/>
-                      <a:tailEnd len="sm" w="sm" type="none"/>
-                    </a:lnT>
-                    <a:lnB cap="flat" cmpd="sng" w="38100">
-                      <a:solidFill>
-                        <a:schemeClr val="lt1"/>
-                      </a:solidFill>
-                      <a:prstDash val="solid"/>
-                      <a:round/>
-                      <a:headEnd len="sm" w="sm" type="none"/>
-                      <a:tailEnd len="sm" w="sm" type="none"/>
-                    </a:lnB>
-                    <a:solidFill>
-                      <a:schemeClr val="dk2"/>
-                    </a:solidFill>
-                  </a:tcPr>
-                </a:tc>
-                <a:tc vMerge="1"/>
-              </a:tr>
-              <a:tr h="457200">
-                <a:tc>
-                  <a:txBody>
-                    <a:bodyPr/>
-                    <a:lstStyle/>
-                    <a:p>
-                      <a:pPr indent="0" lvl="0" marL="0" rtl="0" algn="ctr">
-                        <a:spcBef>
-                          <a:spcPts val="0"/>
-                        </a:spcBef>
-                        <a:spcAft>
-                          <a:spcPts val="0"/>
-                        </a:spcAft>
-                        <a:buNone/>
-                      </a:pPr>
-                      <a:r>
-                        <a:t/>
-                      </a:r>
-                      <a:endParaRPr/>
-                    </a:p>
-                  </a:txBody>
-                  <a:tcPr marT="91425" marB="91425" marR="91425" marL="91425" anchor="ctr">
-                    <a:lnL cap="flat" cmpd="sng" w="38100">
-                      <a:solidFill>
-                        <a:schemeClr val="lt1"/>
-                      </a:solidFill>
-                      <a:prstDash val="solid"/>
-                      <a:round/>
-                      <a:headEnd len="sm" w="sm" type="none"/>
-                      <a:tailEnd len="sm" w="sm" type="none"/>
-                    </a:lnL>
-                    <a:lnR cap="flat" cmpd="sng" w="38100">
-                      <a:solidFill>
-                        <a:schemeClr val="lt1"/>
-                      </a:solidFill>
-                      <a:prstDash val="solid"/>
-                      <a:round/>
-                      <a:headEnd len="sm" w="sm" type="none"/>
-                      <a:tailEnd len="sm" w="sm" type="none"/>
-                    </a:lnR>
-                    <a:lnT cap="flat" cmpd="sng" w="38100">
-                      <a:solidFill>
-                        <a:schemeClr val="lt1"/>
-                      </a:solidFill>
-                      <a:prstDash val="solid"/>
-                      <a:round/>
-                      <a:headEnd len="sm" w="sm" type="none"/>
-                      <a:tailEnd len="sm" w="sm" type="none"/>
-                    </a:lnT>
-                    <a:lnB cap="flat" cmpd="sng" w="38100">
-                      <a:solidFill>
-                        <a:schemeClr val="lt1"/>
-                      </a:solidFill>
-                      <a:prstDash val="solid"/>
-                      <a:round/>
-                      <a:headEnd len="sm" w="sm" type="none"/>
-                      <a:tailEnd len="sm" w="sm" type="none"/>
-                    </a:lnB>
-                    <a:solidFill>
-                      <a:schemeClr val="lt1"/>
-                    </a:solidFill>
-                  </a:tcPr>
-                </a:tc>
-                <a:tc>
-                  <a:txBody>
-                    <a:bodyPr/>
-                    <a:lstStyle/>
-                    <a:p>
-                      <a:pPr indent="0" lvl="0" marL="0" rtl="0" algn="ctr">
-                        <a:spcBef>
-                          <a:spcPts val="0"/>
-                        </a:spcBef>
-                        <a:spcAft>
-                          <a:spcPts val="0"/>
-                        </a:spcAft>
-                        <a:buNone/>
-                      </a:pPr>
-                      <a:r>
-                        <a:t/>
-                      </a:r>
-                      <a:endParaRPr/>
-                    </a:p>
-                  </a:txBody>
-                  <a:tcPr marT="91425" marB="91425" marR="91425" marL="91425" anchor="ctr">
-                    <a:lnL cap="flat" cmpd="sng" w="38100">
-                      <a:solidFill>
-                        <a:schemeClr val="lt1"/>
-                      </a:solidFill>
-                      <a:prstDash val="solid"/>
-                      <a:round/>
-                      <a:headEnd len="sm" w="sm" type="none"/>
-                      <a:tailEnd len="sm" w="sm" type="none"/>
-                    </a:lnL>
-                    <a:lnR cap="flat" cmpd="sng" w="38100">
-                      <a:solidFill>
-                        <a:schemeClr val="lt1"/>
-                      </a:solidFill>
-                      <a:prstDash val="solid"/>
-                      <a:round/>
-                      <a:headEnd len="sm" w="sm" type="none"/>
-                      <a:tailEnd len="sm" w="sm" type="none"/>
-                    </a:lnR>
-                    <a:lnT cap="flat" cmpd="sng" w="38100">
-                      <a:solidFill>
-                        <a:schemeClr val="lt1"/>
-                      </a:solidFill>
-                      <a:prstDash val="solid"/>
-                      <a:round/>
-                      <a:headEnd len="sm" w="sm" type="none"/>
-                      <a:tailEnd len="sm" w="sm" type="none"/>
-                    </a:lnT>
-                    <a:lnB cap="flat" cmpd="sng" w="38100">
-                      <a:solidFill>
-                        <a:schemeClr val="lt1"/>
-                      </a:solidFill>
-                      <a:prstDash val="solid"/>
-                      <a:round/>
-                      <a:headEnd len="sm" w="sm" type="none"/>
-                      <a:tailEnd len="sm" w="sm" type="none"/>
-                    </a:lnB>
-                    <a:solidFill>
-                      <a:schemeClr val="lt1"/>
-                    </a:solidFill>
-                  </a:tcPr>
-                </a:tc>
-                <a:tc>
-                  <a:txBody>
-                    <a:bodyPr/>
-                    <a:lstStyle/>
-                    <a:p>
-                      <a:pPr indent="0" lvl="0" marL="0" rtl="0" algn="ctr">
-                        <a:spcBef>
-                          <a:spcPts val="0"/>
-                        </a:spcBef>
-                        <a:spcAft>
-                          <a:spcPts val="0"/>
-                        </a:spcAft>
-                        <a:buNone/>
-                      </a:pPr>
-                      <a:r>
-                        <a:t/>
-                      </a:r>
-                      <a:endParaRPr/>
-                    </a:p>
-                  </a:txBody>
-                  <a:tcPr marT="91425" marB="91425" marR="91425" marL="91425" anchor="ctr">
-                    <a:lnL cap="flat" cmpd="sng" w="38100">
-                      <a:solidFill>
-                        <a:schemeClr val="lt1"/>
-                      </a:solidFill>
-                      <a:prstDash val="solid"/>
-                      <a:round/>
-                      <a:headEnd len="sm" w="sm" type="none"/>
-                      <a:tailEnd len="sm" w="sm" type="none"/>
-                    </a:lnL>
-                    <a:lnR cap="flat" cmpd="sng" w="38100">
-                      <a:solidFill>
-                        <a:schemeClr val="lt1"/>
-                      </a:solidFill>
-                      <a:prstDash val="solid"/>
-                      <a:round/>
-                      <a:headEnd len="sm" w="sm" type="none"/>
-                      <a:tailEnd len="sm" w="sm" type="none"/>
-                    </a:lnR>
-                    <a:lnT cap="flat" cmpd="sng" w="38100">
-                      <a:solidFill>
-                        <a:schemeClr val="lt1"/>
-                      </a:solidFill>
-                      <a:prstDash val="solid"/>
-                      <a:round/>
-                      <a:headEnd len="sm" w="sm" type="none"/>
-                      <a:tailEnd len="sm" w="sm" type="none"/>
-                    </a:lnT>
-                    <a:lnB cap="flat" cmpd="sng" w="38100">
-                      <a:solidFill>
-                        <a:schemeClr val="lt1"/>
-                      </a:solidFill>
-                      <a:prstDash val="solid"/>
-                      <a:round/>
-                      <a:headEnd len="sm" w="sm" type="none"/>
-                      <a:tailEnd len="sm" w="sm" type="none"/>
-                    </a:lnB>
-                    <a:solidFill>
-                      <a:schemeClr val="lt1"/>
-                    </a:solidFill>
-                  </a:tcPr>
-                </a:tc>
-                <a:tc>
-                  <a:txBody>
-                    <a:bodyPr/>
-                    <a:lstStyle/>
-                    <a:p>
-                      <a:pPr indent="0" lvl="0" marL="0" rtl="0" algn="ctr">
-                        <a:spcBef>
-                          <a:spcPts val="0"/>
-                        </a:spcBef>
-                        <a:spcAft>
-                          <a:spcPts val="0"/>
-                        </a:spcAft>
-                        <a:buNone/>
-                      </a:pPr>
-                      <a:r>
-                        <a:t/>
-                      </a:r>
-                      <a:endParaRPr/>
-                    </a:p>
-                  </a:txBody>
-                  <a:tcPr marT="91425" marB="91425" marR="91425" marL="91425" anchor="ctr">
-                    <a:lnL cap="flat" cmpd="sng" w="38100">
-                      <a:solidFill>
-                        <a:schemeClr val="lt1"/>
-                      </a:solidFill>
-                      <a:prstDash val="solid"/>
-                      <a:round/>
-                      <a:headEnd len="sm" w="sm" type="none"/>
-                      <a:tailEnd len="sm" w="sm" type="none"/>
-                    </a:lnL>
-                    <a:lnR cap="flat" cmpd="sng" w="38100">
-                      <a:solidFill>
-                        <a:schemeClr val="lt1"/>
-                      </a:solidFill>
-                      <a:prstDash val="solid"/>
-                      <a:round/>
-                      <a:headEnd len="sm" w="sm" type="none"/>
-                      <a:tailEnd len="sm" w="sm" type="none"/>
-                    </a:lnR>
-                    <a:lnT cap="flat" cmpd="sng" w="38100">
-                      <a:solidFill>
-                        <a:schemeClr val="lt1"/>
-                      </a:solidFill>
-                      <a:prstDash val="solid"/>
-                      <a:round/>
-                      <a:headEnd len="sm" w="sm" type="none"/>
-                      <a:tailEnd len="sm" w="sm" type="none"/>
-                    </a:lnT>
-                    <a:lnB cap="flat" cmpd="sng" w="38100">
-                      <a:solidFill>
-                        <a:schemeClr val="lt1"/>
-                      </a:solidFill>
-                      <a:prstDash val="solid"/>
-                      <a:round/>
-                      <a:headEnd len="sm" w="sm" type="none"/>
-                      <a:tailEnd len="sm" w="sm" type="none"/>
-                    </a:lnB>
-                    <a:solidFill>
-                      <a:schemeClr val="lt1"/>
-                    </a:solidFill>
-                  </a:tcPr>
-                </a:tc>
-                <a:tc>
-                  <a:txBody>
-                    <a:bodyPr/>
-                    <a:lstStyle/>
-                    <a:p>
-                      <a:pPr indent="0" lvl="0" marL="0" rtl="0" algn="ctr">
-                        <a:spcBef>
-                          <a:spcPts val="0"/>
-                        </a:spcBef>
-                        <a:spcAft>
-                          <a:spcPts val="0"/>
-                        </a:spcAft>
-                        <a:buNone/>
-                      </a:pPr>
-                      <a:r>
-                        <a:rPr b="1" lang="en">
-                          <a:solidFill>
-                            <a:schemeClr val="lt1"/>
-                          </a:solidFill>
-                        </a:rPr>
-                        <a:t>PRAK</a:t>
-                      </a:r>
-                      <a:endParaRPr b="1">
-                        <a:solidFill>
-                          <a:schemeClr val="lt1"/>
-                        </a:solidFill>
-                      </a:endParaRPr>
-                    </a:p>
-                  </a:txBody>
-                  <a:tcPr marT="91425" marB="91425" marR="91425" marL="91425" anchor="ctr">
-                    <a:lnL cap="flat" cmpd="sng" w="38100">
-                      <a:solidFill>
-                        <a:schemeClr val="lt1"/>
-                      </a:solidFill>
-                      <a:prstDash val="solid"/>
-                      <a:round/>
-                      <a:headEnd len="sm" w="sm" type="none"/>
-                      <a:tailEnd len="sm" w="sm" type="none"/>
-                    </a:lnL>
-                    <a:lnR cap="flat" cmpd="sng" w="38100">
-                      <a:solidFill>
-                        <a:schemeClr val="lt1"/>
-                      </a:solidFill>
-                      <a:prstDash val="solid"/>
-                      <a:round/>
-                      <a:headEnd len="sm" w="sm" type="none"/>
-                      <a:tailEnd len="sm" w="sm" type="none"/>
-                    </a:lnR>
-                    <a:lnT cap="flat" cmpd="sng" w="38100">
-                      <a:solidFill>
-                        <a:schemeClr val="lt1"/>
-                      </a:solidFill>
-                      <a:prstDash val="solid"/>
-                      <a:round/>
-                      <a:headEnd len="sm" w="sm" type="none"/>
-                      <a:tailEnd len="sm" w="sm" type="none"/>
-                    </a:lnT>
-                    <a:lnB cap="flat" cmpd="sng" w="38100">
-                      <a:solidFill>
-                        <a:schemeClr val="lt1"/>
-                      </a:solidFill>
-                      <a:prstDash val="solid"/>
-                      <a:round/>
-                      <a:headEnd len="sm" w="sm" type="none"/>
-                      <a:tailEnd len="sm" w="sm" type="none"/>
-                    </a:lnB>
-                    <a:solidFill>
-                      <a:schemeClr val="dk2"/>
-                    </a:solidFill>
-                  </a:tcPr>
-                </a:tc>
-                <a:tc>
-                  <a:txBody>
-                    <a:bodyPr/>
-                    <a:lstStyle/>
-                    <a:p>
-                      <a:pPr indent="0" lvl="0" marL="0" rtl="0" algn="ctr">
-                        <a:spcBef>
-                          <a:spcPts val="0"/>
-                        </a:spcBef>
-                        <a:spcAft>
-                          <a:spcPts val="0"/>
-                        </a:spcAft>
-                        <a:buNone/>
-                      </a:pPr>
-                      <a:r>
-                        <a:rPr b="1" lang="en">
-                          <a:solidFill>
-                            <a:schemeClr val="lt1"/>
-                          </a:solidFill>
-                        </a:rPr>
-                        <a:t>PRAK</a:t>
-                      </a:r>
-                      <a:endParaRPr b="1">
-                        <a:solidFill>
-                          <a:schemeClr val="lt1"/>
-                        </a:solidFill>
-                      </a:endParaRPr>
-                    </a:p>
-                  </a:txBody>
-                  <a:tcPr marT="91425" marB="91425" marR="91425" marL="91425" anchor="ctr">
-                    <a:lnL cap="flat" cmpd="sng" w="38100">
-                      <a:solidFill>
-                        <a:schemeClr val="lt1"/>
-                      </a:solidFill>
-                      <a:prstDash val="solid"/>
-                      <a:round/>
-                      <a:headEnd len="sm" w="sm" type="none"/>
-                      <a:tailEnd len="sm" w="sm" type="none"/>
-                    </a:lnL>
-                    <a:lnR cap="flat" cmpd="sng" w="38100">
-                      <a:solidFill>
-                        <a:schemeClr val="lt1"/>
-                      </a:solidFill>
-                      <a:prstDash val="solid"/>
-                      <a:round/>
-                      <a:headEnd len="sm" w="sm" type="none"/>
-                      <a:tailEnd len="sm" w="sm" type="none"/>
-                    </a:lnR>
-                    <a:lnT cap="flat" cmpd="sng" w="38100">
-                      <a:solidFill>
-                        <a:schemeClr val="lt1"/>
-                      </a:solidFill>
-                      <a:prstDash val="solid"/>
-                      <a:round/>
-                      <a:headEnd len="sm" w="sm" type="none"/>
-                      <a:tailEnd len="sm" w="sm" type="none"/>
-                    </a:lnT>
-                    <a:lnB cap="flat" cmpd="sng" w="38100">
-                      <a:solidFill>
-                        <a:schemeClr val="lt1"/>
-                      </a:solidFill>
-                      <a:prstDash val="solid"/>
-                      <a:round/>
-                      <a:headEnd len="sm" w="sm" type="none"/>
-                      <a:tailEnd len="sm" w="sm" type="none"/>
-                    </a:lnB>
-                    <a:solidFill>
-                      <a:schemeClr val="dk2"/>
-                    </a:solidFill>
-                  </a:tcPr>
-                </a:tc>
-                <a:tc>
-                  <a:txBody>
-                    <a:bodyPr/>
-                    <a:lstStyle/>
-                    <a:p>
-                      <a:pPr indent="0" lvl="0" marL="0" rtl="0" algn="ctr">
-                        <a:spcBef>
-                          <a:spcPts val="0"/>
-                        </a:spcBef>
-                        <a:spcAft>
-                          <a:spcPts val="0"/>
-                        </a:spcAft>
-                        <a:buNone/>
-                      </a:pPr>
-                      <a:r>
-                        <a:rPr b="1" lang="en">
-                          <a:solidFill>
-                            <a:schemeClr val="lt1"/>
-                          </a:solidFill>
-                        </a:rPr>
-                        <a:t>PRAK</a:t>
-                      </a:r>
-                      <a:endParaRPr b="1">
-                        <a:solidFill>
-                          <a:schemeClr val="lt1"/>
-                        </a:solidFill>
-                      </a:endParaRPr>
-                    </a:p>
-                  </a:txBody>
-                  <a:tcPr marT="91425" marB="91425" marR="91425" marL="91425" anchor="ctr">
-                    <a:lnL cap="flat" cmpd="sng" w="38100">
-                      <a:solidFill>
-                        <a:schemeClr val="lt1"/>
-                      </a:solidFill>
-                      <a:prstDash val="solid"/>
-                      <a:round/>
-                      <a:headEnd len="sm" w="sm" type="none"/>
-                      <a:tailEnd len="sm" w="sm" type="none"/>
-                    </a:lnL>
-                    <a:lnR cap="flat" cmpd="sng" w="38100">
-                      <a:solidFill>
-                        <a:schemeClr val="lt1"/>
-                      </a:solidFill>
-                      <a:prstDash val="solid"/>
-                      <a:round/>
-                      <a:headEnd len="sm" w="sm" type="none"/>
-                      <a:tailEnd len="sm" w="sm" type="none"/>
-                    </a:lnR>
-                    <a:lnT cap="flat" cmpd="sng" w="38100">
-                      <a:solidFill>
-                        <a:schemeClr val="lt1"/>
-                      </a:solidFill>
-                      <a:prstDash val="solid"/>
-                      <a:round/>
-                      <a:headEnd len="sm" w="sm" type="none"/>
-                      <a:tailEnd len="sm" w="sm" type="none"/>
-                    </a:lnT>
-                    <a:lnB cap="flat" cmpd="sng" w="38100">
-                      <a:solidFill>
-                        <a:schemeClr val="lt1"/>
-                      </a:solidFill>
-                      <a:prstDash val="solid"/>
-                      <a:round/>
-                      <a:headEnd len="sm" w="sm" type="none"/>
-                      <a:tailEnd len="sm" w="sm" type="none"/>
-                    </a:lnB>
-                    <a:solidFill>
-                      <a:schemeClr val="dk2"/>
-                    </a:solidFill>
-                  </a:tcPr>
-                </a:tc>
-                <a:tc>
-                  <a:txBody>
-                    <a:bodyPr/>
-                    <a:lstStyle/>
-                    <a:p>
-                      <a:pPr indent="0" lvl="0" marL="0" rtl="0" algn="ctr">
-                        <a:spcBef>
-                          <a:spcPts val="0"/>
-                        </a:spcBef>
-                        <a:spcAft>
-                          <a:spcPts val="0"/>
-                        </a:spcAft>
-                        <a:buNone/>
-                      </a:pPr>
-                      <a:r>
-                        <a:rPr b="1" lang="en">
-                          <a:solidFill>
-                            <a:schemeClr val="lt1"/>
-                          </a:solidFill>
-                        </a:rPr>
-                        <a:t>PRAK</a:t>
-                      </a:r>
-                      <a:endParaRPr b="1">
-                        <a:solidFill>
-                          <a:schemeClr val="lt1"/>
-                        </a:solidFill>
-                      </a:endParaRPr>
-                    </a:p>
-                  </a:txBody>
-                  <a:tcPr marT="91425" marB="91425" marR="91425" marL="91425" anchor="ctr">
-                    <a:lnL cap="flat" cmpd="sng" w="38100">
-                      <a:solidFill>
-                        <a:schemeClr val="lt1"/>
-                      </a:solidFill>
-                      <a:prstDash val="solid"/>
-                      <a:round/>
-                      <a:headEnd len="sm" w="sm" type="none"/>
-                      <a:tailEnd len="sm" w="sm" type="none"/>
-                    </a:lnL>
-                    <a:lnR cap="flat" cmpd="sng" w="38100">
-                      <a:solidFill>
-                        <a:schemeClr val="lt1"/>
-                      </a:solidFill>
-                      <a:prstDash val="solid"/>
-                      <a:round/>
-                      <a:headEnd len="sm" w="sm" type="none"/>
-                      <a:tailEnd len="sm" w="sm" type="none"/>
-                    </a:lnR>
-                    <a:lnT cap="flat" cmpd="sng" w="38100">
-                      <a:solidFill>
-                        <a:schemeClr val="lt1"/>
-                      </a:solidFill>
-                      <a:prstDash val="solid"/>
-                      <a:round/>
-                      <a:headEnd len="sm" w="sm" type="none"/>
-                      <a:tailEnd len="sm" w="sm" type="none"/>
-                    </a:lnT>
-                    <a:lnB cap="flat" cmpd="sng" w="38100">
-                      <a:solidFill>
-                        <a:schemeClr val="lt1"/>
-                      </a:solidFill>
-                      <a:prstDash val="solid"/>
-                      <a:round/>
-                      <a:headEnd len="sm" w="sm" type="none"/>
-                      <a:tailEnd len="sm" w="sm" type="none"/>
-                    </a:lnB>
-                    <a:solidFill>
-                      <a:schemeClr val="dk2"/>
-                    </a:solidFill>
-                  </a:tcPr>
-                </a:tc>
-                <a:tc>
-                  <a:txBody>
-                    <a:bodyPr/>
-                    <a:lstStyle/>
-                    <a:p>
-                      <a:pPr indent="0" lvl="0" marL="0" rtl="0" algn="ctr">
-                        <a:spcBef>
-                          <a:spcPts val="0"/>
-                        </a:spcBef>
-                        <a:spcAft>
-                          <a:spcPts val="0"/>
-                        </a:spcAft>
-                        <a:buNone/>
-                      </a:pPr>
-                      <a:r>
-                        <a:rPr b="1" lang="en">
-                          <a:solidFill>
-                            <a:schemeClr val="lt1"/>
-                          </a:solidFill>
-                        </a:rPr>
-                        <a:t>PRAK</a:t>
-                      </a:r>
-                      <a:endParaRPr b="1">
-                        <a:solidFill>
-                          <a:schemeClr val="lt1"/>
-                        </a:solidFill>
-                      </a:endParaRPr>
-                    </a:p>
-                  </a:txBody>
-                  <a:tcPr marT="91425" marB="91425" marR="91425" marL="91425" anchor="ctr">
-                    <a:lnL cap="flat" cmpd="sng" w="38100">
-                      <a:solidFill>
-                        <a:schemeClr val="lt1"/>
-                      </a:solidFill>
-                      <a:prstDash val="solid"/>
-                      <a:round/>
-                      <a:headEnd len="sm" w="sm" type="none"/>
-                      <a:tailEnd len="sm" w="sm" type="none"/>
-                    </a:lnL>
-                    <a:lnR cap="flat" cmpd="sng" w="38100">
-                      <a:solidFill>
-                        <a:schemeClr val="lt1"/>
-                      </a:solidFill>
-                      <a:prstDash val="solid"/>
-                      <a:round/>
-                      <a:headEnd len="sm" w="sm" type="none"/>
-                      <a:tailEnd len="sm" w="sm" type="none"/>
-                    </a:lnR>
-                    <a:lnT cap="flat" cmpd="sng" w="38100">
-                      <a:solidFill>
-                        <a:schemeClr val="lt1"/>
-                      </a:solidFill>
-                      <a:prstDash val="solid"/>
-                      <a:round/>
-                      <a:headEnd len="sm" w="sm" type="none"/>
-                      <a:tailEnd len="sm" w="sm" type="none"/>
-                    </a:lnT>
-                    <a:lnB cap="flat" cmpd="sng" w="38100">
-                      <a:solidFill>
-                        <a:schemeClr val="lt1"/>
-                      </a:solidFill>
-                      <a:prstDash val="solid"/>
-                      <a:round/>
-                      <a:headEnd len="sm" w="sm" type="none"/>
-                      <a:tailEnd len="sm" w="sm" type="none"/>
-                    </a:lnB>
-                    <a:solidFill>
-                      <a:schemeClr val="dk2"/>
-                    </a:solidFill>
-                  </a:tcPr>
-                </a:tc>
-                <a:tc vMerge="1"/>
-              </a:tr>
-              <a:tr h="457200">
-                <a:tc>
-                  <a:txBody>
-                    <a:bodyPr/>
-                    <a:lstStyle/>
-                    <a:p>
-                      <a:pPr indent="0" lvl="0" marL="0" rtl="0" algn="ctr">
-                        <a:spcBef>
-                          <a:spcPts val="0"/>
-                        </a:spcBef>
-                        <a:spcAft>
-                          <a:spcPts val="0"/>
-                        </a:spcAft>
-                        <a:buNone/>
-                      </a:pPr>
-                      <a:r>
-                        <a:t/>
-                      </a:r>
-                      <a:endParaRPr/>
-                    </a:p>
-                  </a:txBody>
-                  <a:tcPr marT="91425" marB="91425" marR="91425" marL="91425" anchor="ctr">
-                    <a:lnL cap="flat" cmpd="sng" w="38100">
-                      <a:solidFill>
-                        <a:schemeClr val="lt1"/>
-                      </a:solidFill>
-                      <a:prstDash val="solid"/>
-                      <a:round/>
-                      <a:headEnd len="sm" w="sm" type="none"/>
-                      <a:tailEnd len="sm" w="sm" type="none"/>
-                    </a:lnL>
-                    <a:lnR cap="flat" cmpd="sng" w="38100">
-                      <a:solidFill>
-                        <a:schemeClr val="lt1"/>
-                      </a:solidFill>
-                      <a:prstDash val="solid"/>
-                      <a:round/>
-                      <a:headEnd len="sm" w="sm" type="none"/>
-                      <a:tailEnd len="sm" w="sm" type="none"/>
-                    </a:lnR>
-                    <a:lnT cap="flat" cmpd="sng" w="38100">
-                      <a:solidFill>
-                        <a:schemeClr val="lt1"/>
-                      </a:solidFill>
-                      <a:prstDash val="solid"/>
-                      <a:round/>
-                      <a:headEnd len="sm" w="sm" type="none"/>
-                      <a:tailEnd len="sm" w="sm" type="none"/>
-                    </a:lnT>
-                    <a:lnB cap="flat" cmpd="sng" w="38100">
-                      <a:solidFill>
-                        <a:schemeClr val="lt1"/>
-                      </a:solidFill>
-                      <a:prstDash val="solid"/>
-                      <a:round/>
-                      <a:headEnd len="sm" w="sm" type="none"/>
-                      <a:tailEnd len="sm" w="sm" type="none"/>
-                    </a:lnB>
-                    <a:solidFill>
-                      <a:schemeClr val="accent1"/>
-                    </a:solidFill>
-                  </a:tcPr>
-                </a:tc>
-                <a:tc>
-                  <a:txBody>
-                    <a:bodyPr/>
-                    <a:lstStyle/>
-                    <a:p>
-                      <a:pPr indent="0" lvl="0" marL="0" rtl="0" algn="ctr">
-                        <a:spcBef>
-                          <a:spcPts val="0"/>
-                        </a:spcBef>
-                        <a:spcAft>
-                          <a:spcPts val="0"/>
-                        </a:spcAft>
-                        <a:buNone/>
-                      </a:pPr>
-                      <a:r>
-                        <a:t/>
-                      </a:r>
-                      <a:endParaRPr/>
-                    </a:p>
-                  </a:txBody>
-                  <a:tcPr marT="91425" marB="91425" marR="91425" marL="91425" anchor="ctr">
-                    <a:lnL cap="flat" cmpd="sng" w="38100">
-                      <a:solidFill>
-                        <a:schemeClr val="lt1"/>
-                      </a:solidFill>
-                      <a:prstDash val="solid"/>
-                      <a:round/>
-                      <a:headEnd len="sm" w="sm" type="none"/>
-                      <a:tailEnd len="sm" w="sm" type="none"/>
-                    </a:lnL>
-                    <a:lnR cap="flat" cmpd="sng" w="38100">
-                      <a:solidFill>
-                        <a:schemeClr val="lt1"/>
-                      </a:solidFill>
-                      <a:prstDash val="solid"/>
-                      <a:round/>
-                      <a:headEnd len="sm" w="sm" type="none"/>
-                      <a:tailEnd len="sm" w="sm" type="none"/>
-                    </a:lnR>
-                    <a:lnT cap="flat" cmpd="sng" w="38100">
-                      <a:solidFill>
-                        <a:schemeClr val="lt1"/>
-                      </a:solidFill>
-                      <a:prstDash val="solid"/>
-                      <a:round/>
-                      <a:headEnd len="sm" w="sm" type="none"/>
-                      <a:tailEnd len="sm" w="sm" type="none"/>
-                    </a:lnT>
-                    <a:lnB cap="flat" cmpd="sng" w="38100">
-                      <a:solidFill>
-                        <a:schemeClr val="lt1"/>
-                      </a:solidFill>
-                      <a:prstDash val="solid"/>
-                      <a:round/>
-                      <a:headEnd len="sm" w="sm" type="none"/>
-                      <a:tailEnd len="sm" w="sm" type="none"/>
-                    </a:lnB>
-                    <a:solidFill>
-                      <a:schemeClr val="accent1"/>
-                    </a:solidFill>
-                  </a:tcPr>
-                </a:tc>
-                <a:tc>
-                  <a:txBody>
-                    <a:bodyPr/>
-                    <a:lstStyle/>
-                    <a:p>
-                      <a:pPr indent="0" lvl="0" marL="0" rtl="0" algn="ctr">
-                        <a:spcBef>
-                          <a:spcPts val="0"/>
-                        </a:spcBef>
-                        <a:spcAft>
-                          <a:spcPts val="0"/>
-                        </a:spcAft>
-                        <a:buNone/>
-                      </a:pPr>
-                      <a:r>
-                        <a:t/>
-                      </a:r>
-                      <a:endParaRPr/>
-                    </a:p>
-                  </a:txBody>
-                  <a:tcPr marT="91425" marB="91425" marR="91425" marL="91425" anchor="ctr">
-                    <a:lnL cap="flat" cmpd="sng" w="38100">
-                      <a:solidFill>
-                        <a:schemeClr val="lt1"/>
-                      </a:solidFill>
-                      <a:prstDash val="solid"/>
-                      <a:round/>
-                      <a:headEnd len="sm" w="sm" type="none"/>
-                      <a:tailEnd len="sm" w="sm" type="none"/>
-                    </a:lnL>
-                    <a:lnR cap="flat" cmpd="sng" w="38100">
-                      <a:solidFill>
-                        <a:schemeClr val="lt1"/>
-                      </a:solidFill>
-                      <a:prstDash val="solid"/>
-                      <a:round/>
-                      <a:headEnd len="sm" w="sm" type="none"/>
-                      <a:tailEnd len="sm" w="sm" type="none"/>
-                    </a:lnR>
-                    <a:lnT cap="flat" cmpd="sng" w="38100">
-                      <a:solidFill>
-                        <a:schemeClr val="lt1"/>
-                      </a:solidFill>
-                      <a:prstDash val="solid"/>
-                      <a:round/>
-                      <a:headEnd len="sm" w="sm" type="none"/>
-                      <a:tailEnd len="sm" w="sm" type="none"/>
-                    </a:lnT>
-                    <a:lnB cap="flat" cmpd="sng" w="38100">
-                      <a:solidFill>
-                        <a:schemeClr val="lt1"/>
-                      </a:solidFill>
-                      <a:prstDash val="solid"/>
-                      <a:round/>
-                      <a:headEnd len="sm" w="sm" type="none"/>
-                      <a:tailEnd len="sm" w="sm" type="none"/>
-                    </a:lnB>
-                    <a:solidFill>
-                      <a:schemeClr val="accent1"/>
-                    </a:solidFill>
-                  </a:tcPr>
-                </a:tc>
-                <a:tc>
-                  <a:txBody>
-                    <a:bodyPr/>
-                    <a:lstStyle/>
-                    <a:p>
-                      <a:pPr indent="0" lvl="0" marL="0" rtl="0" algn="ctr">
-                        <a:spcBef>
-                          <a:spcPts val="0"/>
-                        </a:spcBef>
-                        <a:spcAft>
-                          <a:spcPts val="0"/>
-                        </a:spcAft>
-                        <a:buNone/>
-                      </a:pPr>
-                      <a:r>
-                        <a:t/>
-                      </a:r>
-                      <a:endParaRPr/>
-                    </a:p>
-                  </a:txBody>
-                  <a:tcPr marT="91425" marB="91425" marR="91425" marL="91425" anchor="ctr">
-                    <a:lnL cap="flat" cmpd="sng" w="38100">
-                      <a:solidFill>
-                        <a:schemeClr val="lt1"/>
-                      </a:solidFill>
-                      <a:prstDash val="solid"/>
-                      <a:round/>
-                      <a:headEnd len="sm" w="sm" type="none"/>
-                      <a:tailEnd len="sm" w="sm" type="none"/>
-                    </a:lnL>
-                    <a:lnR cap="flat" cmpd="sng" w="38100">
-                      <a:solidFill>
-                        <a:schemeClr val="lt1"/>
-                      </a:solidFill>
-                      <a:prstDash val="solid"/>
-                      <a:round/>
-                      <a:headEnd len="sm" w="sm" type="none"/>
-                      <a:tailEnd len="sm" w="sm" type="none"/>
-                    </a:lnR>
-                    <a:lnT cap="flat" cmpd="sng" w="38100">
-                      <a:solidFill>
-                        <a:schemeClr val="lt1"/>
-                      </a:solidFill>
-                      <a:prstDash val="solid"/>
-                      <a:round/>
-                      <a:headEnd len="sm" w="sm" type="none"/>
-                      <a:tailEnd len="sm" w="sm" type="none"/>
-                    </a:lnT>
-                    <a:lnB cap="flat" cmpd="sng" w="38100">
-                      <a:solidFill>
-                        <a:schemeClr val="lt1"/>
-                      </a:solidFill>
-                      <a:prstDash val="solid"/>
-                      <a:round/>
-                      <a:headEnd len="sm" w="sm" type="none"/>
-                      <a:tailEnd len="sm" w="sm" type="none"/>
-                    </a:lnB>
-                    <a:solidFill>
-                      <a:schemeClr val="accent1"/>
-                    </a:solidFill>
-                  </a:tcPr>
-                </a:tc>
-                <a:tc>
-                  <a:txBody>
-                    <a:bodyPr/>
-                    <a:lstStyle/>
-                    <a:p>
-                      <a:pPr indent="0" lvl="0" marL="0" rtl="0" algn="ctr">
-                        <a:spcBef>
-                          <a:spcPts val="0"/>
-                        </a:spcBef>
-                        <a:spcAft>
-                          <a:spcPts val="0"/>
-                        </a:spcAft>
-                        <a:buNone/>
-                      </a:pPr>
-                      <a:r>
-                        <a:t/>
-                      </a:r>
-                      <a:endParaRPr b="1">
-                        <a:solidFill>
-                          <a:schemeClr val="lt1"/>
-                        </a:solidFill>
-                      </a:endParaRPr>
-                    </a:p>
-                  </a:txBody>
-                  <a:tcPr marT="91425" marB="91425" marR="91425" marL="91425" anchor="ctr">
-                    <a:lnL cap="flat" cmpd="sng" w="38100">
-                      <a:solidFill>
-                        <a:schemeClr val="lt1"/>
-                      </a:solidFill>
-                      <a:prstDash val="solid"/>
-                      <a:round/>
-                      <a:headEnd len="sm" w="sm" type="none"/>
-                      <a:tailEnd len="sm" w="sm" type="none"/>
-                    </a:lnL>
-                    <a:lnR cap="flat" cmpd="sng" w="38100">
-                      <a:solidFill>
-                        <a:schemeClr val="lt1"/>
-                      </a:solidFill>
-                      <a:prstDash val="solid"/>
-                      <a:round/>
-                      <a:headEnd len="sm" w="sm" type="none"/>
-                      <a:tailEnd len="sm" w="sm" type="none"/>
-                    </a:lnR>
-                    <a:lnT cap="flat" cmpd="sng" w="38100">
-                      <a:solidFill>
-                        <a:schemeClr val="lt1"/>
-                      </a:solidFill>
-                      <a:prstDash val="solid"/>
-                      <a:round/>
-                      <a:headEnd len="sm" w="sm" type="none"/>
-                      <a:tailEnd len="sm" w="sm" type="none"/>
-                    </a:lnT>
-                    <a:lnB cap="flat" cmpd="sng" w="38100">
-                      <a:solidFill>
-                        <a:schemeClr val="lt1"/>
-                      </a:solidFill>
-                      <a:prstDash val="solid"/>
-                      <a:round/>
-                      <a:headEnd len="sm" w="sm" type="none"/>
-                      <a:tailEnd len="sm" w="sm" type="none"/>
-                    </a:lnB>
-                    <a:solidFill>
-                      <a:schemeClr val="accent1"/>
-                    </a:solidFill>
-                  </a:tcPr>
-                </a:tc>
-                <a:tc>
-                  <a:txBody>
-                    <a:bodyPr/>
-                    <a:lstStyle/>
-                    <a:p>
-                      <a:pPr indent="0" lvl="0" marL="0" rtl="0" algn="ctr">
-                        <a:spcBef>
-                          <a:spcPts val="0"/>
-                        </a:spcBef>
-                        <a:spcAft>
-                          <a:spcPts val="0"/>
-                        </a:spcAft>
-                        <a:buNone/>
-                      </a:pPr>
-                      <a:r>
-                        <a:rPr b="1" lang="en">
-                          <a:solidFill>
-                            <a:schemeClr val="lt1"/>
-                          </a:solidFill>
-                        </a:rPr>
-                        <a:t>BATH</a:t>
-                      </a:r>
-                      <a:endParaRPr b="1">
-                        <a:solidFill>
-                          <a:schemeClr val="lt1"/>
-                        </a:solidFill>
-                      </a:endParaRPr>
-                    </a:p>
-                  </a:txBody>
-                  <a:tcPr marT="91425" marB="91425" marR="91425" marL="91425" anchor="ctr">
-                    <a:lnL cap="flat" cmpd="sng" w="38100">
-                      <a:solidFill>
-                        <a:schemeClr val="lt1"/>
-                      </a:solidFill>
-                      <a:prstDash val="solid"/>
-                      <a:round/>
-                      <a:headEnd len="sm" w="sm" type="none"/>
-                      <a:tailEnd len="sm" w="sm" type="none"/>
-                    </a:lnL>
-                    <a:lnR cap="flat" cmpd="sng" w="38100">
-                      <a:solidFill>
-                        <a:schemeClr val="lt1"/>
-                      </a:solidFill>
-                      <a:prstDash val="solid"/>
-                      <a:round/>
-                      <a:headEnd len="sm" w="sm" type="none"/>
-                      <a:tailEnd len="sm" w="sm" type="none"/>
-                    </a:lnR>
-                    <a:lnT cap="flat" cmpd="sng" w="38100">
-                      <a:solidFill>
-                        <a:schemeClr val="lt1"/>
-                      </a:solidFill>
-                      <a:prstDash val="solid"/>
-                      <a:round/>
-                      <a:headEnd len="sm" w="sm" type="none"/>
-                      <a:tailEnd len="sm" w="sm" type="none"/>
-                    </a:lnT>
-                    <a:lnB cap="flat" cmpd="sng" w="38100">
-                      <a:solidFill>
-                        <a:schemeClr val="lt1"/>
-                      </a:solidFill>
-                      <a:prstDash val="solid"/>
-                      <a:round/>
-                      <a:headEnd len="sm" w="sm" type="none"/>
-                      <a:tailEnd len="sm" w="sm" type="none"/>
-                    </a:lnB>
-                    <a:solidFill>
-                      <a:schemeClr val="dk2"/>
-                    </a:solidFill>
-                  </a:tcPr>
-                </a:tc>
-                <a:tc>
-                  <a:txBody>
-                    <a:bodyPr/>
-                    <a:lstStyle/>
-                    <a:p>
-                      <a:pPr indent="0" lvl="0" marL="0" rtl="0" algn="ctr">
-                        <a:spcBef>
-                          <a:spcPts val="0"/>
-                        </a:spcBef>
-                        <a:spcAft>
-                          <a:spcPts val="0"/>
-                        </a:spcAft>
-                        <a:buNone/>
-                      </a:pPr>
-                      <a:r>
-                        <a:t/>
-                      </a:r>
-                      <a:endParaRPr b="1">
-                        <a:solidFill>
-                          <a:schemeClr val="lt1"/>
-                        </a:solidFill>
-                      </a:endParaRPr>
-                    </a:p>
-                  </a:txBody>
-                  <a:tcPr marT="91425" marB="91425" marR="91425" marL="91425" anchor="ctr">
-                    <a:lnL cap="flat" cmpd="sng" w="38100">
-                      <a:solidFill>
-                        <a:schemeClr val="lt1"/>
-                      </a:solidFill>
-                      <a:prstDash val="solid"/>
-                      <a:round/>
-                      <a:headEnd len="sm" w="sm" type="none"/>
-                      <a:tailEnd len="sm" w="sm" type="none"/>
-                    </a:lnL>
-                    <a:lnR cap="flat" cmpd="sng" w="38100">
-                      <a:solidFill>
-                        <a:schemeClr val="lt1"/>
-                      </a:solidFill>
-                      <a:prstDash val="solid"/>
-                      <a:round/>
-                      <a:headEnd len="sm" w="sm" type="none"/>
-                      <a:tailEnd len="sm" w="sm" type="none"/>
-                    </a:lnR>
-                    <a:lnT cap="flat" cmpd="sng" w="38100">
-                      <a:solidFill>
-                        <a:schemeClr val="lt1"/>
-                      </a:solidFill>
-                      <a:prstDash val="solid"/>
-                      <a:round/>
-                      <a:headEnd len="sm" w="sm" type="none"/>
-                      <a:tailEnd len="sm" w="sm" type="none"/>
-                    </a:lnT>
-                    <a:lnB cap="flat" cmpd="sng" w="38100">
-                      <a:solidFill>
-                        <a:schemeClr val="lt1"/>
-                      </a:solidFill>
-                      <a:prstDash val="solid"/>
-                      <a:round/>
-                      <a:headEnd len="sm" w="sm" type="none"/>
-                      <a:tailEnd len="sm" w="sm" type="none"/>
-                    </a:lnB>
-                    <a:solidFill>
-                      <a:schemeClr val="accent1"/>
-                    </a:solidFill>
-                  </a:tcPr>
-                </a:tc>
-                <a:tc>
-                  <a:txBody>
-                    <a:bodyPr/>
-                    <a:lstStyle/>
-                    <a:p>
-                      <a:pPr indent="0" lvl="0" marL="0" rtl="0" algn="ctr">
-                        <a:spcBef>
-                          <a:spcPts val="0"/>
-                        </a:spcBef>
-                        <a:spcAft>
-                          <a:spcPts val="0"/>
-                        </a:spcAft>
-                        <a:buNone/>
-                      </a:pPr>
-                      <a:r>
-                        <a:t/>
-                      </a:r>
-                      <a:endParaRPr b="1">
-                        <a:solidFill>
-                          <a:schemeClr val="lt1"/>
-                        </a:solidFill>
-                      </a:endParaRPr>
-                    </a:p>
-                  </a:txBody>
-                  <a:tcPr marT="91425" marB="91425" marR="91425" marL="91425" anchor="ctr">
-                    <a:lnL cap="flat" cmpd="sng" w="38100">
-                      <a:solidFill>
-                        <a:schemeClr val="lt1"/>
-                      </a:solidFill>
-                      <a:prstDash val="solid"/>
-                      <a:round/>
-                      <a:headEnd len="sm" w="sm" type="none"/>
-                      <a:tailEnd len="sm" w="sm" type="none"/>
-                    </a:lnL>
-                    <a:lnR cap="flat" cmpd="sng" w="38100">
-                      <a:solidFill>
-                        <a:schemeClr val="lt1"/>
-                      </a:solidFill>
-                      <a:prstDash val="solid"/>
-                      <a:round/>
-                      <a:headEnd len="sm" w="sm" type="none"/>
-                      <a:tailEnd len="sm" w="sm" type="none"/>
-                    </a:lnR>
-                    <a:lnT cap="flat" cmpd="sng" w="38100">
-                      <a:solidFill>
-                        <a:schemeClr val="lt1"/>
-                      </a:solidFill>
-                      <a:prstDash val="solid"/>
-                      <a:round/>
-                      <a:headEnd len="sm" w="sm" type="none"/>
-                      <a:tailEnd len="sm" w="sm" type="none"/>
-                    </a:lnT>
-                    <a:lnB cap="flat" cmpd="sng" w="38100">
-                      <a:solidFill>
-                        <a:schemeClr val="lt1"/>
-                      </a:solidFill>
-                      <a:prstDash val="solid"/>
-                      <a:round/>
-                      <a:headEnd len="sm" w="sm" type="none"/>
-                      <a:tailEnd len="sm" w="sm" type="none"/>
-                    </a:lnB>
-                    <a:solidFill>
-                      <a:schemeClr val="accent1"/>
-                    </a:solidFill>
-                  </a:tcPr>
-                </a:tc>
-                <a:tc>
-                  <a:txBody>
-                    <a:bodyPr/>
-                    <a:lstStyle/>
-                    <a:p>
-                      <a:pPr indent="0" lvl="0" marL="0" rtl="0" algn="ctr">
-                        <a:spcBef>
-                          <a:spcPts val="0"/>
-                        </a:spcBef>
-                        <a:spcAft>
-                          <a:spcPts val="0"/>
-                        </a:spcAft>
-                        <a:buNone/>
-                      </a:pPr>
-                      <a:r>
-                        <a:t/>
-                      </a:r>
-                      <a:endParaRPr b="1">
-                        <a:solidFill>
-                          <a:schemeClr val="lt1"/>
-                        </a:solidFill>
-                      </a:endParaRPr>
-                    </a:p>
-                  </a:txBody>
-                  <a:tcPr marT="91425" marB="91425" marR="91425" marL="91425" anchor="ctr">
-                    <a:lnL cap="flat" cmpd="sng" w="38100">
-                      <a:solidFill>
-                        <a:schemeClr val="lt1"/>
-                      </a:solidFill>
-                      <a:prstDash val="solid"/>
-                      <a:round/>
-                      <a:headEnd len="sm" w="sm" type="none"/>
-                      <a:tailEnd len="sm" w="sm" type="none"/>
-                    </a:lnL>
-                    <a:lnR cap="flat" cmpd="sng" w="38100">
-                      <a:solidFill>
-                        <a:schemeClr val="lt1"/>
-                      </a:solidFill>
-                      <a:prstDash val="solid"/>
-                      <a:round/>
-                      <a:headEnd len="sm" w="sm" type="none"/>
-                      <a:tailEnd len="sm" w="sm" type="none"/>
-                    </a:lnR>
-                    <a:lnT cap="flat" cmpd="sng" w="38100">
-                      <a:solidFill>
-                        <a:schemeClr val="lt1"/>
-                      </a:solidFill>
-                      <a:prstDash val="solid"/>
-                      <a:round/>
-                      <a:headEnd len="sm" w="sm" type="none"/>
-                      <a:tailEnd len="sm" w="sm" type="none"/>
-                    </a:lnT>
-                    <a:lnB cap="flat" cmpd="sng" w="38100">
-                      <a:solidFill>
-                        <a:schemeClr val="lt1"/>
-                      </a:solidFill>
-                      <a:prstDash val="solid"/>
-                      <a:round/>
-                      <a:headEnd len="sm" w="sm" type="none"/>
-                      <a:tailEnd len="sm" w="sm" type="none"/>
-                    </a:lnB>
-                    <a:solidFill>
-                      <a:schemeClr val="accent1"/>
-                    </a:solidFill>
-                  </a:tcPr>
-                </a:tc>
-                <a:tc vMerge="1"/>
-              </a:tr>
-              <a:tr h="457200">
-                <a:tc>
-                  <a:txBody>
-                    <a:bodyPr/>
-                    <a:lstStyle/>
-                    <a:p>
-                      <a:pPr indent="0" lvl="0" marL="0" rtl="0" algn="ctr">
-                        <a:spcBef>
-                          <a:spcPts val="0"/>
-                        </a:spcBef>
-                        <a:spcAft>
-                          <a:spcPts val="0"/>
-                        </a:spcAft>
-                        <a:buNone/>
-                      </a:pPr>
-                      <a:r>
-                        <a:t/>
-                      </a:r>
-                      <a:endParaRPr/>
-                    </a:p>
-                  </a:txBody>
-                  <a:tcPr marT="91425" marB="91425" marR="91425" marL="91425" anchor="ctr">
-                    <a:lnL cap="flat" cmpd="sng" w="38100">
-                      <a:solidFill>
-                        <a:schemeClr val="lt1"/>
-                      </a:solidFill>
-                      <a:prstDash val="solid"/>
-                      <a:round/>
-                      <a:headEnd len="sm" w="sm" type="none"/>
-                      <a:tailEnd len="sm" w="sm" type="none"/>
-                    </a:lnL>
-                    <a:lnR cap="flat" cmpd="sng" w="38100">
-                      <a:solidFill>
-                        <a:schemeClr val="lt1"/>
-                      </a:solidFill>
-                      <a:prstDash val="solid"/>
-                      <a:round/>
-                      <a:headEnd len="sm" w="sm" type="none"/>
-                      <a:tailEnd len="sm" w="sm" type="none"/>
-                    </a:lnR>
-                    <a:lnT cap="flat" cmpd="sng" w="38100">
-                      <a:solidFill>
-                        <a:schemeClr val="lt1"/>
-                      </a:solidFill>
-                      <a:prstDash val="solid"/>
-                      <a:round/>
-                      <a:headEnd len="sm" w="sm" type="none"/>
-                      <a:tailEnd len="sm" w="sm" type="none"/>
-                    </a:lnT>
-                    <a:lnB cap="flat" cmpd="sng" w="38100">
-                      <a:solidFill>
-                        <a:schemeClr val="lt1"/>
-                      </a:solidFill>
-                      <a:prstDash val="solid"/>
-                      <a:round/>
-                      <a:headEnd len="sm" w="sm" type="none"/>
-                      <a:tailEnd len="sm" w="sm" type="none"/>
-                    </a:lnB>
-                    <a:solidFill>
-                      <a:schemeClr val="lt1"/>
-                    </a:solidFill>
-                  </a:tcPr>
-                </a:tc>
-                <a:tc>
-                  <a:txBody>
-                    <a:bodyPr/>
-                    <a:lstStyle/>
-                    <a:p>
-                      <a:pPr indent="0" lvl="0" marL="0" rtl="0" algn="ctr">
-                        <a:spcBef>
-                          <a:spcPts val="0"/>
-                        </a:spcBef>
-                        <a:spcAft>
-                          <a:spcPts val="0"/>
-                        </a:spcAft>
-                        <a:buNone/>
-                      </a:pPr>
-                      <a:r>
-                        <a:t/>
-                      </a:r>
-                      <a:endParaRPr/>
-                    </a:p>
-                  </a:txBody>
-                  <a:tcPr marT="91425" marB="91425" marR="91425" marL="91425" anchor="ctr">
-                    <a:lnL cap="flat" cmpd="sng" w="38100">
-                      <a:solidFill>
-                        <a:schemeClr val="lt1"/>
-                      </a:solidFill>
-                      <a:prstDash val="solid"/>
-                      <a:round/>
-                      <a:headEnd len="sm" w="sm" type="none"/>
-                      <a:tailEnd len="sm" w="sm" type="none"/>
-                    </a:lnL>
-                    <a:lnR cap="flat" cmpd="sng" w="38100">
-                      <a:solidFill>
-                        <a:schemeClr val="lt1"/>
-                      </a:solidFill>
-                      <a:prstDash val="solid"/>
-                      <a:round/>
-                      <a:headEnd len="sm" w="sm" type="none"/>
-                      <a:tailEnd len="sm" w="sm" type="none"/>
-                    </a:lnR>
-                    <a:lnT cap="flat" cmpd="sng" w="38100">
-                      <a:solidFill>
-                        <a:schemeClr val="lt1"/>
-                      </a:solidFill>
-                      <a:prstDash val="solid"/>
-                      <a:round/>
-                      <a:headEnd len="sm" w="sm" type="none"/>
-                      <a:tailEnd len="sm" w="sm" type="none"/>
-                    </a:lnT>
-                    <a:lnB cap="flat" cmpd="sng" w="38100">
-                      <a:solidFill>
-                        <a:schemeClr val="lt1"/>
-                      </a:solidFill>
-                      <a:prstDash val="solid"/>
-                      <a:round/>
-                      <a:headEnd len="sm" w="sm" type="none"/>
-                      <a:tailEnd len="sm" w="sm" type="none"/>
-                    </a:lnB>
-                    <a:solidFill>
-                      <a:schemeClr val="lt1"/>
-                    </a:solidFill>
-                  </a:tcPr>
-                </a:tc>
-                <a:tc>
-                  <a:txBody>
-                    <a:bodyPr/>
-                    <a:lstStyle/>
-                    <a:p>
-                      <a:pPr indent="0" lvl="0" marL="0" rtl="0" algn="ctr">
-                        <a:spcBef>
-                          <a:spcPts val="0"/>
-                        </a:spcBef>
-                        <a:spcAft>
-                          <a:spcPts val="0"/>
-                        </a:spcAft>
-                        <a:buNone/>
-                      </a:pPr>
-                      <a:r>
-                        <a:t/>
-                      </a:r>
-                      <a:endParaRPr/>
-                    </a:p>
-                  </a:txBody>
-                  <a:tcPr marT="91425" marB="91425" marR="91425" marL="91425" anchor="ctr">
-                    <a:lnL cap="flat" cmpd="sng" w="38100">
-                      <a:solidFill>
-                        <a:schemeClr val="lt1"/>
-                      </a:solidFill>
-                      <a:prstDash val="solid"/>
-                      <a:round/>
-                      <a:headEnd len="sm" w="sm" type="none"/>
-                      <a:tailEnd len="sm" w="sm" type="none"/>
-                    </a:lnL>
-                    <a:lnR cap="flat" cmpd="sng" w="38100">
-                      <a:solidFill>
-                        <a:schemeClr val="lt1"/>
-                      </a:solidFill>
-                      <a:prstDash val="solid"/>
-                      <a:round/>
-                      <a:headEnd len="sm" w="sm" type="none"/>
-                      <a:tailEnd len="sm" w="sm" type="none"/>
-                    </a:lnR>
-                    <a:lnT cap="flat" cmpd="sng" w="38100">
-                      <a:solidFill>
-                        <a:schemeClr val="lt1"/>
-                      </a:solidFill>
-                      <a:prstDash val="solid"/>
-                      <a:round/>
-                      <a:headEnd len="sm" w="sm" type="none"/>
-                      <a:tailEnd len="sm" w="sm" type="none"/>
-                    </a:lnT>
-                    <a:lnB cap="flat" cmpd="sng" w="38100">
-                      <a:solidFill>
-                        <a:schemeClr val="lt1"/>
-                      </a:solidFill>
-                      <a:prstDash val="solid"/>
-                      <a:round/>
-                      <a:headEnd len="sm" w="sm" type="none"/>
-                      <a:tailEnd len="sm" w="sm" type="none"/>
-                    </a:lnB>
-                    <a:solidFill>
-                      <a:schemeClr val="lt1"/>
-                    </a:solidFill>
-                  </a:tcPr>
-                </a:tc>
-                <a:tc>
-                  <a:txBody>
-                    <a:bodyPr/>
-                    <a:lstStyle/>
-                    <a:p>
-                      <a:pPr indent="0" lvl="0" marL="0" rtl="0" algn="ctr">
-                        <a:spcBef>
-                          <a:spcPts val="0"/>
-                        </a:spcBef>
-                        <a:spcAft>
-                          <a:spcPts val="0"/>
-                        </a:spcAft>
-                        <a:buNone/>
-                      </a:pPr>
-                      <a:r>
-                        <a:t/>
-                      </a:r>
-                      <a:endParaRPr/>
-                    </a:p>
-                  </a:txBody>
-                  <a:tcPr marT="91425" marB="91425" marR="91425" marL="91425" anchor="ctr">
-                    <a:lnL cap="flat" cmpd="sng" w="38100">
-                      <a:solidFill>
-                        <a:schemeClr val="lt1"/>
-                      </a:solidFill>
-                      <a:prstDash val="solid"/>
-                      <a:round/>
-                      <a:headEnd len="sm" w="sm" type="none"/>
-                      <a:tailEnd len="sm" w="sm" type="none"/>
-                    </a:lnL>
-                    <a:lnR cap="flat" cmpd="sng" w="38100">
-                      <a:solidFill>
-                        <a:schemeClr val="lt1"/>
-                      </a:solidFill>
-                      <a:prstDash val="solid"/>
-                      <a:round/>
-                      <a:headEnd len="sm" w="sm" type="none"/>
-                      <a:tailEnd len="sm" w="sm" type="none"/>
-                    </a:lnR>
-                    <a:lnT cap="flat" cmpd="sng" w="38100">
-                      <a:solidFill>
-                        <a:schemeClr val="lt1"/>
-                      </a:solidFill>
-                      <a:prstDash val="solid"/>
-                      <a:round/>
-                      <a:headEnd len="sm" w="sm" type="none"/>
-                      <a:tailEnd len="sm" w="sm" type="none"/>
-                    </a:lnT>
-                    <a:lnB cap="flat" cmpd="sng" w="38100">
-                      <a:solidFill>
-                        <a:schemeClr val="lt1"/>
-                      </a:solidFill>
-                      <a:prstDash val="solid"/>
-                      <a:round/>
-                      <a:headEnd len="sm" w="sm" type="none"/>
-                      <a:tailEnd len="sm" w="sm" type="none"/>
-                    </a:lnB>
-                    <a:solidFill>
-                      <a:schemeClr val="lt1"/>
-                    </a:solidFill>
-                  </a:tcPr>
-                </a:tc>
-                <a:tc>
-                  <a:txBody>
-                    <a:bodyPr/>
-                    <a:lstStyle/>
-                    <a:p>
-                      <a:pPr indent="0" lvl="0" marL="0" rtl="0" algn="ctr">
-                        <a:spcBef>
-                          <a:spcPts val="0"/>
-                        </a:spcBef>
-                        <a:spcAft>
-                          <a:spcPts val="0"/>
-                        </a:spcAft>
-                        <a:buNone/>
-                      </a:pPr>
-                      <a:r>
-                        <a:t/>
-                      </a:r>
-                      <a:endParaRPr b="1">
-                        <a:solidFill>
-                          <a:schemeClr val="lt1"/>
-                        </a:solidFill>
-                      </a:endParaRPr>
-                    </a:p>
-                  </a:txBody>
-                  <a:tcPr marT="91425" marB="91425" marR="91425" marL="91425" anchor="ctr">
-                    <a:lnL cap="flat" cmpd="sng" w="38100">
-                      <a:solidFill>
-                        <a:schemeClr val="lt1"/>
-                      </a:solidFill>
-                      <a:prstDash val="solid"/>
-                      <a:round/>
-                      <a:headEnd len="sm" w="sm" type="none"/>
-                      <a:tailEnd len="sm" w="sm" type="none"/>
-                    </a:lnL>
-                    <a:lnR cap="flat" cmpd="sng" w="38100">
-                      <a:solidFill>
-                        <a:schemeClr val="lt1"/>
-                      </a:solidFill>
-                      <a:prstDash val="solid"/>
-                      <a:round/>
-                      <a:headEnd len="sm" w="sm" type="none"/>
-                      <a:tailEnd len="sm" w="sm" type="none"/>
-                    </a:lnR>
-                    <a:lnT cap="flat" cmpd="sng" w="38100">
-                      <a:solidFill>
-                        <a:schemeClr val="lt1"/>
-                      </a:solidFill>
-                      <a:prstDash val="solid"/>
-                      <a:round/>
-                      <a:headEnd len="sm" w="sm" type="none"/>
-                      <a:tailEnd len="sm" w="sm" type="none"/>
-                    </a:lnT>
-                    <a:lnB cap="flat" cmpd="sng" w="38100">
-                      <a:solidFill>
-                        <a:schemeClr val="lt1"/>
-                      </a:solidFill>
-                      <a:prstDash val="solid"/>
-                      <a:round/>
-                      <a:headEnd len="sm" w="sm" type="none"/>
-                      <a:tailEnd len="sm" w="sm" type="none"/>
-                    </a:lnB>
-                    <a:solidFill>
-                      <a:schemeClr val="lt1"/>
-                    </a:solidFill>
-                  </a:tcPr>
-                </a:tc>
-                <a:tc>
-                  <a:txBody>
-                    <a:bodyPr/>
-                    <a:lstStyle/>
-                    <a:p>
-                      <a:pPr indent="0" lvl="0" marL="0" rtl="0" algn="ctr">
-                        <a:spcBef>
-                          <a:spcPts val="0"/>
-                        </a:spcBef>
-                        <a:spcAft>
-                          <a:spcPts val="0"/>
-                        </a:spcAft>
-                        <a:buNone/>
-                      </a:pPr>
-                      <a:r>
-                        <a:rPr b="1" lang="en">
-                          <a:solidFill>
-                            <a:schemeClr val="lt1"/>
-                          </a:solidFill>
-                        </a:rPr>
-                        <a:t>KOLL</a:t>
-                      </a:r>
-                      <a:endParaRPr b="1">
-                        <a:solidFill>
-                          <a:schemeClr val="lt1"/>
-                        </a:solidFill>
-                      </a:endParaRPr>
-                    </a:p>
-                  </a:txBody>
-                  <a:tcPr marT="91425" marB="91425" marR="91425" marL="91425" anchor="ctr">
-                    <a:lnL cap="flat" cmpd="sng" w="38100">
-                      <a:solidFill>
-                        <a:schemeClr val="lt1"/>
-                      </a:solidFill>
-                      <a:prstDash val="solid"/>
-                      <a:round/>
-                      <a:headEnd len="sm" w="sm" type="none"/>
-                      <a:tailEnd len="sm" w="sm" type="none"/>
-                    </a:lnL>
-                    <a:lnR cap="flat" cmpd="sng" w="38100">
-                      <a:solidFill>
-                        <a:schemeClr val="lt1"/>
-                      </a:solidFill>
-                      <a:prstDash val="solid"/>
-                      <a:round/>
-                      <a:headEnd len="sm" w="sm" type="none"/>
-                      <a:tailEnd len="sm" w="sm" type="none"/>
-                    </a:lnR>
-                    <a:lnT cap="flat" cmpd="sng" w="38100">
-                      <a:solidFill>
-                        <a:schemeClr val="lt1"/>
-                      </a:solidFill>
-                      <a:prstDash val="solid"/>
-                      <a:round/>
-                      <a:headEnd len="sm" w="sm" type="none"/>
-                      <a:tailEnd len="sm" w="sm" type="none"/>
-                    </a:lnT>
-                    <a:lnB cap="flat" cmpd="sng" w="38100">
-                      <a:solidFill>
-                        <a:schemeClr val="lt1"/>
-                      </a:solidFill>
-                      <a:prstDash val="solid"/>
-                      <a:round/>
-                      <a:headEnd len="sm" w="sm" type="none"/>
-                      <a:tailEnd len="sm" w="sm" type="none"/>
-                    </a:lnB>
-                    <a:solidFill>
-                      <a:schemeClr val="dk2"/>
-                    </a:solidFill>
-                  </a:tcPr>
-                </a:tc>
-                <a:tc>
-                  <a:txBody>
-                    <a:bodyPr/>
-                    <a:lstStyle/>
-                    <a:p>
-                      <a:pPr indent="0" lvl="0" marL="0" rtl="0" algn="ctr">
-                        <a:spcBef>
-                          <a:spcPts val="0"/>
-                        </a:spcBef>
-                        <a:spcAft>
-                          <a:spcPts val="0"/>
-                        </a:spcAft>
-                        <a:buNone/>
-                      </a:pPr>
-                      <a:r>
-                        <a:t/>
-                      </a:r>
-                      <a:endParaRPr b="1">
-                        <a:solidFill>
-                          <a:schemeClr val="lt1"/>
-                        </a:solidFill>
-                      </a:endParaRPr>
-                    </a:p>
-                  </a:txBody>
-                  <a:tcPr marT="91425" marB="91425" marR="91425" marL="91425" anchor="ctr">
-                    <a:lnL cap="flat" cmpd="sng" w="38100">
-                      <a:solidFill>
-                        <a:schemeClr val="lt1"/>
-                      </a:solidFill>
-                      <a:prstDash val="solid"/>
-                      <a:round/>
-                      <a:headEnd len="sm" w="sm" type="none"/>
-                      <a:tailEnd len="sm" w="sm" type="none"/>
-                    </a:lnL>
-                    <a:lnR cap="flat" cmpd="sng" w="38100">
-                      <a:solidFill>
-                        <a:schemeClr val="lt1"/>
-                      </a:solidFill>
-                      <a:prstDash val="solid"/>
-                      <a:round/>
-                      <a:headEnd len="sm" w="sm" type="none"/>
-                      <a:tailEnd len="sm" w="sm" type="none"/>
-                    </a:lnR>
-                    <a:lnT cap="flat" cmpd="sng" w="38100">
-                      <a:solidFill>
-                        <a:schemeClr val="lt1"/>
-                      </a:solidFill>
-                      <a:prstDash val="solid"/>
-                      <a:round/>
-                      <a:headEnd len="sm" w="sm" type="none"/>
-                      <a:tailEnd len="sm" w="sm" type="none"/>
-                    </a:lnT>
-                    <a:lnB cap="flat" cmpd="sng" w="38100">
-                      <a:solidFill>
-                        <a:schemeClr val="lt1"/>
-                      </a:solidFill>
-                      <a:prstDash val="solid"/>
-                      <a:round/>
-                      <a:headEnd len="sm" w="sm" type="none"/>
-                      <a:tailEnd len="sm" w="sm" type="none"/>
-                    </a:lnB>
-                    <a:solidFill>
-                      <a:schemeClr val="lt1"/>
-                    </a:solidFill>
-                  </a:tcPr>
-                </a:tc>
-                <a:tc>
-                  <a:txBody>
-                    <a:bodyPr/>
-                    <a:lstStyle/>
-                    <a:p>
-                      <a:pPr indent="0" lvl="0" marL="0" rtl="0" algn="ctr">
-                        <a:spcBef>
-                          <a:spcPts val="0"/>
-                        </a:spcBef>
-                        <a:spcAft>
-                          <a:spcPts val="0"/>
-                        </a:spcAft>
-                        <a:buNone/>
-                      </a:pPr>
-                      <a:r>
-                        <a:t/>
-                      </a:r>
-                      <a:endParaRPr b="1">
-                        <a:solidFill>
-                          <a:schemeClr val="lt1"/>
-                        </a:solidFill>
-                      </a:endParaRPr>
-                    </a:p>
-                  </a:txBody>
-                  <a:tcPr marT="91425" marB="91425" marR="91425" marL="91425" anchor="ctr">
-                    <a:lnL cap="flat" cmpd="sng" w="38100">
-                      <a:solidFill>
-                        <a:schemeClr val="lt1"/>
-                      </a:solidFill>
-                      <a:prstDash val="solid"/>
-                      <a:round/>
-                      <a:headEnd len="sm" w="sm" type="none"/>
-                      <a:tailEnd len="sm" w="sm" type="none"/>
-                    </a:lnL>
-                    <a:lnR cap="flat" cmpd="sng" w="38100">
-                      <a:solidFill>
-                        <a:schemeClr val="lt1"/>
-                      </a:solidFill>
-                      <a:prstDash val="solid"/>
-                      <a:round/>
-                      <a:headEnd len="sm" w="sm" type="none"/>
-                      <a:tailEnd len="sm" w="sm" type="none"/>
-                    </a:lnR>
-                    <a:lnT cap="flat" cmpd="sng" w="38100">
-                      <a:solidFill>
-                        <a:schemeClr val="lt1"/>
-                      </a:solidFill>
-                      <a:prstDash val="solid"/>
-                      <a:round/>
-                      <a:headEnd len="sm" w="sm" type="none"/>
-                      <a:tailEnd len="sm" w="sm" type="none"/>
-                    </a:lnT>
-                    <a:lnB cap="flat" cmpd="sng" w="38100">
-                      <a:solidFill>
-                        <a:schemeClr val="lt1"/>
-                      </a:solidFill>
-                      <a:prstDash val="solid"/>
-                      <a:round/>
-                      <a:headEnd len="sm" w="sm" type="none"/>
-                      <a:tailEnd len="sm" w="sm" type="none"/>
-                    </a:lnB>
-                    <a:solidFill>
-                      <a:schemeClr val="lt1"/>
-                    </a:solidFill>
-                  </a:tcPr>
-                </a:tc>
-                <a:tc>
-                  <a:txBody>
-                    <a:bodyPr/>
-                    <a:lstStyle/>
-                    <a:p>
-                      <a:pPr indent="0" lvl="0" marL="0" rtl="0" algn="ctr">
-                        <a:spcBef>
-                          <a:spcPts val="0"/>
-                        </a:spcBef>
-                        <a:spcAft>
-                          <a:spcPts val="0"/>
-                        </a:spcAft>
-                        <a:buNone/>
-                      </a:pPr>
-                      <a:r>
-                        <a:t/>
-                      </a:r>
-                      <a:endParaRPr b="1">
-                        <a:solidFill>
-                          <a:schemeClr val="lt1"/>
-                        </a:solidFill>
-                      </a:endParaRPr>
-                    </a:p>
-                  </a:txBody>
-                  <a:tcPr marT="91425" marB="91425" marR="91425" marL="91425" anchor="ctr">
-                    <a:lnL cap="flat" cmpd="sng" w="38100">
-                      <a:solidFill>
-                        <a:schemeClr val="lt1"/>
-                      </a:solidFill>
-                      <a:prstDash val="solid"/>
-                      <a:round/>
-                      <a:headEnd len="sm" w="sm" type="none"/>
-                      <a:tailEnd len="sm" w="sm" type="none"/>
-                    </a:lnL>
-                    <a:lnR cap="flat" cmpd="sng" w="38100">
-                      <a:solidFill>
-                        <a:schemeClr val="lt1"/>
-                      </a:solidFill>
-                      <a:prstDash val="solid"/>
-                      <a:round/>
-                      <a:headEnd len="sm" w="sm" type="none"/>
-                      <a:tailEnd len="sm" w="sm" type="none"/>
-                    </a:lnR>
-                    <a:lnT cap="flat" cmpd="sng" w="38100">
-                      <a:solidFill>
-                        <a:schemeClr val="lt1"/>
-                      </a:solidFill>
-                      <a:prstDash val="solid"/>
-                      <a:round/>
-                      <a:headEnd len="sm" w="sm" type="none"/>
-                      <a:tailEnd len="sm" w="sm" type="none"/>
-                    </a:lnT>
-                    <a:lnB cap="flat" cmpd="sng" w="38100">
-                      <a:solidFill>
-                        <a:schemeClr val="lt1"/>
-                      </a:solidFill>
-                      <a:prstDash val="solid"/>
-                      <a:round/>
-                      <a:headEnd len="sm" w="sm" type="none"/>
-                      <a:tailEnd len="sm" w="sm" type="none"/>
-                    </a:lnB>
-                    <a:solidFill>
-                      <a:schemeClr val="lt1"/>
-                    </a:solidFill>
-                  </a:tcPr>
-                </a:tc>
-                <a:tc>
-                  <a:txBody>
-                    <a:bodyPr/>
-                    <a:lstStyle/>
-                    <a:p>
-                      <a:pPr indent="0" lvl="0" marL="0" rtl="0" algn="ctr">
-                        <a:spcBef>
-                          <a:spcPts val="0"/>
-                        </a:spcBef>
-                        <a:spcAft>
-                          <a:spcPts val="0"/>
-                        </a:spcAft>
-                        <a:buNone/>
-                      </a:pPr>
-                      <a:r>
-                        <a:rPr b="1" lang="en">
-                          <a:solidFill>
-                            <a:schemeClr val="lt1"/>
-                          </a:solidFill>
-                        </a:rPr>
-                        <a:t>KOLL</a:t>
-                      </a:r>
-                      <a:endParaRPr b="1">
-                        <a:solidFill>
-                          <a:schemeClr val="lt1"/>
-                        </a:solidFill>
-                      </a:endParaRPr>
-                    </a:p>
-                  </a:txBody>
-                  <a:tcPr marT="91425" marB="91425" marR="91425" marL="91425" anchor="ctr">
-                    <a:lnL cap="flat" cmpd="sng" w="38100">
-                      <a:solidFill>
-                        <a:schemeClr val="lt1"/>
-                      </a:solidFill>
-                      <a:prstDash val="solid"/>
-                      <a:round/>
-                      <a:headEnd len="sm" w="sm" type="none"/>
-                      <a:tailEnd len="sm" w="sm" type="none"/>
-                    </a:lnL>
-                    <a:lnR cap="flat" cmpd="sng" w="38100">
-                      <a:solidFill>
-                        <a:schemeClr val="lt1"/>
-                      </a:solidFill>
-                      <a:prstDash val="solid"/>
-                      <a:round/>
-                      <a:headEnd len="sm" w="sm" type="none"/>
-                      <a:tailEnd len="sm" w="sm" type="none"/>
-                    </a:lnR>
-                    <a:lnT cap="flat" cmpd="sng" w="38100">
-                      <a:solidFill>
-                        <a:schemeClr val="lt1"/>
-                      </a:solidFill>
-                      <a:prstDash val="solid"/>
-                      <a:round/>
-                      <a:headEnd len="sm" w="sm" type="none"/>
-                      <a:tailEnd len="sm" w="sm" type="none"/>
-                    </a:lnT>
-                    <a:lnB cap="flat" cmpd="sng" w="38100">
-                      <a:solidFill>
-                        <a:schemeClr val="lt1"/>
-                      </a:solidFill>
-                      <a:prstDash val="solid"/>
-                      <a:round/>
-                      <a:headEnd len="sm" w="sm" type="none"/>
-                      <a:tailEnd len="sm" w="sm" type="none"/>
-                    </a:lnB>
-                    <a:solidFill>
-                      <a:schemeClr val="dk2"/>
-                    </a:solidFill>
-                  </a:tcPr>
-                </a:tc>
+                <a:tc hMerge="1"/>
+                <a:tc hMerge="1"/>
+                <a:tc hMerge="1"/>
               </a:tr>
             </a:tbl>
           </a:graphicData>
@@ -15178,7 +12437,7 @@
             <a:tbl>
               <a:tblPr>
                 <a:noFill/>
-                <a:tableStyleId>{FBE28AA6-2891-4B8B-83EB-426D49BFAAA5}</a:tableStyleId>
+                <a:tableStyleId>{8602C2C5-D920-434D-A42E-D2763E1DA5D8}</a:tableStyleId>
               </a:tblPr>
               <a:tblGrid>
                 <a:gridCol w="1432575"/>
@@ -17061,7 +14320,7 @@
             <a:tbl>
               <a:tblPr>
                 <a:noFill/>
-                <a:tableStyleId>{FBE28AA6-2891-4B8B-83EB-426D49BFAAA5}</a:tableStyleId>
+                <a:tableStyleId>{8602C2C5-D920-434D-A42E-D2763E1DA5D8}</a:tableStyleId>
               </a:tblPr>
               <a:tblGrid>
                 <a:gridCol w="1432550"/>
@@ -19463,7 +16722,7 @@
             </a:pPr>
             <a:r>
               <a:rPr lang="en"/>
-              <a:t>Open source compliance with</a:t>
+              <a:t>Open source compliance</a:t>
             </a:r>
             <a:endParaRPr/>
           </a:p>
@@ -19480,7 +16739,7 @@
             </a:pPr>
             <a:r>
               <a:rPr lang="en"/>
-              <a:t>Licenses and</a:t>
+              <a:t>SBOM management</a:t>
             </a:r>
             <a:endParaRPr/>
           </a:p>
@@ -19497,7 +16756,24 @@
             </a:pPr>
             <a:r>
               <a:rPr lang="en"/>
-              <a:t>Regulation</a:t>
+              <a:t>License compliance</a:t>
+            </a:r>
+            <a:endParaRPr/>
+          </a:p>
+          <a:p>
+            <a:pPr indent="-342900" lvl="0" marL="457200" rtl="0" algn="l">
+              <a:spcBef>
+                <a:spcPts val="0"/>
+              </a:spcBef>
+              <a:spcAft>
+                <a:spcPts val="0"/>
+              </a:spcAft>
+              <a:buSzPts val="1800"/>
+              <a:buChar char="●"/>
+            </a:pPr>
+            <a:r>
+              <a:rPr lang="en"/>
+              <a:t>Regulatory compliance</a:t>
             </a:r>
             <a:endParaRPr/>
           </a:p>
@@ -19635,7 +16911,7 @@
             </a:pPr>
             <a:r>
               <a:rPr lang="en"/>
-              <a:t>The Scope of Open Source Compliance</a:t>
+              <a:t>Lecture Overview</a:t>
             </a:r>
             <a:endParaRPr/>
           </a:p>
@@ -19644,6 +16920,94 @@
       <p:sp>
         <p:nvSpPr>
           <p:cNvPr id="109" name="Google Shape;109;p16"/>
+          <p:cNvSpPr txBox="1"/>
+          <p:nvPr>
+            <p:ph idx="1" type="body"/>
+          </p:nvPr>
+        </p:nvSpPr>
+        <p:spPr>
+          <a:xfrm>
+            <a:off x="274320" y="914400"/>
+            <a:ext cx="8595300" cy="4114800"/>
+          </a:xfrm>
+          <a:prstGeom prst="rect">
+            <a:avLst/>
+          </a:prstGeom>
+        </p:spPr>
+        <p:txBody>
+          <a:bodyPr anchorCtr="0" anchor="t" bIns="0" lIns="0" spcFirstLastPara="1" rIns="0" wrap="square" tIns="0">
+            <a:noAutofit/>
+          </a:bodyPr>
+          <a:lstStyle/>
+          <a:p>
+            <a:pPr indent="0" lvl="0" marL="0" rtl="0" algn="l">
+              <a:spcBef>
+                <a:spcPts val="0"/>
+              </a:spcBef>
+              <a:spcAft>
+                <a:spcPts val="0"/>
+              </a:spcAft>
+              <a:buNone/>
+            </a:pPr>
+            <a:r>
+              <a:rPr lang="en"/>
+              <a:t>Introduction (lecture 1, today)</a:t>
+            </a:r>
+            <a:endParaRPr/>
+          </a:p>
+          <a:p>
+            <a:pPr indent="0" lvl="0" marL="0" rtl="0" algn="l">
+              <a:spcBef>
+                <a:spcPts val="1200"/>
+              </a:spcBef>
+              <a:spcAft>
+                <a:spcPts val="0"/>
+              </a:spcAft>
+              <a:buNone/>
+            </a:pPr>
+            <a:r>
+              <a:rPr lang="en"/>
+              <a:t>SBOM management (lectures 2-4)</a:t>
+            </a:r>
+            <a:endParaRPr/>
+          </a:p>
+          <a:p>
+            <a:pPr indent="0" lvl="0" marL="0" rtl="0" algn="l">
+              <a:spcBef>
+                <a:spcPts val="1200"/>
+              </a:spcBef>
+              <a:spcAft>
+                <a:spcPts val="0"/>
+              </a:spcAft>
+              <a:buNone/>
+            </a:pPr>
+            <a:r>
+              <a:rPr lang="en"/>
+              <a:t>License compliance (lectures 5-9)</a:t>
+            </a:r>
+            <a:endParaRPr/>
+          </a:p>
+          <a:p>
+            <a:pPr indent="0" lvl="0" marL="0" rtl="0" algn="l">
+              <a:spcBef>
+                <a:spcPts val="1200"/>
+              </a:spcBef>
+              <a:spcAft>
+                <a:spcPts val="1200"/>
+              </a:spcAft>
+              <a:buNone/>
+            </a:pPr>
+            <a:r>
+              <a:rPr lang="en"/>
+              <a:t>Regulatory compliance (lectures 10-end)</a:t>
+            </a:r>
+            <a:endParaRPr/>
+          </a:p>
+        </p:txBody>
+      </p:sp>
+      <p:sp>
+        <p:nvSpPr>
+          <p:cNvPr id="110" name="Google Shape;110;p16"/>
           <p:cNvSpPr txBox="1"/>
           <p:nvPr>
             <p:ph idx="12" type="sldNum"/>
@@ -19714,34 +17078,6 @@
           </a:p>
         </p:txBody>
       </p:sp>
-      <p:pic>
-        <p:nvPicPr>
-          <p:cNvPr id="110" name="Google Shape;110;p16"/>
-          <p:cNvPicPr preferRelativeResize="0"/>
-          <p:nvPr/>
-        </p:nvPicPr>
-        <p:blipFill>
-          <a:blip r:embed="rId4">
-            <a:alphaModFix/>
-          </a:blip>
-          <a:stretch>
-            <a:fillRect/>
-          </a:stretch>
-        </p:blipFill>
-        <p:spPr>
-          <a:xfrm>
-            <a:off x="274320" y="914400"/>
-            <a:ext cx="8595360" cy="3504997"/>
-          </a:xfrm>
-          <a:prstGeom prst="rect">
-            <a:avLst/>
-          </a:prstGeom>
-          <a:noFill/>
-          <a:ln>
-            <a:noFill/>
-          </a:ln>
-        </p:spPr>
-      </p:pic>
     </p:spTree>
   </p:cSld>
   <p:clrMapOvr>
